--- a/slides/physical-ai-workshop-berlin.pptx
+++ b/slides/physical-ai-workshop-berlin.pptx
@@ -19003,7 +19003,7 @@
                 </a:solidFill>
                 <a:latin typeface="Menlo"/>
               </a:rPr>
-              <a:t>demo.fiftyone.ai · Droid frames (5,172 frames)</a:t>
+              <a:t>demo.fiftyone.ai · Droid workshop frames (5,172 frames)</a:t>
             </a:r>
           </a:p>
         </p:txBody>

--- a/slides/physical-ai-workshop-berlin.pptx
+++ b/slides/physical-ai-workshop-berlin.pptx
@@ -31,6 +31,7 @@
     <p:sldId id="279" r:id="rId31"/>
     <p:sldId id="280" r:id="rId32"/>
     <p:sldId id="281" r:id="rId33"/>
+    <p:sldId id="282" r:id="rId34"/>
   </p:sldIdLst>
   <p:sldSz cx="12191695" cy="6858000" type="screen4x3"/>
   <p:notesSz cx="6858000" cy="9144000"/>
@@ -947,7 +948,7 @@
           <a:lstStyle/>
           <a:p>
             <a:r>
-              <a:t>SUBMIT THE JOB before this slide (during segment 4 Q&amp;A). Show presenter/train_on_nebius.ipynb: export cell, upload, submit → job id → Nebius console AI Jobs page → poll states. While it trains: the job spec slide. If late, weights/best-dryrun.pt is the fallback and you say so.</a:t>
+              <a:t>END OF PART ONE. The Nebius job was submitted during the embeddings segment; say so: 'a GPU in Finland is training while we listen to the talks.' Repo QR stays up through the break.</a:t>
             </a:r>
           </a:p>
         </p:txBody>
@@ -1017,7 +1018,7 @@
           <a:lstStyle/>
           <a:p>
             <a:r>
-              <a:t>This is the whole job. No orchestrator, no plugin: SDK call, container, bucket.</a:t>
+              <a:t>SUBMIT THE JOB before this slide (during segment 4 Q&amp;A). Show presenter/train_on_nebius.ipynb: export cell, upload, submit → job id → Nebius console AI Jobs page → poll states. While it trains: the job spec slide. If late, weights/best-dryrun.pt is the fallback and you say so.</a:t>
             </a:r>
           </a:p>
         </p:txBody>
@@ -1087,7 +1088,7 @@
           <a:lstStyle/>
           <a:p>
             <a:r>
-              <a:t>Model Evaluation panel: click the confusion-matrix cells. Then sort val by eval_yolo_fp. Then the missed grippers — what does the model not see, and which episodes.</a:t>
+              <a:t>This is the whole job. No orchestrator, no plugin: SDK call, container, bucket.</a:t>
             </a:r>
           </a:p>
         </p:txBody>
@@ -1157,7 +1158,7 @@
           <a:lstStyle/>
           <a:p>
             <a:r>
-              <a:t>06 notebook: intervals_from_predictions → brick-visible tags → open an episode: grasp / release / brick-visible rows on the timeline. Rank episodes by mean gripper confidence. Then the flywheel sentence.</a:t>
+              <a:t>Model Evaluation panel: click the confusion-matrix cells. Then sort val by eval_yolo_fp. Then the missed grippers — what does the model not see, and which episodes.</a:t>
             </a:r>
           </a:p>
         </p:txBody>
@@ -1227,7 +1228,7 @@
           <a:lstStyle/>
           <a:p>
             <a:r>
-              <a:t>Payoff. Every step mapped to what a production team does. Flywheel: the next collection run gets curated with the views and tags saved today.</a:t>
+              <a:t>06 notebook: intervals_from_predictions → brick-visible tags → open an episode: grasp / release / brick-visible rows on the timeline. Rank episodes by mean gripper confidence. Then the flywheel sentence.</a:t>
             </a:r>
           </a:p>
         </p:txBody>
@@ -1367,7 +1368,7 @@
           <a:lstStyle/>
           <a:p>
             <a:r>
-              <a:t>Two CTAs, in this order: FiftyOne on your own recordings (self-serve QR), then Nebius hands over.</a:t>
+              <a:t>Payoff. Every step mapped to what a production team does. Flywheel: the next collection run gets curated with the views and tags saved today.</a:t>
             </a:r>
           </a:p>
         </p:txBody>
@@ -1437,7 +1438,7 @@
           <a:lstStyle/>
           <a:p>
             <a:r>
-              <a:t>Hand over to Nebius. If Nebius has no speaker at this stop, present 22–25 yourself; content is theirs.</a:t>
+              <a:t>Two CTAs, in this order: FiftyOne on your own recordings (self-serve QR), then Nebius hands over.</a:t>
             </a:r>
           </a:p>
         </p:txBody>
@@ -1507,7 +1508,7 @@
           <a:lstStyle/>
           <a:p>
             <a:r>
-              <a:t>From the Nebius H2 plan. Serverless is what we used. Token Factory is where the labeler VLMs live.</a:t>
+              <a:t>Hand over to Nebius. If Nebius has no speaker at this stop, present 22–25 yourself; content is theirs.</a:t>
             </a:r>
           </a:p>
         </p:txBody>
@@ -1577,7 +1578,7 @@
           <a:lstStyle/>
           <a:p>
             <a:r>
-              <a:t>Concrete: where Token Factory plugs into the loop we just ran.</a:t>
+              <a:t>From the Nebius H2 plan. Serverless is what we used. Token Factory is where the labeler VLMs live.</a:t>
             </a:r>
           </a:p>
         </p:txBody>
@@ -1647,7 +1648,7 @@
           <a:lstStyle/>
           <a:p>
             <a:r>
-              <a:t>Nebius's recurring format. If they announced dates, add them here.</a:t>
+              <a:t>Concrete: where Token Factory plugs into the loop we just ran.</a:t>
             </a:r>
           </a:p>
         </p:txBody>
@@ -1717,7 +1718,7 @@
           <a:lstStyle/>
           <a:p>
             <a:r>
-              <a:t>THE CTA. QR goes to link.voxel51.com/nebius-berlin which prefills the form with this event. Ask everyone to scan now, not later; it takes name, email, company, GitHub. Goal is 500 sign-ups across the roadshow.</a:t>
+              <a:t>Nebius's recurring format. If they announced dates, add them here.</a:t>
             </a:r>
           </a:p>
         </p:txBody>
@@ -1743,6 +1744,76 @@
 </file>
 
 <file path=ppt/notesSlides/notesSlide26.xml><?xml version="1.0" encoding="utf-8"?>
+<p:notes xmlns:a="http://schemas.openxmlformats.org/drawingml/2006/main" xmlns:p="http://schemas.openxmlformats.org/presentationml/2006/main" xmlns:r="http://schemas.openxmlformats.org/officeDocument/2006/relationships">
+  <p:cSld>
+    <p:spTree>
+      <p:nvGrpSpPr>
+        <p:cNvPr id="1" name=""/>
+        <p:cNvGrpSpPr/>
+        <p:nvPr/>
+      </p:nvGrpSpPr>
+      <p:grpSpPr>
+        <a:xfrm>
+          <a:off x="0" y="0"/>
+          <a:ext cx="0" cy="0"/>
+          <a:chOff x="0" y="0"/>
+          <a:chExt cx="0" cy="0"/>
+        </a:xfrm>
+      </p:grpSpPr>
+      <p:sp>
+        <p:nvSpPr>
+          <p:cNvPr id="2" name="Slide Image Placeholder 1"/>
+          <p:cNvSpPr>
+            <a:spLocks noGrp="1"/>
+          </p:cNvSpPr>
+          <p:nvPr>
+            <p:ph type="sldImg" idx="2"/>
+          </p:nvPr>
+        </p:nvSpPr>
+        <p:spPr/>
+      </p:sp>
+      <p:sp>
+        <p:nvSpPr>
+          <p:cNvPr id="3" name="Notes Placeholder 2"/>
+          <p:cNvSpPr>
+            <a:spLocks noGrp="1"/>
+          </p:cNvSpPr>
+          <p:nvPr>
+            <p:ph type="body" idx="3" sz="quarter"/>
+          </p:nvPr>
+        </p:nvSpPr>
+        <p:spPr/>
+        <p:txBody>
+          <a:bodyPr/>
+          <a:lstStyle/>
+          <a:p>
+            <a:r>
+              <a:t>THE CTA. QR goes to link.voxel51.com/nebius-berlin which prefills the form with this event. Ask everyone to scan now, not later; it takes name, email, company, GitHub. Goal is 500 sign-ups across the roadshow.</a:t>
+            </a:r>
+          </a:p>
+        </p:txBody>
+      </p:sp>
+      <p:sp>
+        <p:nvSpPr>
+          <p:cNvPr id="4" name="Slide Number Placeholder 3"/>
+          <p:cNvSpPr>
+            <a:spLocks noGrp="1"/>
+          </p:cNvSpPr>
+          <p:nvPr>
+            <p:ph type="sldNum" idx="5" sz="quarter"/>
+          </p:nvPr>
+        </p:nvSpPr>
+        <p:spPr/>
+      </p:sp>
+    </p:spTree>
+  </p:cSld>
+  <p:clrMapOvr>
+    <a:masterClrMapping/>
+  </p:clrMapOvr>
+</p:notes>
+</file>
+
+<file path=ppt/notesSlides/notesSlide27.xml><?xml version="1.0" encoding="utf-8"?>
 <p:notes xmlns:a="http://schemas.openxmlformats.org/drawingml/2006/main" xmlns:p="http://schemas.openxmlformats.org/presentationml/2006/main" xmlns:r="http://schemas.openxmlformats.org/officeDocument/2006/relationships">
   <p:cSld>
     <p:spTree>
@@ -8441,55 +8512,35 @@
       </p:sp>
       <p:sp>
         <p:nvSpPr>
-          <p:cNvPr id="4" name="Rounded Rectangle 3"/>
-          <p:cNvSpPr/>
-          <p:nvPr/>
-        </p:nvSpPr>
-        <p:spPr>
-          <a:xfrm>
-            <a:off x="822960" y="822960"/>
-            <a:ext cx="1562100" cy="685800"/>
-          </a:xfrm>
-          <a:prstGeom prst="roundRect">
-            <a:avLst>
-              <a:gd name="adj" fmla="val 20000"/>
-            </a:avLst>
-          </a:prstGeom>
-          <a:solidFill>
-            <a:srgbClr val="141A22"/>
-          </a:solidFill>
-          <a:ln>
-            <a:solidFill>
-              <a:srgbClr val="232A38"/>
-            </a:solidFill>
-          </a:ln>
-        </p:spPr>
-        <p:style>
-          <a:lnRef idx="1">
-            <a:schemeClr val="accent1"/>
-          </a:lnRef>
-          <a:fillRef idx="3">
-            <a:schemeClr val="accent1"/>
-          </a:fillRef>
-          <a:effectRef idx="2">
-            <a:schemeClr val="accent1"/>
-          </a:effectRef>
-          <a:fontRef idx="minor">
-            <a:schemeClr val="lt1"/>
-          </a:fontRef>
-        </p:style>
-        <p:txBody>
-          <a:bodyPr rtlCol="0" anchor="ctr"/>
-          <a:lstStyle/>
-          <a:p>
-            <a:pPr algn="ctr"/>
-            <a:r>
-              <a:rPr sz="1800" b="1">
-                <a:solidFill>
-                  <a:srgbClr val="F2F4F7"/>
-                </a:solidFill>
-              </a:rPr>
-              <a:t>see</a:t>
+          <p:cNvPr id="4" name="TextBox 3"/>
+          <p:cNvSpPr txBox="1"/>
+          <p:nvPr/>
+        </p:nvSpPr>
+        <p:spPr>
+          <a:xfrm>
+            <a:off x="822960" y="502920"/>
+            <a:ext cx="7315200" cy="365760"/>
+          </a:xfrm>
+          <a:prstGeom prst="rect">
+            <a:avLst/>
+          </a:prstGeom>
+          <a:noFill/>
+        </p:spPr>
+        <p:txBody>
+          <a:bodyPr wrap="square" anchor="t">
+            <a:spAutoFit/>
+          </a:bodyPr>
+          <a:lstStyle/>
+          <a:p>
+            <a:pPr algn="l"/>
+            <a:r>
+              <a:rPr sz="1300" b="1">
+                <a:solidFill>
+                  <a:srgbClr val="FF6D04"/>
+                </a:solidFill>
+                <a:latin typeface="Helvetica Neue"/>
+              </a:rPr>
+              <a:t>PART ONE DONE</a:t>
             </a:r>
           </a:p>
         </p:txBody>
@@ -8502,8 +8553,8 @@
         </p:nvSpPr>
         <p:spPr>
           <a:xfrm>
-            <a:off x="2339340" y="960120"/>
-            <a:ext cx="320040" cy="457200"/>
+            <a:off x="822960" y="1554480"/>
+            <a:ext cx="10515600" cy="1280160"/>
           </a:xfrm>
           <a:prstGeom prst="rect">
             <a:avLst/>
@@ -8516,84 +8567,29 @@
           </a:bodyPr>
           <a:lstStyle/>
           <a:p>
-            <a:pPr algn="ctr"/>
-            <a:r>
-              <a:rPr sz="2200" b="0">
-                <a:solidFill>
-                  <a:srgbClr val="9AA4B2"/>
-                </a:solidFill>
-                <a:latin typeface="Helvetica Neue"/>
-              </a:rPr>
-              <a:t>›</a:t>
-            </a:r>
-          </a:p>
-        </p:txBody>
-      </p:sp>
-      <p:sp>
-        <p:nvSpPr>
-          <p:cNvPr id="6" name="Rounded Rectangle 5"/>
-          <p:cNvSpPr/>
-          <p:nvPr/>
-        </p:nvSpPr>
-        <p:spPr>
-          <a:xfrm>
-            <a:off x="2613660" y="822960"/>
-            <a:ext cx="1562100" cy="685800"/>
-          </a:xfrm>
-          <a:prstGeom prst="roundRect">
-            <a:avLst>
-              <a:gd name="adj" fmla="val 20000"/>
-            </a:avLst>
-          </a:prstGeom>
-          <a:solidFill>
-            <a:srgbClr val="141A22"/>
-          </a:solidFill>
-          <a:ln>
-            <a:solidFill>
-              <a:srgbClr val="232A38"/>
-            </a:solidFill>
-          </a:ln>
-        </p:spPr>
-        <p:style>
-          <a:lnRef idx="1">
-            <a:schemeClr val="accent1"/>
-          </a:lnRef>
-          <a:fillRef idx="3">
-            <a:schemeClr val="accent1"/>
-          </a:fillRef>
-          <a:effectRef idx="2">
-            <a:schemeClr val="accent1"/>
-          </a:effectRef>
-          <a:fontRef idx="minor">
-            <a:schemeClr val="lt1"/>
-          </a:fontRef>
-        </p:style>
-        <p:txBody>
-          <a:bodyPr rtlCol="0" anchor="ctr"/>
-          <a:lstStyle/>
-          <a:p>
-            <a:pPr algn="ctr"/>
-            <a:r>
-              <a:rPr sz="1800" b="1">
+            <a:pPr algn="l"/>
+            <a:r>
+              <a:rPr sz="5400" b="1">
                 <a:solidFill>
                   <a:srgbClr val="F2F4F7"/>
                 </a:solidFill>
-              </a:rPr>
-              <a:t>curate</a:t>
-            </a:r>
-          </a:p>
-        </p:txBody>
-      </p:sp>
-      <p:sp>
-        <p:nvSpPr>
-          <p:cNvPr id="7" name="TextBox 6"/>
+                <a:latin typeface="Helvetica Neue"/>
+              </a:rPr>
+              <a:t>Lightning talks. Then we train.</a:t>
+            </a:r>
+          </a:p>
+        </p:txBody>
+      </p:sp>
+      <p:sp>
+        <p:nvSpPr>
+          <p:cNvPr id="6" name="TextBox 5"/>
           <p:cNvSpPr txBox="1"/>
           <p:nvPr/>
         </p:nvSpPr>
         <p:spPr>
           <a:xfrm>
-            <a:off x="4130040" y="960120"/>
-            <a:ext cx="320040" cy="457200"/>
+            <a:off x="822960" y="3108960"/>
+            <a:ext cx="6949440" cy="3291840"/>
           </a:xfrm>
           <a:prstGeom prst="rect">
             <a:avLst/>
@@ -8606,84 +8602,143 @@
           </a:bodyPr>
           <a:lstStyle/>
           <a:p>
-            <a:pPr algn="ctr"/>
-            <a:r>
-              <a:rPr sz="2200" b="0">
+            <a:pPr algn="l">
+              <a:spcAft>
+                <a:spcPts val="1200"/>
+              </a:spcAft>
+            </a:pPr>
+            <a:r>
+              <a:rPr sz="2100" b="1">
+                <a:solidFill>
+                  <a:srgbClr val="FF6D04"/>
+                </a:solidFill>
+                <a:latin typeface="Helvetica Neue"/>
+              </a:rPr>
+              <a:t>•  </a:t>
+            </a:r>
+            <a:r>
+              <a:rPr sz="2100" b="1">
+                <a:solidFill>
+                  <a:srgbClr val="F2F4F7"/>
+                </a:solidFill>
+                <a:latin typeface="Helvetica Neue"/>
+              </a:rPr>
+              <a:t>Right now on Nebius </a:t>
+            </a:r>
+            <a:r>
+              <a:rPr sz="2100" b="0">
                 <a:solidFill>
                   <a:srgbClr val="9AA4B2"/>
                 </a:solidFill>
                 <a:latin typeface="Helvetica Neue"/>
               </a:rPr>
-              <a:t>›</a:t>
-            </a:r>
-          </a:p>
-        </p:txBody>
-      </p:sp>
-      <p:sp>
-        <p:nvSpPr>
-          <p:cNvPr id="8" name="Rounded Rectangle 7"/>
-          <p:cNvSpPr/>
-          <p:nvPr/>
-        </p:nvSpPr>
-        <p:spPr>
-          <a:xfrm>
-            <a:off x="4404360" y="822960"/>
-            <a:ext cx="1562100" cy="685800"/>
-          </a:xfrm>
-          <a:prstGeom prst="roundRect">
-            <a:avLst>
-              <a:gd name="adj" fmla="val 20000"/>
-            </a:avLst>
-          </a:prstGeom>
-          <a:solidFill>
-            <a:srgbClr val="141A22"/>
-          </a:solidFill>
-          <a:ln>
-            <a:solidFill>
-              <a:srgbClr val="232A38"/>
-            </a:solidFill>
-          </a:ln>
-        </p:spPr>
-        <p:style>
-          <a:lnRef idx="1">
-            <a:schemeClr val="accent1"/>
-          </a:lnRef>
-          <a:fillRef idx="3">
-            <a:schemeClr val="accent1"/>
-          </a:fillRef>
-          <a:effectRef idx="2">
-            <a:schemeClr val="accent1"/>
-          </a:effectRef>
-          <a:fontRef idx="minor">
-            <a:schemeClr val="lt1"/>
-          </a:fontRef>
-        </p:style>
-        <p:txBody>
-          <a:bodyPr rtlCol="0" anchor="ctr"/>
-          <a:lstStyle/>
-          <a:p>
-            <a:pPr algn="ctr"/>
-            <a:r>
-              <a:rPr sz="1800" b="1">
+              <a:t>— YOLO11n is fine-tuning on the frames we just labeled (L40S, 15 epochs, ~10 min)</a:t>
+            </a:r>
+          </a:p>
+          <a:p>
+            <a:pPr algn="l">
+              <a:spcAft>
+                <a:spcPts val="1200"/>
+              </a:spcAft>
+            </a:pPr>
+            <a:r>
+              <a:rPr sz="2100" b="1">
+                <a:solidFill>
+                  <a:srgbClr val="FF6D04"/>
+                </a:solidFill>
+                <a:latin typeface="Helvetica Neue"/>
+              </a:rPr>
+              <a:t>•  </a:t>
+            </a:r>
+            <a:r>
+              <a:rPr sz="2100" b="1">
                 <a:solidFill>
                   <a:srgbClr val="F2F4F7"/>
                 </a:solidFill>
-              </a:rPr>
-              <a:t>embed</a:t>
-            </a:r>
-          </a:p>
-        </p:txBody>
-      </p:sp>
-      <p:sp>
-        <p:nvSpPr>
-          <p:cNvPr id="9" name="TextBox 8"/>
+                <a:latin typeface="Helvetica Neue"/>
+              </a:rPr>
+              <a:t>Part two </a:t>
+            </a:r>
+            <a:r>
+              <a:rPr sz="2100" b="0">
+                <a:solidFill>
+                  <a:srgbClr val="9AA4B2"/>
+                </a:solidFill>
+                <a:latin typeface="Helvetica Neue"/>
+              </a:rPr>
+              <a:t>— pull the weights, evaluate, put detections back on the recording, then Nebius</a:t>
+            </a:r>
+          </a:p>
+          <a:p>
+            <a:pPr algn="l">
+              <a:spcAft>
+                <a:spcPts val="1200"/>
+              </a:spcAft>
+            </a:pPr>
+            <a:r>
+              <a:rPr sz="2100" b="1">
+                <a:solidFill>
+                  <a:srgbClr val="FF6D04"/>
+                </a:solidFill>
+                <a:latin typeface="Helvetica Neue"/>
+              </a:rPr>
+              <a:t>•  </a:t>
+            </a:r>
+            <a:r>
+              <a:rPr sz="2100" b="1">
+                <a:solidFill>
+                  <a:srgbClr val="F2F4F7"/>
+                </a:solidFill>
+                <a:latin typeface="Helvetica Neue"/>
+              </a:rPr>
+              <a:t>Catch up </a:t>
+            </a:r>
+            <a:r>
+              <a:rPr sz="2100" b="0">
+                <a:solidFill>
+                  <a:srgbClr val="9AA4B2"/>
+                </a:solidFill>
+                <a:latin typeface="Helvetica Neue"/>
+              </a:rPr>
+              <a:t>— notebooks 01–04 are what we did; 05–06 are next</a:t>
+            </a:r>
+          </a:p>
+        </p:txBody>
+      </p:sp>
+      <p:pic>
+        <p:nvPicPr>
+          <p:cNvPr id="7" name="Picture 6" descr="repo.png"/>
+          <p:cNvPicPr>
+            <a:picLocks noChangeAspect="1"/>
+          </p:cNvPicPr>
+          <p:nvPr/>
+        </p:nvPicPr>
+        <p:blipFill>
+          <a:blip r:embed="rId3"/>
+          <a:stretch>
+            <a:fillRect/>
+          </a:stretch>
+        </p:blipFill>
+        <p:spPr>
+          <a:xfrm>
+            <a:off x="8595360" y="2377440"/>
+            <a:ext cx="2560320" cy="2560320"/>
+          </a:xfrm>
+          <a:prstGeom prst="rect">
+            <a:avLst/>
+          </a:prstGeom>
+        </p:spPr>
+      </p:pic>
+      <p:sp>
+        <p:nvSpPr>
+          <p:cNvPr id="8" name="TextBox 7"/>
           <p:cNvSpPr txBox="1"/>
           <p:nvPr/>
         </p:nvSpPr>
         <p:spPr>
           <a:xfrm>
-            <a:off x="5920740" y="960120"/>
-            <a:ext cx="320040" cy="457200"/>
+            <a:off x="7619695" y="4983480"/>
+            <a:ext cx="4389120" cy="365760"/>
           </a:xfrm>
           <a:prstGeom prst="rect">
             <a:avLst/>
@@ -8698,489 +8753,13 @@
           <a:p>
             <a:pPr algn="ctr"/>
             <a:r>
-              <a:rPr sz="2200" b="0">
+              <a:rPr sz="1300" b="0">
                 <a:solidFill>
                   <a:srgbClr val="9AA4B2"/>
                 </a:solidFill>
-                <a:latin typeface="Helvetica Neue"/>
-              </a:rPr>
-              <a:t>›</a:t>
-            </a:r>
-          </a:p>
-        </p:txBody>
-      </p:sp>
-      <p:sp>
-        <p:nvSpPr>
-          <p:cNvPr id="10" name="Rounded Rectangle 9"/>
-          <p:cNvSpPr/>
-          <p:nvPr/>
-        </p:nvSpPr>
-        <p:spPr>
-          <a:xfrm>
-            <a:off x="6195060" y="822960"/>
-            <a:ext cx="1562100" cy="685800"/>
-          </a:xfrm>
-          <a:prstGeom prst="roundRect">
-            <a:avLst>
-              <a:gd name="adj" fmla="val 20000"/>
-            </a:avLst>
-          </a:prstGeom>
-          <a:solidFill>
-            <a:srgbClr val="141A22"/>
-          </a:solidFill>
-          <a:ln>
-            <a:solidFill>
-              <a:srgbClr val="232A38"/>
-            </a:solidFill>
-          </a:ln>
-        </p:spPr>
-        <p:style>
-          <a:lnRef idx="1">
-            <a:schemeClr val="accent1"/>
-          </a:lnRef>
-          <a:fillRef idx="3">
-            <a:schemeClr val="accent1"/>
-          </a:fillRef>
-          <a:effectRef idx="2">
-            <a:schemeClr val="accent1"/>
-          </a:effectRef>
-          <a:fontRef idx="minor">
-            <a:schemeClr val="lt1"/>
-          </a:fontRef>
-        </p:style>
-        <p:txBody>
-          <a:bodyPr rtlCol="0" anchor="ctr"/>
-          <a:lstStyle/>
-          <a:p>
-            <a:pPr algn="ctr"/>
-            <a:r>
-              <a:rPr sz="1800" b="1">
-                <a:solidFill>
-                  <a:srgbClr val="F2F4F7"/>
-                </a:solidFill>
-              </a:rPr>
-              <a:t>label</a:t>
-            </a:r>
-          </a:p>
-        </p:txBody>
-      </p:sp>
-      <p:sp>
-        <p:nvSpPr>
-          <p:cNvPr id="11" name="TextBox 10"/>
-          <p:cNvSpPr txBox="1"/>
-          <p:nvPr/>
-        </p:nvSpPr>
-        <p:spPr>
-          <a:xfrm>
-            <a:off x="7711440" y="960120"/>
-            <a:ext cx="320040" cy="457200"/>
-          </a:xfrm>
-          <a:prstGeom prst="rect">
-            <a:avLst/>
-          </a:prstGeom>
-          <a:noFill/>
-        </p:spPr>
-        <p:txBody>
-          <a:bodyPr wrap="square" anchor="t">
-            <a:spAutoFit/>
-          </a:bodyPr>
-          <a:lstStyle/>
-          <a:p>
-            <a:pPr algn="ctr"/>
-            <a:r>
-              <a:rPr sz="2200" b="0">
-                <a:solidFill>
-                  <a:srgbClr val="9AA4B2"/>
-                </a:solidFill>
-                <a:latin typeface="Helvetica Neue"/>
-              </a:rPr>
-              <a:t>›</a:t>
-            </a:r>
-          </a:p>
-        </p:txBody>
-      </p:sp>
-      <p:sp>
-        <p:nvSpPr>
-          <p:cNvPr id="12" name="Rounded Rectangle 11"/>
-          <p:cNvSpPr/>
-          <p:nvPr/>
-        </p:nvSpPr>
-        <p:spPr>
-          <a:xfrm>
-            <a:off x="7985760" y="822960"/>
-            <a:ext cx="1562100" cy="685800"/>
-          </a:xfrm>
-          <a:prstGeom prst="roundRect">
-            <a:avLst>
-              <a:gd name="adj" fmla="val 20000"/>
-            </a:avLst>
-          </a:prstGeom>
-          <a:solidFill>
-            <a:srgbClr val="FF6D04"/>
-          </a:solidFill>
-          <a:ln>
-            <a:solidFill>
-              <a:srgbClr val="FF6D04"/>
-            </a:solidFill>
-          </a:ln>
-        </p:spPr>
-        <p:style>
-          <a:lnRef idx="1">
-            <a:schemeClr val="accent1"/>
-          </a:lnRef>
-          <a:fillRef idx="3">
-            <a:schemeClr val="accent1"/>
-          </a:fillRef>
-          <a:effectRef idx="2">
-            <a:schemeClr val="accent1"/>
-          </a:effectRef>
-          <a:fontRef idx="minor">
-            <a:schemeClr val="lt1"/>
-          </a:fontRef>
-        </p:style>
-        <p:txBody>
-          <a:bodyPr rtlCol="0" anchor="ctr"/>
-          <a:lstStyle/>
-          <a:p>
-            <a:pPr algn="ctr"/>
-            <a:r>
-              <a:rPr sz="1800" b="1">
-                <a:solidFill>
-                  <a:srgbClr val="0B0F14"/>
-                </a:solidFill>
-              </a:rPr>
-              <a:t>train</a:t>
-            </a:r>
-          </a:p>
-        </p:txBody>
-      </p:sp>
-      <p:sp>
-        <p:nvSpPr>
-          <p:cNvPr id="13" name="TextBox 12"/>
-          <p:cNvSpPr txBox="1"/>
-          <p:nvPr/>
-        </p:nvSpPr>
-        <p:spPr>
-          <a:xfrm>
-            <a:off x="9502140" y="960120"/>
-            <a:ext cx="320040" cy="457200"/>
-          </a:xfrm>
-          <a:prstGeom prst="rect">
-            <a:avLst/>
-          </a:prstGeom>
-          <a:noFill/>
-        </p:spPr>
-        <p:txBody>
-          <a:bodyPr wrap="square" anchor="t">
-            <a:spAutoFit/>
-          </a:bodyPr>
-          <a:lstStyle/>
-          <a:p>
-            <a:pPr algn="ctr"/>
-            <a:r>
-              <a:rPr sz="2200" b="0">
-                <a:solidFill>
-                  <a:srgbClr val="9AA4B2"/>
-                </a:solidFill>
-                <a:latin typeface="Helvetica Neue"/>
-              </a:rPr>
-              <a:t>›</a:t>
-            </a:r>
-          </a:p>
-        </p:txBody>
-      </p:sp>
-      <p:sp>
-        <p:nvSpPr>
-          <p:cNvPr id="14" name="Rounded Rectangle 13"/>
-          <p:cNvSpPr/>
-          <p:nvPr/>
-        </p:nvSpPr>
-        <p:spPr>
-          <a:xfrm>
-            <a:off x="9776460" y="822960"/>
-            <a:ext cx="1562100" cy="685800"/>
-          </a:xfrm>
-          <a:prstGeom prst="roundRect">
-            <a:avLst>
-              <a:gd name="adj" fmla="val 20000"/>
-            </a:avLst>
-          </a:prstGeom>
-          <a:solidFill>
-            <a:srgbClr val="141A22"/>
-          </a:solidFill>
-          <a:ln>
-            <a:solidFill>
-              <a:srgbClr val="232A38"/>
-            </a:solidFill>
-          </a:ln>
-        </p:spPr>
-        <p:style>
-          <a:lnRef idx="1">
-            <a:schemeClr val="accent1"/>
-          </a:lnRef>
-          <a:fillRef idx="3">
-            <a:schemeClr val="accent1"/>
-          </a:fillRef>
-          <a:effectRef idx="2">
-            <a:schemeClr val="accent1"/>
-          </a:effectRef>
-          <a:fontRef idx="minor">
-            <a:schemeClr val="lt1"/>
-          </a:fontRef>
-        </p:style>
-        <p:txBody>
-          <a:bodyPr rtlCol="0" anchor="ctr"/>
-          <a:lstStyle/>
-          <a:p>
-            <a:pPr algn="ctr"/>
-            <a:r>
-              <a:rPr sz="1800" b="1">
-                <a:solidFill>
-                  <a:srgbClr val="F2F4F7"/>
-                </a:solidFill>
-              </a:rPr>
-              <a:t>evaluate</a:t>
-            </a:r>
-          </a:p>
-        </p:txBody>
-      </p:sp>
-      <p:sp>
-        <p:nvSpPr>
-          <p:cNvPr id="15" name="TextBox 14"/>
-          <p:cNvSpPr txBox="1"/>
-          <p:nvPr/>
-        </p:nvSpPr>
-        <p:spPr>
-          <a:xfrm>
-            <a:off x="822960" y="2377440"/>
-            <a:ext cx="10515600" cy="457200"/>
-          </a:xfrm>
-          <a:prstGeom prst="rect">
-            <a:avLst/>
-          </a:prstGeom>
-          <a:noFill/>
-        </p:spPr>
-        <p:txBody>
-          <a:bodyPr wrap="square" anchor="t">
-            <a:spAutoFit/>
-          </a:bodyPr>
-          <a:lstStyle/>
-          <a:p>
-            <a:pPr algn="l"/>
-            <a:r>
-              <a:rPr sz="1600" b="1">
-                <a:solidFill>
-                  <a:srgbClr val="FF6D04"/>
-                </a:solidFill>
                 <a:latin typeface="Menlo"/>
               </a:rPr>
-              <a:t>75–95 min</a:t>
-            </a:r>
-          </a:p>
-        </p:txBody>
-      </p:sp>
-      <p:sp>
-        <p:nvSpPr>
-          <p:cNvPr id="16" name="TextBox 15"/>
-          <p:cNvSpPr txBox="1"/>
-          <p:nvPr/>
-        </p:nvSpPr>
-        <p:spPr>
-          <a:xfrm>
-            <a:off x="822960" y="2743200"/>
-            <a:ext cx="10515600" cy="1188720"/>
-          </a:xfrm>
-          <a:prstGeom prst="rect">
-            <a:avLst/>
-          </a:prstGeom>
-          <a:noFill/>
-        </p:spPr>
-        <p:txBody>
-          <a:bodyPr wrap="square" anchor="t">
-            <a:spAutoFit/>
-          </a:bodyPr>
-          <a:lstStyle/>
-          <a:p>
-            <a:pPr algn="l"/>
-            <a:r>
-              <a:rPr sz="5400" b="1">
-                <a:solidFill>
-                  <a:srgbClr val="F2F4F7"/>
-                </a:solidFill>
-                <a:latin typeface="Helvetica Neue"/>
-              </a:rPr>
-              <a:t>Fine-tune YOLO11n on Nebius</a:t>
-            </a:r>
-          </a:p>
-        </p:txBody>
-      </p:sp>
-      <p:sp>
-        <p:nvSpPr>
-          <p:cNvPr id="17" name="TextBox 16"/>
-          <p:cNvSpPr txBox="1"/>
-          <p:nvPr/>
-        </p:nvSpPr>
-        <p:spPr>
-          <a:xfrm>
-            <a:off x="822960" y="4023360"/>
-            <a:ext cx="10515600" cy="822960"/>
-          </a:xfrm>
-          <a:prstGeom prst="rect">
-            <a:avLst/>
-          </a:prstGeom>
-          <a:noFill/>
-        </p:spPr>
-        <p:txBody>
-          <a:bodyPr wrap="square" anchor="t">
-            <a:spAutoFit/>
-          </a:bodyPr>
-          <a:lstStyle/>
-          <a:p>
-            <a:pPr algn="l"/>
-            <a:r>
-              <a:rPr sz="2200" b="0">
-                <a:solidFill>
-                  <a:srgbClr val="9AA4B2"/>
-                </a:solidFill>
-                <a:latin typeface="Helvetica Neue"/>
-              </a:rPr>
-              <a:t>Export to YOLO format. Stage on Nebius Object Storage. Submit a Serverless AI Job from a notebook. Pull best.pt.</a:t>
-            </a:r>
-          </a:p>
-        </p:txBody>
-      </p:sp>
-      <p:sp>
-        <p:nvSpPr>
-          <p:cNvPr id="18" name="Rounded Rectangle 17"/>
-          <p:cNvSpPr/>
-          <p:nvPr/>
-        </p:nvSpPr>
-        <p:spPr>
-          <a:xfrm>
-            <a:off x="822960" y="5623560"/>
-            <a:ext cx="10515600" cy="640080"/>
-          </a:xfrm>
-          <a:prstGeom prst="roundRect">
-            <a:avLst>
-              <a:gd name="adj" fmla="val 4000"/>
-            </a:avLst>
-          </a:prstGeom>
-          <a:solidFill>
-            <a:srgbClr val="141A22"/>
-          </a:solidFill>
-          <a:ln>
-            <a:solidFill>
-              <a:srgbClr val="232A38"/>
-            </a:solidFill>
-          </a:ln>
-          <a:effectLst/>
-        </p:spPr>
-        <p:style>
-          <a:lnRef idx="1">
-            <a:schemeClr val="accent1"/>
-          </a:lnRef>
-          <a:fillRef idx="3">
-            <a:schemeClr val="accent1"/>
-          </a:fillRef>
-          <a:effectRef idx="2">
-            <a:schemeClr val="accent1"/>
-          </a:effectRef>
-          <a:fontRef idx="minor">
-            <a:schemeClr val="lt1"/>
-          </a:fontRef>
-        </p:style>
-        <p:txBody>
-          <a:bodyPr rtlCol="0" anchor="ctr"/>
-          <a:lstStyle/>
-          <a:p>
-            <a:pPr algn="ctr"/>
-          </a:p>
-        </p:txBody>
-      </p:sp>
-      <p:sp>
-        <p:nvSpPr>
-          <p:cNvPr id="19" name="TextBox 18"/>
-          <p:cNvSpPr txBox="1"/>
-          <p:nvPr/>
-        </p:nvSpPr>
-        <p:spPr>
-          <a:xfrm>
-            <a:off x="1005840" y="5751576"/>
-            <a:ext cx="5120640" cy="457200"/>
-          </a:xfrm>
-          <a:prstGeom prst="rect">
-            <a:avLst/>
-          </a:prstGeom>
-          <a:noFill/>
-        </p:spPr>
-        <p:txBody>
-          <a:bodyPr wrap="square" anchor="t">
-            <a:spAutoFit/>
-          </a:bodyPr>
-          <a:lstStyle/>
-          <a:p>
-            <a:pPr algn="l"/>
-            <a:r>
-              <a:rPr sz="1500" b="1">
-                <a:solidFill>
-                  <a:srgbClr val="FF6D04"/>
-                </a:solidFill>
-                <a:latin typeface="Menlo"/>
-              </a:rPr>
-              <a:t>you  </a:t>
-            </a:r>
-            <a:r>
-              <a:rPr sz="1500" b="0">
-                <a:solidFill>
-                  <a:srgbClr val="F2F4F7"/>
-                </a:solidFill>
-                <a:latin typeface="Menlo"/>
-              </a:rPr>
-              <a:t>05_train_eval.ipynb  (predictions + eval baked in)</a:t>
-            </a:r>
-          </a:p>
-        </p:txBody>
-      </p:sp>
-      <p:sp>
-        <p:nvSpPr>
-          <p:cNvPr id="20" name="TextBox 19"/>
-          <p:cNvSpPr txBox="1"/>
-          <p:nvPr/>
-        </p:nvSpPr>
-        <p:spPr>
-          <a:xfrm>
-            <a:off x="6217920" y="5751576"/>
-            <a:ext cx="5029200" cy="457200"/>
-          </a:xfrm>
-          <a:prstGeom prst="rect">
-            <a:avLst/>
-          </a:prstGeom>
-          <a:noFill/>
-        </p:spPr>
-        <p:txBody>
-          <a:bodyPr wrap="square" anchor="t">
-            <a:spAutoFit/>
-          </a:bodyPr>
-          <a:lstStyle/>
-          <a:p>
-            <a:pPr algn="l"/>
-            <a:r>
-              <a:rPr sz="1500" b="1">
-                <a:solidFill>
-                  <a:srgbClr val="7CF29A"/>
-                </a:solidFill>
-                <a:latin typeface="Menlo"/>
-              </a:rPr>
-              <a:t>presenter  </a:t>
-            </a:r>
-            <a:r>
-              <a:rPr sz="1500" b="0">
-                <a:solidFill>
-                  <a:srgbClr val="F2F4F7"/>
-                </a:solidFill>
-                <a:latin typeface="Menlo"/>
-              </a:rPr>
-              <a:t>Nebius Serverless AI Jobs · L40S · yolo11n.pt · 15 epochs</a:t>
+              <a:t>github.com/danielgural/physical-ai-workshop</a:t>
             </a:r>
           </a:p>
         </p:txBody>
@@ -9283,88 +8862,18 @@
       </p:sp>
       <p:sp>
         <p:nvSpPr>
-          <p:cNvPr id="4" name="TextBox 3"/>
-          <p:cNvSpPr txBox="1"/>
-          <p:nvPr/>
-        </p:nvSpPr>
-        <p:spPr>
-          <a:xfrm>
-            <a:off x="822960" y="502920"/>
-            <a:ext cx="7315200" cy="365760"/>
-          </a:xfrm>
-          <a:prstGeom prst="rect">
-            <a:avLst/>
-          </a:prstGeom>
-          <a:noFill/>
-        </p:spPr>
-        <p:txBody>
-          <a:bodyPr wrap="square" anchor="t">
-            <a:spAutoFit/>
-          </a:bodyPr>
-          <a:lstStyle/>
-          <a:p>
-            <a:pPr algn="l"/>
-            <a:r>
-              <a:rPr sz="1300" b="1">
-                <a:solidFill>
-                  <a:srgbClr val="7CF29A"/>
-                </a:solidFill>
-                <a:latin typeface="Helvetica Neue"/>
-              </a:rPr>
-              <a:t>TRAIN</a:t>
-            </a:r>
-          </a:p>
-        </p:txBody>
-      </p:sp>
-      <p:sp>
-        <p:nvSpPr>
-          <p:cNvPr id="5" name="TextBox 4"/>
-          <p:cNvSpPr txBox="1"/>
-          <p:nvPr/>
-        </p:nvSpPr>
-        <p:spPr>
-          <a:xfrm>
-            <a:off x="822960" y="868680"/>
-            <a:ext cx="10515600" cy="1005840"/>
-          </a:xfrm>
-          <a:prstGeom prst="rect">
-            <a:avLst/>
-          </a:prstGeom>
-          <a:noFill/>
-        </p:spPr>
-        <p:txBody>
-          <a:bodyPr wrap="square" anchor="t">
-            <a:spAutoFit/>
-          </a:bodyPr>
-          <a:lstStyle/>
-          <a:p>
-            <a:pPr algn="l"/>
-            <a:r>
-              <a:rPr sz="4000" b="1">
-                <a:solidFill>
-                  <a:srgbClr val="F2F4F7"/>
-                </a:solidFill>
-                <a:latin typeface="Helvetica Neue"/>
-              </a:rPr>
-              <a:t>A training job is a container, a bucket and one API call</a:t>
-            </a:r>
-          </a:p>
-        </p:txBody>
-      </p:sp>
-      <p:sp>
-        <p:nvSpPr>
-          <p:cNvPr id="6" name="Rounded Rectangle 5"/>
+          <p:cNvPr id="4" name="Rounded Rectangle 3"/>
           <p:cNvSpPr/>
           <p:nvPr/>
         </p:nvSpPr>
         <p:spPr>
           <a:xfrm>
-            <a:off x="822960" y="2103120"/>
-            <a:ext cx="6766560" cy="3383280"/>
+            <a:off x="822960" y="822960"/>
+            <a:ext cx="1562100" cy="685800"/>
           </a:xfrm>
           <a:prstGeom prst="roundRect">
             <a:avLst>
-              <a:gd name="adj" fmla="val 4000"/>
+              <a:gd name="adj" fmla="val 20000"/>
             </a:avLst>
           </a:prstGeom>
           <a:solidFill>
@@ -9375,7 +8884,6 @@
               <a:srgbClr val="232A38"/>
             </a:solidFill>
           </a:ln>
-          <a:effectLst/>
         </p:spPr>
         <p:style>
           <a:lnRef idx="1">
@@ -9392,117 +8900,107 @@
           </a:fontRef>
         </p:style>
         <p:txBody>
-          <a:bodyPr rtlCol="0" anchor="ctr" wrap="square" lIns="274320" rIns="274320" tIns="182880"/>
+          <a:bodyPr rtlCol="0" anchor="ctr"/>
           <a:lstStyle/>
           <a:p>
             <a:pPr algn="ctr"/>
             <a:r>
-              <a:rPr sz="1400">
-                <a:solidFill>
-                  <a:srgbClr val="C8D3E0"/>
-                </a:solidFill>
-                <a:latin typeface="Menlo"/>
-              </a:rPr>
-              <a:t>from presenter.nebius_job import NebiusJob</a:t>
-            </a:r>
-          </a:p>
-          <a:p>
-            <a:r>
-              <a:rPr sz="1400">
-                <a:solidFill>
-                  <a:srgbClr val="C8D3E0"/>
-                </a:solidFill>
-                <a:latin typeface="Menlo"/>
-              </a:rPr>
-              <a:t>job = NebiusJob()                          # IAM token + Object Storage key</a:t>
-            </a:r>
-          </a:p>
-          <a:p>
-            <a:r>
-              <a:rPr sz="1400">
-                <a:solidFill>
-                  <a:srgbClr val="C8D3E0"/>
-                </a:solidFill>
-                <a:latin typeface="Menlo"/>
-              </a:rPr>
-              <a:t>job.upload_dir("build/yolo_export", "runs/stuttgart/input")</a:t>
-            </a:r>
-          </a:p>
-          <a:p>
-            <a:r>
-              <a:rPr sz="1400">
-                <a:solidFill>
-                  <a:srgbClr val="C8D3E0"/>
-                </a:solidFill>
-                <a:latin typeface="Menlo"/>
-              </a:rPr>
-              <a:t> </a:t>
-            </a:r>
-          </a:p>
-          <a:p>
-            <a:r>
-              <a:rPr sz="1400">
-                <a:solidFill>
-                  <a:srgbClr val="C8D3E0"/>
-                </a:solidFill>
-                <a:latin typeface="Menlo"/>
-              </a:rPr>
-              <a:t>job_id = job.submit("stuttgart", "runs/stuttgart",</a:t>
-            </a:r>
-          </a:p>
-          <a:p>
-            <a:r>
-              <a:rPr sz="1400">
-                <a:solidFill>
-                  <a:srgbClr val="C8D3E0"/>
-                </a:solidFill>
-                <a:latin typeface="Menlo"/>
-              </a:rPr>
-              <a:t>    model="yolo11n.pt", epochs=15, imgsz=640,</a:t>
-            </a:r>
-          </a:p>
-          <a:p>
-            <a:r>
-              <a:rPr sz="1400">
-                <a:solidFill>
-                  <a:srgbClr val="C8D3E0"/>
-                </a:solidFill>
-                <a:latin typeface="Menlo"/>
-              </a:rPr>
-              <a:t>    platform="gpu-l40s-a", preset="1gpu-8vcpu-32gb")</a:t>
-            </a:r>
-          </a:p>
-          <a:p>
-            <a:r>
-              <a:rPr sz="1400">
-                <a:solidFill>
-                  <a:srgbClr val="C8D3E0"/>
-                </a:solidFill>
-                <a:latin typeface="Menlo"/>
-              </a:rPr>
-              <a:t> </a:t>
-            </a:r>
-          </a:p>
-          <a:p>
-            <a:r>
-              <a:rPr sz="1400">
-                <a:solidFill>
-                  <a:srgbClr val="C8D3E0"/>
-                </a:solidFill>
-                <a:latin typeface="Menlo"/>
-              </a:rPr>
-              <a:t>job.wait(job_id)   # PROVISIONING → RUNNING → COMPLETED</a:t>
-            </a:r>
-          </a:p>
-          <a:p>
-            <a:r>
-              <a:rPr sz="1400">
-                <a:solidFill>
-                  <a:srgbClr val="C8D3E0"/>
-                </a:solidFill>
-                <a:latin typeface="Menlo"/>
-              </a:rPr>
-              <a:t>job.download("runs/stuttgart/output/best.pt", "weights/best.pt")</a:t>
+              <a:rPr sz="1800" b="1">
+                <a:solidFill>
+                  <a:srgbClr val="F2F4F7"/>
+                </a:solidFill>
+              </a:rPr>
+              <a:t>see</a:t>
+            </a:r>
+          </a:p>
+        </p:txBody>
+      </p:sp>
+      <p:sp>
+        <p:nvSpPr>
+          <p:cNvPr id="5" name="TextBox 4"/>
+          <p:cNvSpPr txBox="1"/>
+          <p:nvPr/>
+        </p:nvSpPr>
+        <p:spPr>
+          <a:xfrm>
+            <a:off x="2339340" y="960120"/>
+            <a:ext cx="320040" cy="457200"/>
+          </a:xfrm>
+          <a:prstGeom prst="rect">
+            <a:avLst/>
+          </a:prstGeom>
+          <a:noFill/>
+        </p:spPr>
+        <p:txBody>
+          <a:bodyPr wrap="square" anchor="t">
+            <a:spAutoFit/>
+          </a:bodyPr>
+          <a:lstStyle/>
+          <a:p>
+            <a:pPr algn="ctr"/>
+            <a:r>
+              <a:rPr sz="2200" b="0">
+                <a:solidFill>
+                  <a:srgbClr val="9AA4B2"/>
+                </a:solidFill>
+                <a:latin typeface="Helvetica Neue"/>
+              </a:rPr>
+              <a:t>›</a:t>
+            </a:r>
+          </a:p>
+        </p:txBody>
+      </p:sp>
+      <p:sp>
+        <p:nvSpPr>
+          <p:cNvPr id="6" name="Rounded Rectangle 5"/>
+          <p:cNvSpPr/>
+          <p:nvPr/>
+        </p:nvSpPr>
+        <p:spPr>
+          <a:xfrm>
+            <a:off x="2613660" y="822960"/>
+            <a:ext cx="1562100" cy="685800"/>
+          </a:xfrm>
+          <a:prstGeom prst="roundRect">
+            <a:avLst>
+              <a:gd name="adj" fmla="val 20000"/>
+            </a:avLst>
+          </a:prstGeom>
+          <a:solidFill>
+            <a:srgbClr val="141A22"/>
+          </a:solidFill>
+          <a:ln>
+            <a:solidFill>
+              <a:srgbClr val="232A38"/>
+            </a:solidFill>
+          </a:ln>
+        </p:spPr>
+        <p:style>
+          <a:lnRef idx="1">
+            <a:schemeClr val="accent1"/>
+          </a:lnRef>
+          <a:fillRef idx="3">
+            <a:schemeClr val="accent1"/>
+          </a:fillRef>
+          <a:effectRef idx="2">
+            <a:schemeClr val="accent1"/>
+          </a:effectRef>
+          <a:fontRef idx="minor">
+            <a:schemeClr val="lt1"/>
+          </a:fontRef>
+        </p:style>
+        <p:txBody>
+          <a:bodyPr rtlCol="0" anchor="ctr"/>
+          <a:lstStyle/>
+          <a:p>
+            <a:pPr algn="ctr"/>
+            <a:r>
+              <a:rPr sz="1800" b="1">
+                <a:solidFill>
+                  <a:srgbClr val="F2F4F7"/>
+                </a:solidFill>
+              </a:rPr>
+              <a:t>curate</a:t>
             </a:r>
           </a:p>
         </p:txBody>
@@ -9515,8 +9013,8 @@
         </p:nvSpPr>
         <p:spPr>
           <a:xfrm>
-            <a:off x="7863840" y="2103120"/>
-            <a:ext cx="4206240" cy="3840480"/>
+            <a:off x="4130040" y="960120"/>
+            <a:ext cx="320040" cy="457200"/>
           </a:xfrm>
           <a:prstGeom prst="rect">
             <a:avLst/>
@@ -9529,139 +9027,581 @@
           </a:bodyPr>
           <a:lstStyle/>
           <a:p>
-            <a:pPr algn="l">
-              <a:spcAft>
-                <a:spcPts val="1200"/>
-              </a:spcAft>
-            </a:pPr>
+            <a:pPr algn="ctr"/>
+            <a:r>
+              <a:rPr sz="2200" b="0">
+                <a:solidFill>
+                  <a:srgbClr val="9AA4B2"/>
+                </a:solidFill>
+                <a:latin typeface="Helvetica Neue"/>
+              </a:rPr>
+              <a:t>›</a:t>
+            </a:r>
+          </a:p>
+        </p:txBody>
+      </p:sp>
+      <p:sp>
+        <p:nvSpPr>
+          <p:cNvPr id="8" name="Rounded Rectangle 7"/>
+          <p:cNvSpPr/>
+          <p:nvPr/>
+        </p:nvSpPr>
+        <p:spPr>
+          <a:xfrm>
+            <a:off x="4404360" y="822960"/>
+            <a:ext cx="1562100" cy="685800"/>
+          </a:xfrm>
+          <a:prstGeom prst="roundRect">
+            <a:avLst>
+              <a:gd name="adj" fmla="val 20000"/>
+            </a:avLst>
+          </a:prstGeom>
+          <a:solidFill>
+            <a:srgbClr val="141A22"/>
+          </a:solidFill>
+          <a:ln>
+            <a:solidFill>
+              <a:srgbClr val="232A38"/>
+            </a:solidFill>
+          </a:ln>
+        </p:spPr>
+        <p:style>
+          <a:lnRef idx="1">
+            <a:schemeClr val="accent1"/>
+          </a:lnRef>
+          <a:fillRef idx="3">
+            <a:schemeClr val="accent1"/>
+          </a:fillRef>
+          <a:effectRef idx="2">
+            <a:schemeClr val="accent1"/>
+          </a:effectRef>
+          <a:fontRef idx="minor">
+            <a:schemeClr val="lt1"/>
+          </a:fontRef>
+        </p:style>
+        <p:txBody>
+          <a:bodyPr rtlCol="0" anchor="ctr"/>
+          <a:lstStyle/>
+          <a:p>
+            <a:pPr algn="ctr"/>
+            <a:r>
+              <a:rPr sz="1800" b="1">
+                <a:solidFill>
+                  <a:srgbClr val="F2F4F7"/>
+                </a:solidFill>
+              </a:rPr>
+              <a:t>embed</a:t>
+            </a:r>
+          </a:p>
+        </p:txBody>
+      </p:sp>
+      <p:sp>
+        <p:nvSpPr>
+          <p:cNvPr id="9" name="TextBox 8"/>
+          <p:cNvSpPr txBox="1"/>
+          <p:nvPr/>
+        </p:nvSpPr>
+        <p:spPr>
+          <a:xfrm>
+            <a:off x="5920740" y="960120"/>
+            <a:ext cx="320040" cy="457200"/>
+          </a:xfrm>
+          <a:prstGeom prst="rect">
+            <a:avLst/>
+          </a:prstGeom>
+          <a:noFill/>
+        </p:spPr>
+        <p:txBody>
+          <a:bodyPr wrap="square" anchor="t">
+            <a:spAutoFit/>
+          </a:bodyPr>
+          <a:lstStyle/>
+          <a:p>
+            <a:pPr algn="ctr"/>
+            <a:r>
+              <a:rPr sz="2200" b="0">
+                <a:solidFill>
+                  <a:srgbClr val="9AA4B2"/>
+                </a:solidFill>
+                <a:latin typeface="Helvetica Neue"/>
+              </a:rPr>
+              <a:t>›</a:t>
+            </a:r>
+          </a:p>
+        </p:txBody>
+      </p:sp>
+      <p:sp>
+        <p:nvSpPr>
+          <p:cNvPr id="10" name="Rounded Rectangle 9"/>
+          <p:cNvSpPr/>
+          <p:nvPr/>
+        </p:nvSpPr>
+        <p:spPr>
+          <a:xfrm>
+            <a:off x="6195060" y="822960"/>
+            <a:ext cx="1562100" cy="685800"/>
+          </a:xfrm>
+          <a:prstGeom prst="roundRect">
+            <a:avLst>
+              <a:gd name="adj" fmla="val 20000"/>
+            </a:avLst>
+          </a:prstGeom>
+          <a:solidFill>
+            <a:srgbClr val="141A22"/>
+          </a:solidFill>
+          <a:ln>
+            <a:solidFill>
+              <a:srgbClr val="232A38"/>
+            </a:solidFill>
+          </a:ln>
+        </p:spPr>
+        <p:style>
+          <a:lnRef idx="1">
+            <a:schemeClr val="accent1"/>
+          </a:lnRef>
+          <a:fillRef idx="3">
+            <a:schemeClr val="accent1"/>
+          </a:fillRef>
+          <a:effectRef idx="2">
+            <a:schemeClr val="accent1"/>
+          </a:effectRef>
+          <a:fontRef idx="minor">
+            <a:schemeClr val="lt1"/>
+          </a:fontRef>
+        </p:style>
+        <p:txBody>
+          <a:bodyPr rtlCol="0" anchor="ctr"/>
+          <a:lstStyle/>
+          <a:p>
+            <a:pPr algn="ctr"/>
+            <a:r>
+              <a:rPr sz="1800" b="1">
+                <a:solidFill>
+                  <a:srgbClr val="F2F4F7"/>
+                </a:solidFill>
+              </a:rPr>
+              <a:t>label</a:t>
+            </a:r>
+          </a:p>
+        </p:txBody>
+      </p:sp>
+      <p:sp>
+        <p:nvSpPr>
+          <p:cNvPr id="11" name="TextBox 10"/>
+          <p:cNvSpPr txBox="1"/>
+          <p:nvPr/>
+        </p:nvSpPr>
+        <p:spPr>
+          <a:xfrm>
+            <a:off x="7711440" y="960120"/>
+            <a:ext cx="320040" cy="457200"/>
+          </a:xfrm>
+          <a:prstGeom prst="rect">
+            <a:avLst/>
+          </a:prstGeom>
+          <a:noFill/>
+        </p:spPr>
+        <p:txBody>
+          <a:bodyPr wrap="square" anchor="t">
+            <a:spAutoFit/>
+          </a:bodyPr>
+          <a:lstStyle/>
+          <a:p>
+            <a:pPr algn="ctr"/>
+            <a:r>
+              <a:rPr sz="2200" b="0">
+                <a:solidFill>
+                  <a:srgbClr val="9AA4B2"/>
+                </a:solidFill>
+                <a:latin typeface="Helvetica Neue"/>
+              </a:rPr>
+              <a:t>›</a:t>
+            </a:r>
+          </a:p>
+        </p:txBody>
+      </p:sp>
+      <p:sp>
+        <p:nvSpPr>
+          <p:cNvPr id="12" name="Rounded Rectangle 11"/>
+          <p:cNvSpPr/>
+          <p:nvPr/>
+        </p:nvSpPr>
+        <p:spPr>
+          <a:xfrm>
+            <a:off x="7985760" y="822960"/>
+            <a:ext cx="1562100" cy="685800"/>
+          </a:xfrm>
+          <a:prstGeom prst="roundRect">
+            <a:avLst>
+              <a:gd name="adj" fmla="val 20000"/>
+            </a:avLst>
+          </a:prstGeom>
+          <a:solidFill>
+            <a:srgbClr val="FF6D04"/>
+          </a:solidFill>
+          <a:ln>
+            <a:solidFill>
+              <a:srgbClr val="FF6D04"/>
+            </a:solidFill>
+          </a:ln>
+        </p:spPr>
+        <p:style>
+          <a:lnRef idx="1">
+            <a:schemeClr val="accent1"/>
+          </a:lnRef>
+          <a:fillRef idx="3">
+            <a:schemeClr val="accent1"/>
+          </a:fillRef>
+          <a:effectRef idx="2">
+            <a:schemeClr val="accent1"/>
+          </a:effectRef>
+          <a:fontRef idx="minor">
+            <a:schemeClr val="lt1"/>
+          </a:fontRef>
+        </p:style>
+        <p:txBody>
+          <a:bodyPr rtlCol="0" anchor="ctr"/>
+          <a:lstStyle/>
+          <a:p>
+            <a:pPr algn="ctr"/>
+            <a:r>
+              <a:rPr sz="1800" b="1">
+                <a:solidFill>
+                  <a:srgbClr val="0B0F14"/>
+                </a:solidFill>
+              </a:rPr>
+              <a:t>train</a:t>
+            </a:r>
+          </a:p>
+        </p:txBody>
+      </p:sp>
+      <p:sp>
+        <p:nvSpPr>
+          <p:cNvPr id="13" name="TextBox 12"/>
+          <p:cNvSpPr txBox="1"/>
+          <p:nvPr/>
+        </p:nvSpPr>
+        <p:spPr>
+          <a:xfrm>
+            <a:off x="9502140" y="960120"/>
+            <a:ext cx="320040" cy="457200"/>
+          </a:xfrm>
+          <a:prstGeom prst="rect">
+            <a:avLst/>
+          </a:prstGeom>
+          <a:noFill/>
+        </p:spPr>
+        <p:txBody>
+          <a:bodyPr wrap="square" anchor="t">
+            <a:spAutoFit/>
+          </a:bodyPr>
+          <a:lstStyle/>
+          <a:p>
+            <a:pPr algn="ctr"/>
+            <a:r>
+              <a:rPr sz="2200" b="0">
+                <a:solidFill>
+                  <a:srgbClr val="9AA4B2"/>
+                </a:solidFill>
+                <a:latin typeface="Helvetica Neue"/>
+              </a:rPr>
+              <a:t>›</a:t>
+            </a:r>
+          </a:p>
+        </p:txBody>
+      </p:sp>
+      <p:sp>
+        <p:nvSpPr>
+          <p:cNvPr id="14" name="Rounded Rectangle 13"/>
+          <p:cNvSpPr/>
+          <p:nvPr/>
+        </p:nvSpPr>
+        <p:spPr>
+          <a:xfrm>
+            <a:off x="9776460" y="822960"/>
+            <a:ext cx="1562100" cy="685800"/>
+          </a:xfrm>
+          <a:prstGeom prst="roundRect">
+            <a:avLst>
+              <a:gd name="adj" fmla="val 20000"/>
+            </a:avLst>
+          </a:prstGeom>
+          <a:solidFill>
+            <a:srgbClr val="141A22"/>
+          </a:solidFill>
+          <a:ln>
+            <a:solidFill>
+              <a:srgbClr val="232A38"/>
+            </a:solidFill>
+          </a:ln>
+        </p:spPr>
+        <p:style>
+          <a:lnRef idx="1">
+            <a:schemeClr val="accent1"/>
+          </a:lnRef>
+          <a:fillRef idx="3">
+            <a:schemeClr val="accent1"/>
+          </a:fillRef>
+          <a:effectRef idx="2">
+            <a:schemeClr val="accent1"/>
+          </a:effectRef>
+          <a:fontRef idx="minor">
+            <a:schemeClr val="lt1"/>
+          </a:fontRef>
+        </p:style>
+        <p:txBody>
+          <a:bodyPr rtlCol="0" anchor="ctr"/>
+          <a:lstStyle/>
+          <a:p>
+            <a:pPr algn="ctr"/>
+            <a:r>
+              <a:rPr sz="1800" b="1">
+                <a:solidFill>
+                  <a:srgbClr val="F2F4F7"/>
+                </a:solidFill>
+              </a:rPr>
+              <a:t>evaluate</a:t>
+            </a:r>
+          </a:p>
+        </p:txBody>
+      </p:sp>
+      <p:sp>
+        <p:nvSpPr>
+          <p:cNvPr id="15" name="TextBox 14"/>
+          <p:cNvSpPr txBox="1"/>
+          <p:nvPr/>
+        </p:nvSpPr>
+        <p:spPr>
+          <a:xfrm>
+            <a:off x="822960" y="2377440"/>
+            <a:ext cx="10515600" cy="457200"/>
+          </a:xfrm>
+          <a:prstGeom prst="rect">
+            <a:avLst/>
+          </a:prstGeom>
+          <a:noFill/>
+        </p:spPr>
+        <p:txBody>
+          <a:bodyPr wrap="square" anchor="t">
+            <a:spAutoFit/>
+          </a:bodyPr>
+          <a:lstStyle/>
+          <a:p>
+            <a:pPr algn="l"/>
+            <a:r>
+              <a:rPr sz="1600" b="1">
+                <a:solidFill>
+                  <a:srgbClr val="FF6D04"/>
+                </a:solidFill>
+                <a:latin typeface="Menlo"/>
+              </a:rPr>
+              <a:t>75–95 min</a:t>
+            </a:r>
+          </a:p>
+        </p:txBody>
+      </p:sp>
+      <p:sp>
+        <p:nvSpPr>
+          <p:cNvPr id="16" name="TextBox 15"/>
+          <p:cNvSpPr txBox="1"/>
+          <p:nvPr/>
+        </p:nvSpPr>
+        <p:spPr>
+          <a:xfrm>
+            <a:off x="822960" y="2743200"/>
+            <a:ext cx="10515600" cy="1188720"/>
+          </a:xfrm>
+          <a:prstGeom prst="rect">
+            <a:avLst/>
+          </a:prstGeom>
+          <a:noFill/>
+        </p:spPr>
+        <p:txBody>
+          <a:bodyPr wrap="square" anchor="t">
+            <a:spAutoFit/>
+          </a:bodyPr>
+          <a:lstStyle/>
+          <a:p>
+            <a:pPr algn="l"/>
+            <a:r>
+              <a:rPr sz="5400" b="1">
+                <a:solidFill>
+                  <a:srgbClr val="F2F4F7"/>
+                </a:solidFill>
+                <a:latin typeface="Helvetica Neue"/>
+              </a:rPr>
+              <a:t>Fine-tune YOLO11n on Nebius</a:t>
+            </a:r>
+          </a:p>
+        </p:txBody>
+      </p:sp>
+      <p:sp>
+        <p:nvSpPr>
+          <p:cNvPr id="17" name="TextBox 16"/>
+          <p:cNvSpPr txBox="1"/>
+          <p:nvPr/>
+        </p:nvSpPr>
+        <p:spPr>
+          <a:xfrm>
+            <a:off x="822960" y="4023360"/>
+            <a:ext cx="10515600" cy="822960"/>
+          </a:xfrm>
+          <a:prstGeom prst="rect">
+            <a:avLst/>
+          </a:prstGeom>
+          <a:noFill/>
+        </p:spPr>
+        <p:txBody>
+          <a:bodyPr wrap="square" anchor="t">
+            <a:spAutoFit/>
+          </a:bodyPr>
+          <a:lstStyle/>
+          <a:p>
+            <a:pPr algn="l"/>
+            <a:r>
+              <a:rPr sz="2200" b="0">
+                <a:solidFill>
+                  <a:srgbClr val="9AA4B2"/>
+                </a:solidFill>
+                <a:latin typeface="Helvetica Neue"/>
+              </a:rPr>
+              <a:t>Export to YOLO format. Stage on Nebius Object Storage. Submit a Serverless AI Job from a notebook. Pull best.pt.</a:t>
+            </a:r>
+          </a:p>
+        </p:txBody>
+      </p:sp>
+      <p:sp>
+        <p:nvSpPr>
+          <p:cNvPr id="18" name="Rounded Rectangle 17"/>
+          <p:cNvSpPr/>
+          <p:nvPr/>
+        </p:nvSpPr>
+        <p:spPr>
+          <a:xfrm>
+            <a:off x="822960" y="5623560"/>
+            <a:ext cx="10515600" cy="640080"/>
+          </a:xfrm>
+          <a:prstGeom prst="roundRect">
+            <a:avLst>
+              <a:gd name="adj" fmla="val 4000"/>
+            </a:avLst>
+          </a:prstGeom>
+          <a:solidFill>
+            <a:srgbClr val="141A22"/>
+          </a:solidFill>
+          <a:ln>
+            <a:solidFill>
+              <a:srgbClr val="232A38"/>
+            </a:solidFill>
+          </a:ln>
+          <a:effectLst/>
+        </p:spPr>
+        <p:style>
+          <a:lnRef idx="1">
+            <a:schemeClr val="accent1"/>
+          </a:lnRef>
+          <a:fillRef idx="3">
+            <a:schemeClr val="accent1"/>
+          </a:fillRef>
+          <a:effectRef idx="2">
+            <a:schemeClr val="accent1"/>
+          </a:effectRef>
+          <a:fontRef idx="minor">
+            <a:schemeClr val="lt1"/>
+          </a:fontRef>
+        </p:style>
+        <p:txBody>
+          <a:bodyPr rtlCol="0" anchor="ctr"/>
+          <a:lstStyle/>
+          <a:p>
+            <a:pPr algn="ctr"/>
+          </a:p>
+        </p:txBody>
+      </p:sp>
+      <p:sp>
+        <p:nvSpPr>
+          <p:cNvPr id="19" name="TextBox 18"/>
+          <p:cNvSpPr txBox="1"/>
+          <p:nvPr/>
+        </p:nvSpPr>
+        <p:spPr>
+          <a:xfrm>
+            <a:off x="1005840" y="5751576"/>
+            <a:ext cx="5120640" cy="457200"/>
+          </a:xfrm>
+          <a:prstGeom prst="rect">
+            <a:avLst/>
+          </a:prstGeom>
+          <a:noFill/>
+        </p:spPr>
+        <p:txBody>
+          <a:bodyPr wrap="square" anchor="t">
+            <a:spAutoFit/>
+          </a:bodyPr>
+          <a:lstStyle/>
+          <a:p>
+            <a:pPr algn="l"/>
             <a:r>
               <a:rPr sz="1500" b="1">
                 <a:solidFill>
                   <a:srgbClr val="FF6D04"/>
                 </a:solidFill>
-                <a:latin typeface="Helvetica Neue"/>
-              </a:rPr>
-              <a:t>•  </a:t>
-            </a:r>
+                <a:latin typeface="Menlo"/>
+              </a:rPr>
+              <a:t>you  </a:t>
+            </a:r>
+            <a:r>
+              <a:rPr sz="1500" b="0">
+                <a:solidFill>
+                  <a:srgbClr val="F2F4F7"/>
+                </a:solidFill>
+                <a:latin typeface="Menlo"/>
+              </a:rPr>
+              <a:t>05_train_eval.ipynb  (predictions + eval baked in)</a:t>
+            </a:r>
+          </a:p>
+        </p:txBody>
+      </p:sp>
+      <p:sp>
+        <p:nvSpPr>
+          <p:cNvPr id="20" name="TextBox 19"/>
+          <p:cNvSpPr txBox="1"/>
+          <p:nvPr/>
+        </p:nvSpPr>
+        <p:spPr>
+          <a:xfrm>
+            <a:off x="6217920" y="5751576"/>
+            <a:ext cx="5029200" cy="457200"/>
+          </a:xfrm>
+          <a:prstGeom prst="rect">
+            <a:avLst/>
+          </a:prstGeom>
+          <a:noFill/>
+        </p:spPr>
+        <p:txBody>
+          <a:bodyPr wrap="square" anchor="t">
+            <a:spAutoFit/>
+          </a:bodyPr>
+          <a:lstStyle/>
+          <a:p>
+            <a:pPr algn="l"/>
             <a:r>
               <a:rPr sz="1500" b="1">
                 <a:solidFill>
+                  <a:srgbClr val="7CF29A"/>
+                </a:solidFill>
+                <a:latin typeface="Menlo"/>
+              </a:rPr>
+              <a:t>presenter  </a:t>
+            </a:r>
+            <a:r>
+              <a:rPr sz="1500" b="0">
+                <a:solidFill>
                   <a:srgbClr val="F2F4F7"/>
                 </a:solidFill>
-                <a:latin typeface="Helvetica Neue"/>
-              </a:rPr>
-              <a:t>Serverless </a:t>
-            </a:r>
-            <a:r>
-              <a:rPr sz="1500" b="0">
-                <a:solidFill>
-                  <a:srgbClr val="9AA4B2"/>
-                </a:solidFill>
-                <a:latin typeface="Helvetica Neue"/>
-              </a:rPr>
-              <a:t>— no cluster; a GPU appears for the job and goes away</a:t>
-            </a:r>
-          </a:p>
-          <a:p>
-            <a:pPr algn="l">
-              <a:spcAft>
-                <a:spcPts val="1200"/>
-              </a:spcAft>
-            </a:pPr>
-            <a:r>
-              <a:rPr sz="1500" b="1">
-                <a:solidFill>
-                  <a:srgbClr val="FF6D04"/>
-                </a:solidFill>
-                <a:latin typeface="Helvetica Neue"/>
-              </a:rPr>
-              <a:t>•  </a:t>
-            </a:r>
-            <a:r>
-              <a:rPr sz="1500" b="1">
-                <a:solidFill>
-                  <a:srgbClr val="F2F4F7"/>
-                </a:solidFill>
-                <a:latin typeface="Helvetica Neue"/>
-              </a:rPr>
-              <a:t>Image </a:t>
-            </a:r>
-            <a:r>
-              <a:rPr sz="1500" b="0">
-                <a:solidFill>
-                  <a:srgbClr val="9AA4B2"/>
-                </a:solidFill>
-                <a:latin typeface="Helvetica Neue"/>
-              </a:rPr>
-              <a:t>— ghcr.io/danielgural/fiftyone-yolo-train, public</a:t>
-            </a:r>
-          </a:p>
-          <a:p>
-            <a:pPr algn="l">
-              <a:spcAft>
-                <a:spcPts val="1200"/>
-              </a:spcAft>
-            </a:pPr>
-            <a:r>
-              <a:rPr sz="1500" b="1">
-                <a:solidFill>
-                  <a:srgbClr val="FF6D04"/>
-                </a:solidFill>
-                <a:latin typeface="Helvetica Neue"/>
-              </a:rPr>
-              <a:t>•  </a:t>
-            </a:r>
-            <a:r>
-              <a:rPr sz="1500" b="1">
-                <a:solidFill>
-                  <a:srgbClr val="F2F4F7"/>
-                </a:solidFill>
-                <a:latin typeface="Helvetica Neue"/>
-              </a:rPr>
-              <a:t>Contract </a:t>
-            </a:r>
-            <a:r>
-              <a:rPr sz="1500" b="0">
-                <a:solidFill>
-                  <a:srgbClr val="9AA4B2"/>
-                </a:solidFill>
-                <a:latin typeface="Helvetica Neue"/>
-              </a:rPr>
-              <a:t>— INPUT_S3_URI · OUTPUT_S3_URI · MODEL · HYPERPARAMS_JSON</a:t>
-            </a:r>
-          </a:p>
-          <a:p>
-            <a:pPr algn="l">
-              <a:spcAft>
-                <a:spcPts val="1200"/>
-              </a:spcAft>
-            </a:pPr>
-            <a:r>
-              <a:rPr sz="1500" b="1">
-                <a:solidFill>
-                  <a:srgbClr val="FF6D04"/>
-                </a:solidFill>
-                <a:latin typeface="Helvetica Neue"/>
-              </a:rPr>
-              <a:t>•  </a:t>
-            </a:r>
-            <a:r>
-              <a:rPr sz="1500" b="1">
-                <a:solidFill>
-                  <a:srgbClr val="F2F4F7"/>
-                </a:solidFill>
-                <a:latin typeface="Helvetica Neue"/>
-              </a:rPr>
-              <a:t>Data </a:t>
-            </a:r>
-            <a:r>
-              <a:rPr sz="1500" b="0">
-                <a:solidFill>
-                  <a:srgbClr val="9AA4B2"/>
-                </a:solidFill>
-                <a:latin typeface="Helvetica Neue"/>
-              </a:rPr>
-              <a:t>— stays in Nebius Object Storage, eu-north1</a:t>
+                <a:latin typeface="Menlo"/>
+              </a:rPr>
+              <a:t>Nebius Serverless AI Jobs · L40S · yolo11n.pt · 15 epochs</a:t>
             </a:r>
           </a:p>
         </p:txBody>
@@ -9788,11 +9728,11 @@
             <a:r>
               <a:rPr sz="1300" b="1">
                 <a:solidFill>
-                  <a:srgbClr val="FF6D04"/>
-                </a:solidFill>
-                <a:latin typeface="Helvetica Neue"/>
-              </a:rPr>
-              <a:t>EVALUATE</a:t>
+                  <a:srgbClr val="7CF29A"/>
+                </a:solidFill>
+                <a:latin typeface="Helvetica Neue"/>
+              </a:rPr>
+              <a:t>TRAIN</a:t>
             </a:r>
           </a:p>
         </p:txBody>
@@ -9827,180 +9767,21 @@
                 </a:solidFill>
                 <a:latin typeface="Helvetica Neue"/>
               </a:rPr>
-              <a:t>Evaluate against the auto-labels — every cell is a view</a:t>
-            </a:r>
-          </a:p>
-        </p:txBody>
-      </p:sp>
-      <p:sp>
-        <p:nvSpPr>
-          <p:cNvPr id="6" name="TextBox 5"/>
-          <p:cNvSpPr txBox="1"/>
+              <a:t>A training job is a container, a bucket and one API call</a:t>
+            </a:r>
+          </a:p>
+        </p:txBody>
+      </p:sp>
+      <p:sp>
+        <p:nvSpPr>
+          <p:cNvPr id="6" name="Rounded Rectangle 5"/>
+          <p:cNvSpPr/>
           <p:nvPr/>
         </p:nvSpPr>
         <p:spPr>
           <a:xfrm>
             <a:off x="822960" y="2103120"/>
-            <a:ext cx="6400800" cy="3840480"/>
-          </a:xfrm>
-          <a:prstGeom prst="rect">
-            <a:avLst/>
-          </a:prstGeom>
-          <a:noFill/>
-        </p:spPr>
-        <p:txBody>
-          <a:bodyPr wrap="square" anchor="t">
-            <a:spAutoFit/>
-          </a:bodyPr>
-          <a:lstStyle/>
-          <a:p>
-            <a:pPr algn="l">
-              <a:spcAft>
-                <a:spcPts val="1200"/>
-              </a:spcAft>
-            </a:pPr>
-            <a:r>
-              <a:rPr sz="1900" b="1">
-                <a:solidFill>
-                  <a:srgbClr val="FF6D04"/>
-                </a:solidFill>
-                <a:latin typeface="Helvetica Neue"/>
-              </a:rPr>
-              <a:t>•  </a:t>
-            </a:r>
-            <a:r>
-              <a:rPr sz="1900" b="1">
-                <a:solidFill>
-                  <a:srgbClr val="F2F4F7"/>
-                </a:solidFill>
-                <a:latin typeface="Helvetica Neue"/>
-              </a:rPr>
-              <a:t>evaluate_detections </a:t>
-            </a:r>
-            <a:r>
-              <a:rPr sz="1900" b="0">
-                <a:solidFill>
-                  <a:srgbClr val="9AA4B2"/>
-                </a:solidFill>
-                <a:latin typeface="Helvetica Neue"/>
-              </a:rPr>
-              <a:t>— mAP, per-class P/R, confusion matrix; results live on the samples as eval_yolo_tp / fp / fn</a:t>
-            </a:r>
-          </a:p>
-          <a:p>
-            <a:pPr algn="l">
-              <a:spcAft>
-                <a:spcPts val="1200"/>
-              </a:spcAft>
-            </a:pPr>
-            <a:r>
-              <a:rPr sz="1900" b="1">
-                <a:solidFill>
-                  <a:srgbClr val="FF6D04"/>
-                </a:solidFill>
-                <a:latin typeface="Helvetica Neue"/>
-              </a:rPr>
-              <a:t>•  </a:t>
-            </a:r>
-            <a:r>
-              <a:rPr sz="1900" b="1">
-                <a:solidFill>
-                  <a:srgbClr val="F2F4F7"/>
-                </a:solidFill>
-                <a:latin typeface="Helvetica Neue"/>
-              </a:rPr>
-              <a:t>Click a confusion cell </a:t>
-            </a:r>
-            <a:r>
-              <a:rPr sz="1900" b="0">
-                <a:solidFill>
-                  <a:srgbClr val="9AA4B2"/>
-                </a:solidFill>
-                <a:latin typeface="Helvetica Neue"/>
-              </a:rPr>
-              <a:t>— the grid shows exactly those frames</a:t>
-            </a:r>
-          </a:p>
-          <a:p>
-            <a:pPr algn="l">
-              <a:spcAft>
-                <a:spcPts val="1200"/>
-              </a:spcAft>
-            </a:pPr>
-            <a:r>
-              <a:rPr sz="1900" b="1">
-                <a:solidFill>
-                  <a:srgbClr val="FF6D04"/>
-                </a:solidFill>
-                <a:latin typeface="Helvetica Neue"/>
-              </a:rPr>
-              <a:t>•  </a:t>
-            </a:r>
-            <a:r>
-              <a:rPr sz="1900" b="1">
-                <a:solidFill>
-                  <a:srgbClr val="F2F4F7"/>
-                </a:solidFill>
-                <a:latin typeface="Helvetica Neue"/>
-              </a:rPr>
-              <a:t>Worst-first </a:t>
-            </a:r>
-            <a:r>
-              <a:rPr sz="1900" b="0">
-                <a:solidFill>
-                  <a:srgbClr val="9AA4B2"/>
-                </a:solidFill>
-                <a:latin typeface="Helvetica Neue"/>
-              </a:rPr>
-              <a:t>— sort validation by false positives; open the episodes</a:t>
-            </a:r>
-          </a:p>
-          <a:p>
-            <a:pPr algn="l">
-              <a:spcAft>
-                <a:spcPts val="1200"/>
-              </a:spcAft>
-            </a:pPr>
-            <a:r>
-              <a:rPr sz="1900" b="1">
-                <a:solidFill>
-                  <a:srgbClr val="FF6D04"/>
-                </a:solidFill>
-                <a:latin typeface="Helvetica Neue"/>
-              </a:rPr>
-              <a:t>•  </a:t>
-            </a:r>
-            <a:r>
-              <a:rPr sz="1900" b="1">
-                <a:solidFill>
-                  <a:srgbClr val="F2F4F7"/>
-                </a:solidFill>
-                <a:latin typeface="Helvetica Neue"/>
-              </a:rPr>
-              <a:t>Missed grippers </a:t>
-            </a:r>
-            <a:r>
-              <a:rPr sz="1900" b="0">
-                <a:solidFill>
-                  <a:srgbClr val="9AA4B2"/>
-                </a:solidFill>
-                <a:latin typeface="Helvetica Neue"/>
-              </a:rPr>
-              <a:t>— false negatives grouped by episode tell you what to collect next</a:t>
-            </a:r>
-          </a:p>
-        </p:txBody>
-      </p:sp>
-      <p:sp>
-        <p:nvSpPr>
-          <p:cNvPr id="7" name="Rounded Rectangle 6"/>
-          <p:cNvSpPr/>
-          <p:nvPr/>
-        </p:nvSpPr>
-        <p:spPr>
-          <a:xfrm>
-            <a:off x="7498079" y="2103120"/>
-            <a:ext cx="3931920" cy="2377440"/>
+            <a:ext cx="6766560" cy="3383280"/>
           </a:xfrm>
           <a:prstGeom prst="roundRect">
             <a:avLst>
@@ -10037,68 +9818,271 @@
           <a:p>
             <a:pPr algn="ctr"/>
             <a:r>
-              <a:rPr sz="1300">
+              <a:rPr sz="1400">
                 <a:solidFill>
                   <a:srgbClr val="C8D3E0"/>
                 </a:solidFill>
                 <a:latin typeface="Menlo"/>
               </a:rPr>
-              <a:t>results = val.evaluate_detections(</a:t>
-            </a:r>
-          </a:p>
-          <a:p>
-            <a:r>
-              <a:rPr sz="1300">
+              <a:t>from presenter.nebius_job import NebiusJob</a:t>
+            </a:r>
+          </a:p>
+          <a:p>
+            <a:r>
+              <a:rPr sz="1400">
                 <a:solidFill>
                   <a:srgbClr val="C8D3E0"/>
                 </a:solidFill>
                 <a:latin typeface="Menlo"/>
               </a:rPr>
-              <a:t>    "yolo11n_preds",</a:t>
-            </a:r>
-          </a:p>
-          <a:p>
-            <a:r>
-              <a:rPr sz="1300">
+              <a:t>job = NebiusJob()                          # IAM token + Object Storage key</a:t>
+            </a:r>
+          </a:p>
+          <a:p>
+            <a:r>
+              <a:rPr sz="1400">
                 <a:solidFill>
                   <a:srgbClr val="C8D3E0"/>
                 </a:solidFill>
                 <a:latin typeface="Menlo"/>
               </a:rPr>
-              <a:t>    gt_field="auto_labels",</a:t>
-            </a:r>
-          </a:p>
-          <a:p>
-            <a:r>
-              <a:rPr sz="1300">
+              <a:t>job.upload_dir("build/yolo_export", "runs/stuttgart/input")</a:t>
+            </a:r>
+          </a:p>
+          <a:p>
+            <a:r>
+              <a:rPr sz="1400">
                 <a:solidFill>
                   <a:srgbClr val="C8D3E0"/>
                 </a:solidFill>
                 <a:latin typeface="Menlo"/>
               </a:rPr>
-              <a:t>    eval_key="eval_yolo",</a:t>
-            </a:r>
-          </a:p>
-          <a:p>
-            <a:r>
-              <a:rPr sz="1300">
+              <a:t> </a:t>
+            </a:r>
+          </a:p>
+          <a:p>
+            <a:r>
+              <a:rPr sz="1400">
                 <a:solidFill>
                   <a:srgbClr val="C8D3E0"/>
                 </a:solidFill>
                 <a:latin typeface="Menlo"/>
               </a:rPr>
-              <a:t>    compute_mAP=True)</a:t>
-            </a:r>
-          </a:p>
-          <a:p>
-            <a:r>
-              <a:rPr sz="1300">
+              <a:t>job_id = job.submit("stuttgart", "runs/stuttgart",</a:t>
+            </a:r>
+          </a:p>
+          <a:p>
+            <a:r>
+              <a:rPr sz="1400">
                 <a:solidFill>
                   <a:srgbClr val="C8D3E0"/>
                 </a:solidFill>
                 <a:latin typeface="Menlo"/>
               </a:rPr>
-              <a:t>results.print_report()</a:t>
+              <a:t>    model="yolo11n.pt", epochs=15, imgsz=640,</a:t>
+            </a:r>
+          </a:p>
+          <a:p>
+            <a:r>
+              <a:rPr sz="1400">
+                <a:solidFill>
+                  <a:srgbClr val="C8D3E0"/>
+                </a:solidFill>
+                <a:latin typeface="Menlo"/>
+              </a:rPr>
+              <a:t>    platform="gpu-l40s-a", preset="1gpu-8vcpu-32gb")</a:t>
+            </a:r>
+          </a:p>
+          <a:p>
+            <a:r>
+              <a:rPr sz="1400">
+                <a:solidFill>
+                  <a:srgbClr val="C8D3E0"/>
+                </a:solidFill>
+                <a:latin typeface="Menlo"/>
+              </a:rPr>
+              <a:t> </a:t>
+            </a:r>
+          </a:p>
+          <a:p>
+            <a:r>
+              <a:rPr sz="1400">
+                <a:solidFill>
+                  <a:srgbClr val="C8D3E0"/>
+                </a:solidFill>
+                <a:latin typeface="Menlo"/>
+              </a:rPr>
+              <a:t>job.wait(job_id)   # PROVISIONING → RUNNING → COMPLETED</a:t>
+            </a:r>
+          </a:p>
+          <a:p>
+            <a:r>
+              <a:rPr sz="1400">
+                <a:solidFill>
+                  <a:srgbClr val="C8D3E0"/>
+                </a:solidFill>
+                <a:latin typeface="Menlo"/>
+              </a:rPr>
+              <a:t>job.download("runs/stuttgart/output/best.pt", "weights/best.pt")</a:t>
+            </a:r>
+          </a:p>
+        </p:txBody>
+      </p:sp>
+      <p:sp>
+        <p:nvSpPr>
+          <p:cNvPr id="7" name="TextBox 6"/>
+          <p:cNvSpPr txBox="1"/>
+          <p:nvPr/>
+        </p:nvSpPr>
+        <p:spPr>
+          <a:xfrm>
+            <a:off x="7863840" y="2103120"/>
+            <a:ext cx="4206240" cy="3840480"/>
+          </a:xfrm>
+          <a:prstGeom prst="rect">
+            <a:avLst/>
+          </a:prstGeom>
+          <a:noFill/>
+        </p:spPr>
+        <p:txBody>
+          <a:bodyPr wrap="square" anchor="t">
+            <a:spAutoFit/>
+          </a:bodyPr>
+          <a:lstStyle/>
+          <a:p>
+            <a:pPr algn="l">
+              <a:spcAft>
+                <a:spcPts val="1200"/>
+              </a:spcAft>
+            </a:pPr>
+            <a:r>
+              <a:rPr sz="1500" b="1">
+                <a:solidFill>
+                  <a:srgbClr val="FF6D04"/>
+                </a:solidFill>
+                <a:latin typeface="Helvetica Neue"/>
+              </a:rPr>
+              <a:t>•  </a:t>
+            </a:r>
+            <a:r>
+              <a:rPr sz="1500" b="1">
+                <a:solidFill>
+                  <a:srgbClr val="F2F4F7"/>
+                </a:solidFill>
+                <a:latin typeface="Helvetica Neue"/>
+              </a:rPr>
+              <a:t>Serverless </a:t>
+            </a:r>
+            <a:r>
+              <a:rPr sz="1500" b="0">
+                <a:solidFill>
+                  <a:srgbClr val="9AA4B2"/>
+                </a:solidFill>
+                <a:latin typeface="Helvetica Neue"/>
+              </a:rPr>
+              <a:t>— no cluster; a GPU appears for the job and goes away</a:t>
+            </a:r>
+          </a:p>
+          <a:p>
+            <a:pPr algn="l">
+              <a:spcAft>
+                <a:spcPts val="1200"/>
+              </a:spcAft>
+            </a:pPr>
+            <a:r>
+              <a:rPr sz="1500" b="1">
+                <a:solidFill>
+                  <a:srgbClr val="FF6D04"/>
+                </a:solidFill>
+                <a:latin typeface="Helvetica Neue"/>
+              </a:rPr>
+              <a:t>•  </a:t>
+            </a:r>
+            <a:r>
+              <a:rPr sz="1500" b="1">
+                <a:solidFill>
+                  <a:srgbClr val="F2F4F7"/>
+                </a:solidFill>
+                <a:latin typeface="Helvetica Neue"/>
+              </a:rPr>
+              <a:t>Image </a:t>
+            </a:r>
+            <a:r>
+              <a:rPr sz="1500" b="0">
+                <a:solidFill>
+                  <a:srgbClr val="9AA4B2"/>
+                </a:solidFill>
+                <a:latin typeface="Helvetica Neue"/>
+              </a:rPr>
+              <a:t>— ghcr.io/danielgural/fiftyone-yolo-train, public</a:t>
+            </a:r>
+          </a:p>
+          <a:p>
+            <a:pPr algn="l">
+              <a:spcAft>
+                <a:spcPts val="1200"/>
+              </a:spcAft>
+            </a:pPr>
+            <a:r>
+              <a:rPr sz="1500" b="1">
+                <a:solidFill>
+                  <a:srgbClr val="FF6D04"/>
+                </a:solidFill>
+                <a:latin typeface="Helvetica Neue"/>
+              </a:rPr>
+              <a:t>•  </a:t>
+            </a:r>
+            <a:r>
+              <a:rPr sz="1500" b="1">
+                <a:solidFill>
+                  <a:srgbClr val="F2F4F7"/>
+                </a:solidFill>
+                <a:latin typeface="Helvetica Neue"/>
+              </a:rPr>
+              <a:t>Contract </a:t>
+            </a:r>
+            <a:r>
+              <a:rPr sz="1500" b="0">
+                <a:solidFill>
+                  <a:srgbClr val="9AA4B2"/>
+                </a:solidFill>
+                <a:latin typeface="Helvetica Neue"/>
+              </a:rPr>
+              <a:t>— INPUT_S3_URI · OUTPUT_S3_URI · MODEL · HYPERPARAMS_JSON</a:t>
+            </a:r>
+          </a:p>
+          <a:p>
+            <a:pPr algn="l">
+              <a:spcAft>
+                <a:spcPts val="1200"/>
+              </a:spcAft>
+            </a:pPr>
+            <a:r>
+              <a:rPr sz="1500" b="1">
+                <a:solidFill>
+                  <a:srgbClr val="FF6D04"/>
+                </a:solidFill>
+                <a:latin typeface="Helvetica Neue"/>
+              </a:rPr>
+              <a:t>•  </a:t>
+            </a:r>
+            <a:r>
+              <a:rPr sz="1500" b="1">
+                <a:solidFill>
+                  <a:srgbClr val="F2F4F7"/>
+                </a:solidFill>
+                <a:latin typeface="Helvetica Neue"/>
+              </a:rPr>
+              <a:t>Data </a:t>
+            </a:r>
+            <a:r>
+              <a:rPr sz="1500" b="0">
+                <a:solidFill>
+                  <a:srgbClr val="9AA4B2"/>
+                </a:solidFill>
+                <a:latin typeface="Helvetica Neue"/>
+              </a:rPr>
+              <a:t>— stays in Nebius Object Storage, eu-north1</a:t>
             </a:r>
           </a:p>
         </p:txBody>
@@ -10201,28 +10185,258 @@
       </p:sp>
       <p:sp>
         <p:nvSpPr>
-          <p:cNvPr id="4" name="Rounded Rectangle 3"/>
+          <p:cNvPr id="4" name="TextBox 3"/>
+          <p:cNvSpPr txBox="1"/>
+          <p:nvPr/>
+        </p:nvSpPr>
+        <p:spPr>
+          <a:xfrm>
+            <a:off x="822960" y="502920"/>
+            <a:ext cx="7315200" cy="365760"/>
+          </a:xfrm>
+          <a:prstGeom prst="rect">
+            <a:avLst/>
+          </a:prstGeom>
+          <a:noFill/>
+        </p:spPr>
+        <p:txBody>
+          <a:bodyPr wrap="square" anchor="t">
+            <a:spAutoFit/>
+          </a:bodyPr>
+          <a:lstStyle/>
+          <a:p>
+            <a:pPr algn="l"/>
+            <a:r>
+              <a:rPr sz="1300" b="1">
+                <a:solidFill>
+                  <a:srgbClr val="FF6D04"/>
+                </a:solidFill>
+                <a:latin typeface="Helvetica Neue"/>
+              </a:rPr>
+              <a:t>EVALUATE</a:t>
+            </a:r>
+          </a:p>
+        </p:txBody>
+      </p:sp>
+      <p:sp>
+        <p:nvSpPr>
+          <p:cNvPr id="5" name="TextBox 4"/>
+          <p:cNvSpPr txBox="1"/>
+          <p:nvPr/>
+        </p:nvSpPr>
+        <p:spPr>
+          <a:xfrm>
+            <a:off x="822960" y="868680"/>
+            <a:ext cx="10515600" cy="1005840"/>
+          </a:xfrm>
+          <a:prstGeom prst="rect">
+            <a:avLst/>
+          </a:prstGeom>
+          <a:noFill/>
+        </p:spPr>
+        <p:txBody>
+          <a:bodyPr wrap="square" anchor="t">
+            <a:spAutoFit/>
+          </a:bodyPr>
+          <a:lstStyle/>
+          <a:p>
+            <a:pPr algn="l"/>
+            <a:r>
+              <a:rPr sz="4000" b="1">
+                <a:solidFill>
+                  <a:srgbClr val="F2F4F7"/>
+                </a:solidFill>
+                <a:latin typeface="Helvetica Neue"/>
+              </a:rPr>
+              <a:t>Evaluate against the auto-labels — every cell is a view</a:t>
+            </a:r>
+          </a:p>
+        </p:txBody>
+      </p:sp>
+      <p:sp>
+        <p:nvSpPr>
+          <p:cNvPr id="6" name="TextBox 5"/>
+          <p:cNvSpPr txBox="1"/>
+          <p:nvPr/>
+        </p:nvSpPr>
+        <p:spPr>
+          <a:xfrm>
+            <a:off x="822960" y="2103120"/>
+            <a:ext cx="6400800" cy="3840480"/>
+          </a:xfrm>
+          <a:prstGeom prst="rect">
+            <a:avLst/>
+          </a:prstGeom>
+          <a:noFill/>
+        </p:spPr>
+        <p:txBody>
+          <a:bodyPr wrap="square" anchor="t">
+            <a:spAutoFit/>
+          </a:bodyPr>
+          <a:lstStyle/>
+          <a:p>
+            <a:pPr algn="l">
+              <a:spcAft>
+                <a:spcPts val="1200"/>
+              </a:spcAft>
+            </a:pPr>
+            <a:r>
+              <a:rPr sz="1900" b="1">
+                <a:solidFill>
+                  <a:srgbClr val="FF6D04"/>
+                </a:solidFill>
+                <a:latin typeface="Helvetica Neue"/>
+              </a:rPr>
+              <a:t>•  </a:t>
+            </a:r>
+            <a:r>
+              <a:rPr sz="1900" b="1">
+                <a:solidFill>
+                  <a:srgbClr val="F2F4F7"/>
+                </a:solidFill>
+                <a:latin typeface="Helvetica Neue"/>
+              </a:rPr>
+              <a:t>evaluate_detections </a:t>
+            </a:r>
+            <a:r>
+              <a:rPr sz="1900" b="0">
+                <a:solidFill>
+                  <a:srgbClr val="9AA4B2"/>
+                </a:solidFill>
+                <a:latin typeface="Helvetica Neue"/>
+              </a:rPr>
+              <a:t>— mAP, per-class P/R, confusion matrix; results live on the samples as eval_yolo_tp / fp / fn</a:t>
+            </a:r>
+          </a:p>
+          <a:p>
+            <a:pPr algn="l">
+              <a:spcAft>
+                <a:spcPts val="1200"/>
+              </a:spcAft>
+            </a:pPr>
+            <a:r>
+              <a:rPr sz="1900" b="1">
+                <a:solidFill>
+                  <a:srgbClr val="FF6D04"/>
+                </a:solidFill>
+                <a:latin typeface="Helvetica Neue"/>
+              </a:rPr>
+              <a:t>•  </a:t>
+            </a:r>
+            <a:r>
+              <a:rPr sz="1900" b="1">
+                <a:solidFill>
+                  <a:srgbClr val="F2F4F7"/>
+                </a:solidFill>
+                <a:latin typeface="Helvetica Neue"/>
+              </a:rPr>
+              <a:t>Click a confusion cell </a:t>
+            </a:r>
+            <a:r>
+              <a:rPr sz="1900" b="0">
+                <a:solidFill>
+                  <a:srgbClr val="9AA4B2"/>
+                </a:solidFill>
+                <a:latin typeface="Helvetica Neue"/>
+              </a:rPr>
+              <a:t>— the grid shows exactly those frames</a:t>
+            </a:r>
+          </a:p>
+          <a:p>
+            <a:pPr algn="l">
+              <a:spcAft>
+                <a:spcPts val="1200"/>
+              </a:spcAft>
+            </a:pPr>
+            <a:r>
+              <a:rPr sz="1900" b="1">
+                <a:solidFill>
+                  <a:srgbClr val="FF6D04"/>
+                </a:solidFill>
+                <a:latin typeface="Helvetica Neue"/>
+              </a:rPr>
+              <a:t>•  </a:t>
+            </a:r>
+            <a:r>
+              <a:rPr sz="1900" b="1">
+                <a:solidFill>
+                  <a:srgbClr val="F2F4F7"/>
+                </a:solidFill>
+                <a:latin typeface="Helvetica Neue"/>
+              </a:rPr>
+              <a:t>Worst-first </a:t>
+            </a:r>
+            <a:r>
+              <a:rPr sz="1900" b="0">
+                <a:solidFill>
+                  <a:srgbClr val="9AA4B2"/>
+                </a:solidFill>
+                <a:latin typeface="Helvetica Neue"/>
+              </a:rPr>
+              <a:t>— sort validation by false positives; open the episodes</a:t>
+            </a:r>
+          </a:p>
+          <a:p>
+            <a:pPr algn="l">
+              <a:spcAft>
+                <a:spcPts val="1200"/>
+              </a:spcAft>
+            </a:pPr>
+            <a:r>
+              <a:rPr sz="1900" b="1">
+                <a:solidFill>
+                  <a:srgbClr val="FF6D04"/>
+                </a:solidFill>
+                <a:latin typeface="Helvetica Neue"/>
+              </a:rPr>
+              <a:t>•  </a:t>
+            </a:r>
+            <a:r>
+              <a:rPr sz="1900" b="1">
+                <a:solidFill>
+                  <a:srgbClr val="F2F4F7"/>
+                </a:solidFill>
+                <a:latin typeface="Helvetica Neue"/>
+              </a:rPr>
+              <a:t>Missed grippers </a:t>
+            </a:r>
+            <a:r>
+              <a:rPr sz="1900" b="0">
+                <a:solidFill>
+                  <a:srgbClr val="9AA4B2"/>
+                </a:solidFill>
+                <a:latin typeface="Helvetica Neue"/>
+              </a:rPr>
+              <a:t>— false negatives grouped by episode tell you what to collect next</a:t>
+            </a:r>
+          </a:p>
+        </p:txBody>
+      </p:sp>
+      <p:sp>
+        <p:nvSpPr>
+          <p:cNvPr id="7" name="Rounded Rectangle 6"/>
           <p:cNvSpPr/>
           <p:nvPr/>
         </p:nvSpPr>
         <p:spPr>
           <a:xfrm>
-            <a:off x="822960" y="822960"/>
-            <a:ext cx="1562100" cy="685800"/>
+            <a:off x="7498079" y="2103120"/>
+            <a:ext cx="3931920" cy="2377440"/>
           </a:xfrm>
           <a:prstGeom prst="roundRect">
             <a:avLst>
-              <a:gd name="adj" fmla="val 20000"/>
+              <a:gd name="adj" fmla="val 4000"/>
             </a:avLst>
           </a:prstGeom>
           <a:solidFill>
-            <a:srgbClr val="FF6D04"/>
+            <a:srgbClr val="141A22"/>
           </a:solidFill>
           <a:ln>
             <a:solidFill>
-              <a:srgbClr val="FF6D04"/>
+              <a:srgbClr val="232A38"/>
             </a:solidFill>
           </a:ln>
+          <a:effectLst/>
         </p:spPr>
         <p:style>
           <a:lnRef idx="1">
@@ -10239,708 +10453,73 @@
           </a:fontRef>
         </p:style>
         <p:txBody>
-          <a:bodyPr rtlCol="0" anchor="ctr"/>
+          <a:bodyPr rtlCol="0" anchor="ctr" wrap="square" lIns="274320" rIns="274320" tIns="182880"/>
           <a:lstStyle/>
           <a:p>
             <a:pPr algn="ctr"/>
             <a:r>
-              <a:rPr sz="1800" b="1">
-                <a:solidFill>
-                  <a:srgbClr val="0B0F14"/>
-                </a:solidFill>
-              </a:rPr>
-              <a:t>see</a:t>
-            </a:r>
-          </a:p>
-        </p:txBody>
-      </p:sp>
-      <p:sp>
-        <p:nvSpPr>
-          <p:cNvPr id="5" name="TextBox 4"/>
-          <p:cNvSpPr txBox="1"/>
-          <p:nvPr/>
-        </p:nvSpPr>
-        <p:spPr>
-          <a:xfrm>
-            <a:off x="2339340" y="960120"/>
-            <a:ext cx="320040" cy="457200"/>
-          </a:xfrm>
-          <a:prstGeom prst="rect">
-            <a:avLst/>
-          </a:prstGeom>
-          <a:noFill/>
-        </p:spPr>
-        <p:txBody>
-          <a:bodyPr wrap="square" anchor="t">
-            <a:spAutoFit/>
-          </a:bodyPr>
-          <a:lstStyle/>
-          <a:p>
-            <a:pPr algn="ctr"/>
-            <a:r>
-              <a:rPr sz="2200" b="0">
-                <a:solidFill>
-                  <a:srgbClr val="9AA4B2"/>
-                </a:solidFill>
-                <a:latin typeface="Helvetica Neue"/>
-              </a:rPr>
-              <a:t>›</a:t>
-            </a:r>
-          </a:p>
-        </p:txBody>
-      </p:sp>
-      <p:sp>
-        <p:nvSpPr>
-          <p:cNvPr id="6" name="Rounded Rectangle 5"/>
-          <p:cNvSpPr/>
-          <p:nvPr/>
-        </p:nvSpPr>
-        <p:spPr>
-          <a:xfrm>
-            <a:off x="2613660" y="822960"/>
-            <a:ext cx="1562100" cy="685800"/>
-          </a:xfrm>
-          <a:prstGeom prst="roundRect">
-            <a:avLst>
-              <a:gd name="adj" fmla="val 20000"/>
-            </a:avLst>
-          </a:prstGeom>
-          <a:solidFill>
-            <a:srgbClr val="141A22"/>
-          </a:solidFill>
-          <a:ln>
-            <a:solidFill>
-              <a:srgbClr val="232A38"/>
-            </a:solidFill>
-          </a:ln>
-        </p:spPr>
-        <p:style>
-          <a:lnRef idx="1">
-            <a:schemeClr val="accent1"/>
-          </a:lnRef>
-          <a:fillRef idx="3">
-            <a:schemeClr val="accent1"/>
-          </a:fillRef>
-          <a:effectRef idx="2">
-            <a:schemeClr val="accent1"/>
-          </a:effectRef>
-          <a:fontRef idx="minor">
-            <a:schemeClr val="lt1"/>
-          </a:fontRef>
-        </p:style>
-        <p:txBody>
-          <a:bodyPr rtlCol="0" anchor="ctr"/>
-          <a:lstStyle/>
-          <a:p>
-            <a:pPr algn="ctr"/>
-            <a:r>
-              <a:rPr sz="1800" b="1">
-                <a:solidFill>
-                  <a:srgbClr val="F2F4F7"/>
-                </a:solidFill>
-              </a:rPr>
-              <a:t>curate</a:t>
-            </a:r>
-          </a:p>
-        </p:txBody>
-      </p:sp>
-      <p:sp>
-        <p:nvSpPr>
-          <p:cNvPr id="7" name="TextBox 6"/>
-          <p:cNvSpPr txBox="1"/>
-          <p:nvPr/>
-        </p:nvSpPr>
-        <p:spPr>
-          <a:xfrm>
-            <a:off x="4130040" y="960120"/>
-            <a:ext cx="320040" cy="457200"/>
-          </a:xfrm>
-          <a:prstGeom prst="rect">
-            <a:avLst/>
-          </a:prstGeom>
-          <a:noFill/>
-        </p:spPr>
-        <p:txBody>
-          <a:bodyPr wrap="square" anchor="t">
-            <a:spAutoFit/>
-          </a:bodyPr>
-          <a:lstStyle/>
-          <a:p>
-            <a:pPr algn="ctr"/>
-            <a:r>
-              <a:rPr sz="2200" b="0">
-                <a:solidFill>
-                  <a:srgbClr val="9AA4B2"/>
-                </a:solidFill>
-                <a:latin typeface="Helvetica Neue"/>
-              </a:rPr>
-              <a:t>›</a:t>
-            </a:r>
-          </a:p>
-        </p:txBody>
-      </p:sp>
-      <p:sp>
-        <p:nvSpPr>
-          <p:cNvPr id="8" name="Rounded Rectangle 7"/>
-          <p:cNvSpPr/>
-          <p:nvPr/>
-        </p:nvSpPr>
-        <p:spPr>
-          <a:xfrm>
-            <a:off x="4404360" y="822960"/>
-            <a:ext cx="1562100" cy="685800"/>
-          </a:xfrm>
-          <a:prstGeom prst="roundRect">
-            <a:avLst>
-              <a:gd name="adj" fmla="val 20000"/>
-            </a:avLst>
-          </a:prstGeom>
-          <a:solidFill>
-            <a:srgbClr val="141A22"/>
-          </a:solidFill>
-          <a:ln>
-            <a:solidFill>
-              <a:srgbClr val="232A38"/>
-            </a:solidFill>
-          </a:ln>
-        </p:spPr>
-        <p:style>
-          <a:lnRef idx="1">
-            <a:schemeClr val="accent1"/>
-          </a:lnRef>
-          <a:fillRef idx="3">
-            <a:schemeClr val="accent1"/>
-          </a:fillRef>
-          <a:effectRef idx="2">
-            <a:schemeClr val="accent1"/>
-          </a:effectRef>
-          <a:fontRef idx="minor">
-            <a:schemeClr val="lt1"/>
-          </a:fontRef>
-        </p:style>
-        <p:txBody>
-          <a:bodyPr rtlCol="0" anchor="ctr"/>
-          <a:lstStyle/>
-          <a:p>
-            <a:pPr algn="ctr"/>
-            <a:r>
-              <a:rPr sz="1800" b="1">
-                <a:solidFill>
-                  <a:srgbClr val="F2F4F7"/>
-                </a:solidFill>
-              </a:rPr>
-              <a:t>embed</a:t>
-            </a:r>
-          </a:p>
-        </p:txBody>
-      </p:sp>
-      <p:sp>
-        <p:nvSpPr>
-          <p:cNvPr id="9" name="TextBox 8"/>
-          <p:cNvSpPr txBox="1"/>
-          <p:nvPr/>
-        </p:nvSpPr>
-        <p:spPr>
-          <a:xfrm>
-            <a:off x="5920740" y="960120"/>
-            <a:ext cx="320040" cy="457200"/>
-          </a:xfrm>
-          <a:prstGeom prst="rect">
-            <a:avLst/>
-          </a:prstGeom>
-          <a:noFill/>
-        </p:spPr>
-        <p:txBody>
-          <a:bodyPr wrap="square" anchor="t">
-            <a:spAutoFit/>
-          </a:bodyPr>
-          <a:lstStyle/>
-          <a:p>
-            <a:pPr algn="ctr"/>
-            <a:r>
-              <a:rPr sz="2200" b="0">
-                <a:solidFill>
-                  <a:srgbClr val="9AA4B2"/>
-                </a:solidFill>
-                <a:latin typeface="Helvetica Neue"/>
-              </a:rPr>
-              <a:t>›</a:t>
-            </a:r>
-          </a:p>
-        </p:txBody>
-      </p:sp>
-      <p:sp>
-        <p:nvSpPr>
-          <p:cNvPr id="10" name="Rounded Rectangle 9"/>
-          <p:cNvSpPr/>
-          <p:nvPr/>
-        </p:nvSpPr>
-        <p:spPr>
-          <a:xfrm>
-            <a:off x="6195060" y="822960"/>
-            <a:ext cx="1562100" cy="685800"/>
-          </a:xfrm>
-          <a:prstGeom prst="roundRect">
-            <a:avLst>
-              <a:gd name="adj" fmla="val 20000"/>
-            </a:avLst>
-          </a:prstGeom>
-          <a:solidFill>
-            <a:srgbClr val="141A22"/>
-          </a:solidFill>
-          <a:ln>
-            <a:solidFill>
-              <a:srgbClr val="232A38"/>
-            </a:solidFill>
-          </a:ln>
-        </p:spPr>
-        <p:style>
-          <a:lnRef idx="1">
-            <a:schemeClr val="accent1"/>
-          </a:lnRef>
-          <a:fillRef idx="3">
-            <a:schemeClr val="accent1"/>
-          </a:fillRef>
-          <a:effectRef idx="2">
-            <a:schemeClr val="accent1"/>
-          </a:effectRef>
-          <a:fontRef idx="minor">
-            <a:schemeClr val="lt1"/>
-          </a:fontRef>
-        </p:style>
-        <p:txBody>
-          <a:bodyPr rtlCol="0" anchor="ctr"/>
-          <a:lstStyle/>
-          <a:p>
-            <a:pPr algn="ctr"/>
-            <a:r>
-              <a:rPr sz="1800" b="1">
-                <a:solidFill>
-                  <a:srgbClr val="F2F4F7"/>
-                </a:solidFill>
-              </a:rPr>
-              <a:t>label</a:t>
-            </a:r>
-          </a:p>
-        </p:txBody>
-      </p:sp>
-      <p:sp>
-        <p:nvSpPr>
-          <p:cNvPr id="11" name="TextBox 10"/>
-          <p:cNvSpPr txBox="1"/>
-          <p:nvPr/>
-        </p:nvSpPr>
-        <p:spPr>
-          <a:xfrm>
-            <a:off x="7711440" y="960120"/>
-            <a:ext cx="320040" cy="457200"/>
-          </a:xfrm>
-          <a:prstGeom prst="rect">
-            <a:avLst/>
-          </a:prstGeom>
-          <a:noFill/>
-        </p:spPr>
-        <p:txBody>
-          <a:bodyPr wrap="square" anchor="t">
-            <a:spAutoFit/>
-          </a:bodyPr>
-          <a:lstStyle/>
-          <a:p>
-            <a:pPr algn="ctr"/>
-            <a:r>
-              <a:rPr sz="2200" b="0">
-                <a:solidFill>
-                  <a:srgbClr val="9AA4B2"/>
-                </a:solidFill>
-                <a:latin typeface="Helvetica Neue"/>
-              </a:rPr>
-              <a:t>›</a:t>
-            </a:r>
-          </a:p>
-        </p:txBody>
-      </p:sp>
-      <p:sp>
-        <p:nvSpPr>
-          <p:cNvPr id="12" name="Rounded Rectangle 11"/>
-          <p:cNvSpPr/>
-          <p:nvPr/>
-        </p:nvSpPr>
-        <p:spPr>
-          <a:xfrm>
-            <a:off x="7985760" y="822960"/>
-            <a:ext cx="1562100" cy="685800"/>
-          </a:xfrm>
-          <a:prstGeom prst="roundRect">
-            <a:avLst>
-              <a:gd name="adj" fmla="val 20000"/>
-            </a:avLst>
-          </a:prstGeom>
-          <a:solidFill>
-            <a:srgbClr val="141A22"/>
-          </a:solidFill>
-          <a:ln>
-            <a:solidFill>
-              <a:srgbClr val="232A38"/>
-            </a:solidFill>
-          </a:ln>
-        </p:spPr>
-        <p:style>
-          <a:lnRef idx="1">
-            <a:schemeClr val="accent1"/>
-          </a:lnRef>
-          <a:fillRef idx="3">
-            <a:schemeClr val="accent1"/>
-          </a:fillRef>
-          <a:effectRef idx="2">
-            <a:schemeClr val="accent1"/>
-          </a:effectRef>
-          <a:fontRef idx="minor">
-            <a:schemeClr val="lt1"/>
-          </a:fontRef>
-        </p:style>
-        <p:txBody>
-          <a:bodyPr rtlCol="0" anchor="ctr"/>
-          <a:lstStyle/>
-          <a:p>
-            <a:pPr algn="ctr"/>
-            <a:r>
-              <a:rPr sz="1800" b="1">
-                <a:solidFill>
-                  <a:srgbClr val="F2F4F7"/>
-                </a:solidFill>
-              </a:rPr>
-              <a:t>train</a:t>
-            </a:r>
-          </a:p>
-        </p:txBody>
-      </p:sp>
-      <p:sp>
-        <p:nvSpPr>
-          <p:cNvPr id="13" name="TextBox 12"/>
-          <p:cNvSpPr txBox="1"/>
-          <p:nvPr/>
-        </p:nvSpPr>
-        <p:spPr>
-          <a:xfrm>
-            <a:off x="9502140" y="960120"/>
-            <a:ext cx="320040" cy="457200"/>
-          </a:xfrm>
-          <a:prstGeom prst="rect">
-            <a:avLst/>
-          </a:prstGeom>
-          <a:noFill/>
-        </p:spPr>
-        <p:txBody>
-          <a:bodyPr wrap="square" anchor="t">
-            <a:spAutoFit/>
-          </a:bodyPr>
-          <a:lstStyle/>
-          <a:p>
-            <a:pPr algn="ctr"/>
-            <a:r>
-              <a:rPr sz="2200" b="0">
-                <a:solidFill>
-                  <a:srgbClr val="9AA4B2"/>
-                </a:solidFill>
-                <a:latin typeface="Helvetica Neue"/>
-              </a:rPr>
-              <a:t>›</a:t>
-            </a:r>
-          </a:p>
-        </p:txBody>
-      </p:sp>
-      <p:sp>
-        <p:nvSpPr>
-          <p:cNvPr id="14" name="Rounded Rectangle 13"/>
-          <p:cNvSpPr/>
-          <p:nvPr/>
-        </p:nvSpPr>
-        <p:spPr>
-          <a:xfrm>
-            <a:off x="9776460" y="822960"/>
-            <a:ext cx="1562100" cy="685800"/>
-          </a:xfrm>
-          <a:prstGeom prst="roundRect">
-            <a:avLst>
-              <a:gd name="adj" fmla="val 20000"/>
-            </a:avLst>
-          </a:prstGeom>
-          <a:solidFill>
-            <a:srgbClr val="FF6D04"/>
-          </a:solidFill>
-          <a:ln>
-            <a:solidFill>
-              <a:srgbClr val="FF6D04"/>
-            </a:solidFill>
-          </a:ln>
-        </p:spPr>
-        <p:style>
-          <a:lnRef idx="1">
-            <a:schemeClr val="accent1"/>
-          </a:lnRef>
-          <a:fillRef idx="3">
-            <a:schemeClr val="accent1"/>
-          </a:fillRef>
-          <a:effectRef idx="2">
-            <a:schemeClr val="accent1"/>
-          </a:effectRef>
-          <a:fontRef idx="minor">
-            <a:schemeClr val="lt1"/>
-          </a:fontRef>
-        </p:style>
-        <p:txBody>
-          <a:bodyPr rtlCol="0" anchor="ctr"/>
-          <a:lstStyle/>
-          <a:p>
-            <a:pPr algn="ctr"/>
-            <a:r>
-              <a:rPr sz="1800" b="1">
-                <a:solidFill>
-                  <a:srgbClr val="0B0F14"/>
-                </a:solidFill>
-              </a:rPr>
-              <a:t>evaluate</a:t>
-            </a:r>
-          </a:p>
-        </p:txBody>
-      </p:sp>
-      <p:sp>
-        <p:nvSpPr>
-          <p:cNvPr id="15" name="TextBox 14"/>
-          <p:cNvSpPr txBox="1"/>
-          <p:nvPr/>
-        </p:nvSpPr>
-        <p:spPr>
-          <a:xfrm>
-            <a:off x="822960" y="2377440"/>
-            <a:ext cx="10515600" cy="457200"/>
-          </a:xfrm>
-          <a:prstGeom prst="rect">
-            <a:avLst/>
-          </a:prstGeom>
-          <a:noFill/>
-        </p:spPr>
-        <p:txBody>
-          <a:bodyPr wrap="square" anchor="t">
-            <a:spAutoFit/>
-          </a:bodyPr>
-          <a:lstStyle/>
-          <a:p>
-            <a:pPr algn="l"/>
-            <a:r>
-              <a:rPr sz="1600" b="1">
-                <a:solidFill>
-                  <a:srgbClr val="FF6D04"/>
+              <a:rPr sz="1300">
+                <a:solidFill>
+                  <a:srgbClr val="C8D3E0"/>
                 </a:solidFill>
                 <a:latin typeface="Menlo"/>
               </a:rPr>
-              <a:t>95–105 min</a:t>
-            </a:r>
-          </a:p>
-        </p:txBody>
-      </p:sp>
-      <p:sp>
-        <p:nvSpPr>
-          <p:cNvPr id="16" name="TextBox 15"/>
-          <p:cNvSpPr txBox="1"/>
-          <p:nvPr/>
-        </p:nvSpPr>
-        <p:spPr>
-          <a:xfrm>
-            <a:off x="822960" y="2743200"/>
-            <a:ext cx="10515600" cy="1188720"/>
-          </a:xfrm>
-          <a:prstGeom prst="rect">
-            <a:avLst/>
-          </a:prstGeom>
-          <a:noFill/>
-        </p:spPr>
-        <p:txBody>
-          <a:bodyPr wrap="square" anchor="t">
-            <a:spAutoFit/>
-          </a:bodyPr>
-          <a:lstStyle/>
-          <a:p>
-            <a:pPr algn="l"/>
-            <a:r>
-              <a:rPr sz="5400" b="1">
-                <a:solidFill>
-                  <a:srgbClr val="F2F4F7"/>
-                </a:solidFill>
-                <a:latin typeface="Helvetica Neue"/>
-              </a:rPr>
-              <a:t>Close the loop on the timeline</a:t>
-            </a:r>
-          </a:p>
-        </p:txBody>
-      </p:sp>
-      <p:sp>
-        <p:nvSpPr>
-          <p:cNvPr id="17" name="TextBox 16"/>
-          <p:cNvSpPr txBox="1"/>
-          <p:nvPr/>
-        </p:nvSpPr>
-        <p:spPr>
-          <a:xfrm>
-            <a:off x="822960" y="4023360"/>
-            <a:ext cx="10515600" cy="822960"/>
-          </a:xfrm>
-          <a:prstGeom prst="rect">
-            <a:avLst/>
-          </a:prstGeom>
-          <a:noFill/>
-        </p:spPr>
-        <p:txBody>
-          <a:bodyPr wrap="square" anchor="t">
-            <a:spAutoFit/>
-          </a:bodyPr>
-          <a:lstStyle/>
-          <a:p>
-            <a:pPr algn="l"/>
-            <a:r>
-              <a:rPr sz="2200" b="0">
-                <a:solidFill>
-                  <a:srgbClr val="9AA4B2"/>
-                </a:solidFill>
-                <a:latin typeface="Helvetica Neue"/>
-              </a:rPr>
-              <a:t>Detections on frames become temporal tags on the recording. Query the episodes by what the model saw.</a:t>
-            </a:r>
-          </a:p>
-        </p:txBody>
-      </p:sp>
-      <p:sp>
-        <p:nvSpPr>
-          <p:cNvPr id="18" name="Rounded Rectangle 17"/>
-          <p:cNvSpPr/>
-          <p:nvPr/>
-        </p:nvSpPr>
-        <p:spPr>
-          <a:xfrm>
-            <a:off x="822960" y="5623560"/>
-            <a:ext cx="10515600" cy="640080"/>
-          </a:xfrm>
-          <a:prstGeom prst="roundRect">
-            <a:avLst>
-              <a:gd name="adj" fmla="val 4000"/>
-            </a:avLst>
-          </a:prstGeom>
-          <a:solidFill>
-            <a:srgbClr val="141A22"/>
-          </a:solidFill>
-          <a:ln>
-            <a:solidFill>
-              <a:srgbClr val="232A38"/>
-            </a:solidFill>
-          </a:ln>
-          <a:effectLst/>
-        </p:spPr>
-        <p:style>
-          <a:lnRef idx="1">
-            <a:schemeClr val="accent1"/>
-          </a:lnRef>
-          <a:fillRef idx="3">
-            <a:schemeClr val="accent1"/>
-          </a:fillRef>
-          <a:effectRef idx="2">
-            <a:schemeClr val="accent1"/>
-          </a:effectRef>
-          <a:fontRef idx="minor">
-            <a:schemeClr val="lt1"/>
-          </a:fontRef>
-        </p:style>
-        <p:txBody>
-          <a:bodyPr rtlCol="0" anchor="ctr"/>
-          <a:lstStyle/>
-          <a:p>
-            <a:pPr algn="ctr"/>
-          </a:p>
-        </p:txBody>
-      </p:sp>
-      <p:sp>
-        <p:nvSpPr>
-          <p:cNvPr id="19" name="TextBox 18"/>
-          <p:cNvSpPr txBox="1"/>
-          <p:nvPr/>
-        </p:nvSpPr>
-        <p:spPr>
-          <a:xfrm>
-            <a:off x="1005840" y="5751576"/>
-            <a:ext cx="5120640" cy="457200"/>
-          </a:xfrm>
-          <a:prstGeom prst="rect">
-            <a:avLst/>
-          </a:prstGeom>
-          <a:noFill/>
-        </p:spPr>
-        <p:txBody>
-          <a:bodyPr wrap="square" anchor="t">
-            <a:spAutoFit/>
-          </a:bodyPr>
-          <a:lstStyle/>
-          <a:p>
-            <a:pPr algn="l"/>
-            <a:r>
-              <a:rPr sz="1500" b="1">
-                <a:solidFill>
-                  <a:srgbClr val="FF6D04"/>
+              <a:t>results = val.evaluate_detections(</a:t>
+            </a:r>
+          </a:p>
+          <a:p>
+            <a:r>
+              <a:rPr sz="1300">
+                <a:solidFill>
+                  <a:srgbClr val="C8D3E0"/>
                 </a:solidFill>
                 <a:latin typeface="Menlo"/>
               </a:rPr>
-              <a:t>you  </a:t>
-            </a:r>
-            <a:r>
-              <a:rPr sz="1500" b="0">
-                <a:solidFill>
-                  <a:srgbClr val="F2F4F7"/>
+              <a:t>    "yolo11n_preds",</a:t>
+            </a:r>
+          </a:p>
+          <a:p>
+            <a:r>
+              <a:rPr sz="1300">
+                <a:solidFill>
+                  <a:srgbClr val="C8D3E0"/>
                 </a:solidFill>
                 <a:latin typeface="Menlo"/>
               </a:rPr>
-              <a:t>06_close_the_loop.ipynb</a:t>
-            </a:r>
-          </a:p>
-        </p:txBody>
-      </p:sp>
-      <p:sp>
-        <p:nvSpPr>
-          <p:cNvPr id="20" name="TextBox 19"/>
-          <p:cNvSpPr txBox="1"/>
-          <p:nvPr/>
-        </p:nvSpPr>
-        <p:spPr>
-          <a:xfrm>
-            <a:off x="6217920" y="5751576"/>
-            <a:ext cx="5029200" cy="457200"/>
-          </a:xfrm>
-          <a:prstGeom prst="rect">
-            <a:avLst/>
-          </a:prstGeom>
-          <a:noFill/>
-        </p:spPr>
-        <p:txBody>
-          <a:bodyPr wrap="square" anchor="t">
-            <a:spAutoFit/>
-          </a:bodyPr>
-          <a:lstStyle/>
-          <a:p>
-            <a:pPr algn="l"/>
-            <a:r>
-              <a:rPr sz="1500" b="1">
-                <a:solidFill>
-                  <a:srgbClr val="7CF29A"/>
+              <a:t>    gt_field="auto_labels",</a:t>
+            </a:r>
+          </a:p>
+          <a:p>
+            <a:r>
+              <a:rPr sz="1300">
+                <a:solidFill>
+                  <a:srgbClr val="C8D3E0"/>
                 </a:solidFill>
                 <a:latin typeface="Menlo"/>
               </a:rPr>
-              <a:t>presenter  </a:t>
-            </a:r>
-            <a:r>
-              <a:rPr sz="1500" b="0">
-                <a:solidFill>
-                  <a:srgbClr val="F2F4F7"/>
+              <a:t>    eval_key="eval_yolo",</a:t>
+            </a:r>
+          </a:p>
+          <a:p>
+            <a:r>
+              <a:rPr sz="1300">
+                <a:solidFill>
+                  <a:srgbClr val="C8D3E0"/>
                 </a:solidFill>
                 <a:latin typeface="Menlo"/>
               </a:rPr>
-              <a:t>demo.fiftyone.ai · predictions back on Droid demo</a:t>
+              <a:t>    compute_mAP=True)</a:t>
+            </a:r>
+          </a:p>
+          <a:p>
+            <a:r>
+              <a:rPr sz="1300">
+                <a:solidFill>
+                  <a:srgbClr val="C8D3E0"/>
+                </a:solidFill>
+                <a:latin typeface="Menlo"/>
+              </a:rPr>
+              <a:t>results.print_report()</a:t>
             </a:r>
           </a:p>
         </p:txBody>
@@ -11037,6 +10616,1276 @@
                 <a:latin typeface="Helvetica Neue"/>
               </a:rPr>
               <a:t>19</a:t>
+            </a:r>
+          </a:p>
+        </p:txBody>
+      </p:sp>
+      <p:sp>
+        <p:nvSpPr>
+          <p:cNvPr id="4" name="Rounded Rectangle 3"/>
+          <p:cNvSpPr/>
+          <p:nvPr/>
+        </p:nvSpPr>
+        <p:spPr>
+          <a:xfrm>
+            <a:off x="822960" y="822960"/>
+            <a:ext cx="1562100" cy="685800"/>
+          </a:xfrm>
+          <a:prstGeom prst="roundRect">
+            <a:avLst>
+              <a:gd name="adj" fmla="val 20000"/>
+            </a:avLst>
+          </a:prstGeom>
+          <a:solidFill>
+            <a:srgbClr val="FF6D04"/>
+          </a:solidFill>
+          <a:ln>
+            <a:solidFill>
+              <a:srgbClr val="FF6D04"/>
+            </a:solidFill>
+          </a:ln>
+        </p:spPr>
+        <p:style>
+          <a:lnRef idx="1">
+            <a:schemeClr val="accent1"/>
+          </a:lnRef>
+          <a:fillRef idx="3">
+            <a:schemeClr val="accent1"/>
+          </a:fillRef>
+          <a:effectRef idx="2">
+            <a:schemeClr val="accent1"/>
+          </a:effectRef>
+          <a:fontRef idx="minor">
+            <a:schemeClr val="lt1"/>
+          </a:fontRef>
+        </p:style>
+        <p:txBody>
+          <a:bodyPr rtlCol="0" anchor="ctr"/>
+          <a:lstStyle/>
+          <a:p>
+            <a:pPr algn="ctr"/>
+            <a:r>
+              <a:rPr sz="1800" b="1">
+                <a:solidFill>
+                  <a:srgbClr val="0B0F14"/>
+                </a:solidFill>
+              </a:rPr>
+              <a:t>see</a:t>
+            </a:r>
+          </a:p>
+        </p:txBody>
+      </p:sp>
+      <p:sp>
+        <p:nvSpPr>
+          <p:cNvPr id="5" name="TextBox 4"/>
+          <p:cNvSpPr txBox="1"/>
+          <p:nvPr/>
+        </p:nvSpPr>
+        <p:spPr>
+          <a:xfrm>
+            <a:off x="2339340" y="960120"/>
+            <a:ext cx="320040" cy="457200"/>
+          </a:xfrm>
+          <a:prstGeom prst="rect">
+            <a:avLst/>
+          </a:prstGeom>
+          <a:noFill/>
+        </p:spPr>
+        <p:txBody>
+          <a:bodyPr wrap="square" anchor="t">
+            <a:spAutoFit/>
+          </a:bodyPr>
+          <a:lstStyle/>
+          <a:p>
+            <a:pPr algn="ctr"/>
+            <a:r>
+              <a:rPr sz="2200" b="0">
+                <a:solidFill>
+                  <a:srgbClr val="9AA4B2"/>
+                </a:solidFill>
+                <a:latin typeface="Helvetica Neue"/>
+              </a:rPr>
+              <a:t>›</a:t>
+            </a:r>
+          </a:p>
+        </p:txBody>
+      </p:sp>
+      <p:sp>
+        <p:nvSpPr>
+          <p:cNvPr id="6" name="Rounded Rectangle 5"/>
+          <p:cNvSpPr/>
+          <p:nvPr/>
+        </p:nvSpPr>
+        <p:spPr>
+          <a:xfrm>
+            <a:off x="2613660" y="822960"/>
+            <a:ext cx="1562100" cy="685800"/>
+          </a:xfrm>
+          <a:prstGeom prst="roundRect">
+            <a:avLst>
+              <a:gd name="adj" fmla="val 20000"/>
+            </a:avLst>
+          </a:prstGeom>
+          <a:solidFill>
+            <a:srgbClr val="141A22"/>
+          </a:solidFill>
+          <a:ln>
+            <a:solidFill>
+              <a:srgbClr val="232A38"/>
+            </a:solidFill>
+          </a:ln>
+        </p:spPr>
+        <p:style>
+          <a:lnRef idx="1">
+            <a:schemeClr val="accent1"/>
+          </a:lnRef>
+          <a:fillRef idx="3">
+            <a:schemeClr val="accent1"/>
+          </a:fillRef>
+          <a:effectRef idx="2">
+            <a:schemeClr val="accent1"/>
+          </a:effectRef>
+          <a:fontRef idx="minor">
+            <a:schemeClr val="lt1"/>
+          </a:fontRef>
+        </p:style>
+        <p:txBody>
+          <a:bodyPr rtlCol="0" anchor="ctr"/>
+          <a:lstStyle/>
+          <a:p>
+            <a:pPr algn="ctr"/>
+            <a:r>
+              <a:rPr sz="1800" b="1">
+                <a:solidFill>
+                  <a:srgbClr val="F2F4F7"/>
+                </a:solidFill>
+              </a:rPr>
+              <a:t>curate</a:t>
+            </a:r>
+          </a:p>
+        </p:txBody>
+      </p:sp>
+      <p:sp>
+        <p:nvSpPr>
+          <p:cNvPr id="7" name="TextBox 6"/>
+          <p:cNvSpPr txBox="1"/>
+          <p:nvPr/>
+        </p:nvSpPr>
+        <p:spPr>
+          <a:xfrm>
+            <a:off x="4130040" y="960120"/>
+            <a:ext cx="320040" cy="457200"/>
+          </a:xfrm>
+          <a:prstGeom prst="rect">
+            <a:avLst/>
+          </a:prstGeom>
+          <a:noFill/>
+        </p:spPr>
+        <p:txBody>
+          <a:bodyPr wrap="square" anchor="t">
+            <a:spAutoFit/>
+          </a:bodyPr>
+          <a:lstStyle/>
+          <a:p>
+            <a:pPr algn="ctr"/>
+            <a:r>
+              <a:rPr sz="2200" b="0">
+                <a:solidFill>
+                  <a:srgbClr val="9AA4B2"/>
+                </a:solidFill>
+                <a:latin typeface="Helvetica Neue"/>
+              </a:rPr>
+              <a:t>›</a:t>
+            </a:r>
+          </a:p>
+        </p:txBody>
+      </p:sp>
+      <p:sp>
+        <p:nvSpPr>
+          <p:cNvPr id="8" name="Rounded Rectangle 7"/>
+          <p:cNvSpPr/>
+          <p:nvPr/>
+        </p:nvSpPr>
+        <p:spPr>
+          <a:xfrm>
+            <a:off x="4404360" y="822960"/>
+            <a:ext cx="1562100" cy="685800"/>
+          </a:xfrm>
+          <a:prstGeom prst="roundRect">
+            <a:avLst>
+              <a:gd name="adj" fmla="val 20000"/>
+            </a:avLst>
+          </a:prstGeom>
+          <a:solidFill>
+            <a:srgbClr val="141A22"/>
+          </a:solidFill>
+          <a:ln>
+            <a:solidFill>
+              <a:srgbClr val="232A38"/>
+            </a:solidFill>
+          </a:ln>
+        </p:spPr>
+        <p:style>
+          <a:lnRef idx="1">
+            <a:schemeClr val="accent1"/>
+          </a:lnRef>
+          <a:fillRef idx="3">
+            <a:schemeClr val="accent1"/>
+          </a:fillRef>
+          <a:effectRef idx="2">
+            <a:schemeClr val="accent1"/>
+          </a:effectRef>
+          <a:fontRef idx="minor">
+            <a:schemeClr val="lt1"/>
+          </a:fontRef>
+        </p:style>
+        <p:txBody>
+          <a:bodyPr rtlCol="0" anchor="ctr"/>
+          <a:lstStyle/>
+          <a:p>
+            <a:pPr algn="ctr"/>
+            <a:r>
+              <a:rPr sz="1800" b="1">
+                <a:solidFill>
+                  <a:srgbClr val="F2F4F7"/>
+                </a:solidFill>
+              </a:rPr>
+              <a:t>embed</a:t>
+            </a:r>
+          </a:p>
+        </p:txBody>
+      </p:sp>
+      <p:sp>
+        <p:nvSpPr>
+          <p:cNvPr id="9" name="TextBox 8"/>
+          <p:cNvSpPr txBox="1"/>
+          <p:nvPr/>
+        </p:nvSpPr>
+        <p:spPr>
+          <a:xfrm>
+            <a:off x="5920740" y="960120"/>
+            <a:ext cx="320040" cy="457200"/>
+          </a:xfrm>
+          <a:prstGeom prst="rect">
+            <a:avLst/>
+          </a:prstGeom>
+          <a:noFill/>
+        </p:spPr>
+        <p:txBody>
+          <a:bodyPr wrap="square" anchor="t">
+            <a:spAutoFit/>
+          </a:bodyPr>
+          <a:lstStyle/>
+          <a:p>
+            <a:pPr algn="ctr"/>
+            <a:r>
+              <a:rPr sz="2200" b="0">
+                <a:solidFill>
+                  <a:srgbClr val="9AA4B2"/>
+                </a:solidFill>
+                <a:latin typeface="Helvetica Neue"/>
+              </a:rPr>
+              <a:t>›</a:t>
+            </a:r>
+          </a:p>
+        </p:txBody>
+      </p:sp>
+      <p:sp>
+        <p:nvSpPr>
+          <p:cNvPr id="10" name="Rounded Rectangle 9"/>
+          <p:cNvSpPr/>
+          <p:nvPr/>
+        </p:nvSpPr>
+        <p:spPr>
+          <a:xfrm>
+            <a:off x="6195060" y="822960"/>
+            <a:ext cx="1562100" cy="685800"/>
+          </a:xfrm>
+          <a:prstGeom prst="roundRect">
+            <a:avLst>
+              <a:gd name="adj" fmla="val 20000"/>
+            </a:avLst>
+          </a:prstGeom>
+          <a:solidFill>
+            <a:srgbClr val="141A22"/>
+          </a:solidFill>
+          <a:ln>
+            <a:solidFill>
+              <a:srgbClr val="232A38"/>
+            </a:solidFill>
+          </a:ln>
+        </p:spPr>
+        <p:style>
+          <a:lnRef idx="1">
+            <a:schemeClr val="accent1"/>
+          </a:lnRef>
+          <a:fillRef idx="3">
+            <a:schemeClr val="accent1"/>
+          </a:fillRef>
+          <a:effectRef idx="2">
+            <a:schemeClr val="accent1"/>
+          </a:effectRef>
+          <a:fontRef idx="minor">
+            <a:schemeClr val="lt1"/>
+          </a:fontRef>
+        </p:style>
+        <p:txBody>
+          <a:bodyPr rtlCol="0" anchor="ctr"/>
+          <a:lstStyle/>
+          <a:p>
+            <a:pPr algn="ctr"/>
+            <a:r>
+              <a:rPr sz="1800" b="1">
+                <a:solidFill>
+                  <a:srgbClr val="F2F4F7"/>
+                </a:solidFill>
+              </a:rPr>
+              <a:t>label</a:t>
+            </a:r>
+          </a:p>
+        </p:txBody>
+      </p:sp>
+      <p:sp>
+        <p:nvSpPr>
+          <p:cNvPr id="11" name="TextBox 10"/>
+          <p:cNvSpPr txBox="1"/>
+          <p:nvPr/>
+        </p:nvSpPr>
+        <p:spPr>
+          <a:xfrm>
+            <a:off x="7711440" y="960120"/>
+            <a:ext cx="320040" cy="457200"/>
+          </a:xfrm>
+          <a:prstGeom prst="rect">
+            <a:avLst/>
+          </a:prstGeom>
+          <a:noFill/>
+        </p:spPr>
+        <p:txBody>
+          <a:bodyPr wrap="square" anchor="t">
+            <a:spAutoFit/>
+          </a:bodyPr>
+          <a:lstStyle/>
+          <a:p>
+            <a:pPr algn="ctr"/>
+            <a:r>
+              <a:rPr sz="2200" b="0">
+                <a:solidFill>
+                  <a:srgbClr val="9AA4B2"/>
+                </a:solidFill>
+                <a:latin typeface="Helvetica Neue"/>
+              </a:rPr>
+              <a:t>›</a:t>
+            </a:r>
+          </a:p>
+        </p:txBody>
+      </p:sp>
+      <p:sp>
+        <p:nvSpPr>
+          <p:cNvPr id="12" name="Rounded Rectangle 11"/>
+          <p:cNvSpPr/>
+          <p:nvPr/>
+        </p:nvSpPr>
+        <p:spPr>
+          <a:xfrm>
+            <a:off x="7985760" y="822960"/>
+            <a:ext cx="1562100" cy="685800"/>
+          </a:xfrm>
+          <a:prstGeom prst="roundRect">
+            <a:avLst>
+              <a:gd name="adj" fmla="val 20000"/>
+            </a:avLst>
+          </a:prstGeom>
+          <a:solidFill>
+            <a:srgbClr val="141A22"/>
+          </a:solidFill>
+          <a:ln>
+            <a:solidFill>
+              <a:srgbClr val="232A38"/>
+            </a:solidFill>
+          </a:ln>
+        </p:spPr>
+        <p:style>
+          <a:lnRef idx="1">
+            <a:schemeClr val="accent1"/>
+          </a:lnRef>
+          <a:fillRef idx="3">
+            <a:schemeClr val="accent1"/>
+          </a:fillRef>
+          <a:effectRef idx="2">
+            <a:schemeClr val="accent1"/>
+          </a:effectRef>
+          <a:fontRef idx="minor">
+            <a:schemeClr val="lt1"/>
+          </a:fontRef>
+        </p:style>
+        <p:txBody>
+          <a:bodyPr rtlCol="0" anchor="ctr"/>
+          <a:lstStyle/>
+          <a:p>
+            <a:pPr algn="ctr"/>
+            <a:r>
+              <a:rPr sz="1800" b="1">
+                <a:solidFill>
+                  <a:srgbClr val="F2F4F7"/>
+                </a:solidFill>
+              </a:rPr>
+              <a:t>train</a:t>
+            </a:r>
+          </a:p>
+        </p:txBody>
+      </p:sp>
+      <p:sp>
+        <p:nvSpPr>
+          <p:cNvPr id="13" name="TextBox 12"/>
+          <p:cNvSpPr txBox="1"/>
+          <p:nvPr/>
+        </p:nvSpPr>
+        <p:spPr>
+          <a:xfrm>
+            <a:off x="9502140" y="960120"/>
+            <a:ext cx="320040" cy="457200"/>
+          </a:xfrm>
+          <a:prstGeom prst="rect">
+            <a:avLst/>
+          </a:prstGeom>
+          <a:noFill/>
+        </p:spPr>
+        <p:txBody>
+          <a:bodyPr wrap="square" anchor="t">
+            <a:spAutoFit/>
+          </a:bodyPr>
+          <a:lstStyle/>
+          <a:p>
+            <a:pPr algn="ctr"/>
+            <a:r>
+              <a:rPr sz="2200" b="0">
+                <a:solidFill>
+                  <a:srgbClr val="9AA4B2"/>
+                </a:solidFill>
+                <a:latin typeface="Helvetica Neue"/>
+              </a:rPr>
+              <a:t>›</a:t>
+            </a:r>
+          </a:p>
+        </p:txBody>
+      </p:sp>
+      <p:sp>
+        <p:nvSpPr>
+          <p:cNvPr id="14" name="Rounded Rectangle 13"/>
+          <p:cNvSpPr/>
+          <p:nvPr/>
+        </p:nvSpPr>
+        <p:spPr>
+          <a:xfrm>
+            <a:off x="9776460" y="822960"/>
+            <a:ext cx="1562100" cy="685800"/>
+          </a:xfrm>
+          <a:prstGeom prst="roundRect">
+            <a:avLst>
+              <a:gd name="adj" fmla="val 20000"/>
+            </a:avLst>
+          </a:prstGeom>
+          <a:solidFill>
+            <a:srgbClr val="FF6D04"/>
+          </a:solidFill>
+          <a:ln>
+            <a:solidFill>
+              <a:srgbClr val="FF6D04"/>
+            </a:solidFill>
+          </a:ln>
+        </p:spPr>
+        <p:style>
+          <a:lnRef idx="1">
+            <a:schemeClr val="accent1"/>
+          </a:lnRef>
+          <a:fillRef idx="3">
+            <a:schemeClr val="accent1"/>
+          </a:fillRef>
+          <a:effectRef idx="2">
+            <a:schemeClr val="accent1"/>
+          </a:effectRef>
+          <a:fontRef idx="minor">
+            <a:schemeClr val="lt1"/>
+          </a:fontRef>
+        </p:style>
+        <p:txBody>
+          <a:bodyPr rtlCol="0" anchor="ctr"/>
+          <a:lstStyle/>
+          <a:p>
+            <a:pPr algn="ctr"/>
+            <a:r>
+              <a:rPr sz="1800" b="1">
+                <a:solidFill>
+                  <a:srgbClr val="0B0F14"/>
+                </a:solidFill>
+              </a:rPr>
+              <a:t>evaluate</a:t>
+            </a:r>
+          </a:p>
+        </p:txBody>
+      </p:sp>
+      <p:sp>
+        <p:nvSpPr>
+          <p:cNvPr id="15" name="TextBox 14"/>
+          <p:cNvSpPr txBox="1"/>
+          <p:nvPr/>
+        </p:nvSpPr>
+        <p:spPr>
+          <a:xfrm>
+            <a:off x="822960" y="2377440"/>
+            <a:ext cx="10515600" cy="457200"/>
+          </a:xfrm>
+          <a:prstGeom prst="rect">
+            <a:avLst/>
+          </a:prstGeom>
+          <a:noFill/>
+        </p:spPr>
+        <p:txBody>
+          <a:bodyPr wrap="square" anchor="t">
+            <a:spAutoFit/>
+          </a:bodyPr>
+          <a:lstStyle/>
+          <a:p>
+            <a:pPr algn="l"/>
+            <a:r>
+              <a:rPr sz="1600" b="1">
+                <a:solidFill>
+                  <a:srgbClr val="FF6D04"/>
+                </a:solidFill>
+                <a:latin typeface="Menlo"/>
+              </a:rPr>
+              <a:t>95–105 min</a:t>
+            </a:r>
+          </a:p>
+        </p:txBody>
+      </p:sp>
+      <p:sp>
+        <p:nvSpPr>
+          <p:cNvPr id="16" name="TextBox 15"/>
+          <p:cNvSpPr txBox="1"/>
+          <p:nvPr/>
+        </p:nvSpPr>
+        <p:spPr>
+          <a:xfrm>
+            <a:off x="822960" y="2743200"/>
+            <a:ext cx="10515600" cy="1188720"/>
+          </a:xfrm>
+          <a:prstGeom prst="rect">
+            <a:avLst/>
+          </a:prstGeom>
+          <a:noFill/>
+        </p:spPr>
+        <p:txBody>
+          <a:bodyPr wrap="square" anchor="t">
+            <a:spAutoFit/>
+          </a:bodyPr>
+          <a:lstStyle/>
+          <a:p>
+            <a:pPr algn="l"/>
+            <a:r>
+              <a:rPr sz="5400" b="1">
+                <a:solidFill>
+                  <a:srgbClr val="F2F4F7"/>
+                </a:solidFill>
+                <a:latin typeface="Helvetica Neue"/>
+              </a:rPr>
+              <a:t>Close the loop on the timeline</a:t>
+            </a:r>
+          </a:p>
+        </p:txBody>
+      </p:sp>
+      <p:sp>
+        <p:nvSpPr>
+          <p:cNvPr id="17" name="TextBox 16"/>
+          <p:cNvSpPr txBox="1"/>
+          <p:nvPr/>
+        </p:nvSpPr>
+        <p:spPr>
+          <a:xfrm>
+            <a:off x="822960" y="4023360"/>
+            <a:ext cx="10515600" cy="822960"/>
+          </a:xfrm>
+          <a:prstGeom prst="rect">
+            <a:avLst/>
+          </a:prstGeom>
+          <a:noFill/>
+        </p:spPr>
+        <p:txBody>
+          <a:bodyPr wrap="square" anchor="t">
+            <a:spAutoFit/>
+          </a:bodyPr>
+          <a:lstStyle/>
+          <a:p>
+            <a:pPr algn="l"/>
+            <a:r>
+              <a:rPr sz="2200" b="0">
+                <a:solidFill>
+                  <a:srgbClr val="9AA4B2"/>
+                </a:solidFill>
+                <a:latin typeface="Helvetica Neue"/>
+              </a:rPr>
+              <a:t>Detections on frames become temporal tags on the recording. Query the episodes by what the model saw.</a:t>
+            </a:r>
+          </a:p>
+        </p:txBody>
+      </p:sp>
+      <p:sp>
+        <p:nvSpPr>
+          <p:cNvPr id="18" name="Rounded Rectangle 17"/>
+          <p:cNvSpPr/>
+          <p:nvPr/>
+        </p:nvSpPr>
+        <p:spPr>
+          <a:xfrm>
+            <a:off x="822960" y="5623560"/>
+            <a:ext cx="10515600" cy="640080"/>
+          </a:xfrm>
+          <a:prstGeom prst="roundRect">
+            <a:avLst>
+              <a:gd name="adj" fmla="val 4000"/>
+            </a:avLst>
+          </a:prstGeom>
+          <a:solidFill>
+            <a:srgbClr val="141A22"/>
+          </a:solidFill>
+          <a:ln>
+            <a:solidFill>
+              <a:srgbClr val="232A38"/>
+            </a:solidFill>
+          </a:ln>
+          <a:effectLst/>
+        </p:spPr>
+        <p:style>
+          <a:lnRef idx="1">
+            <a:schemeClr val="accent1"/>
+          </a:lnRef>
+          <a:fillRef idx="3">
+            <a:schemeClr val="accent1"/>
+          </a:fillRef>
+          <a:effectRef idx="2">
+            <a:schemeClr val="accent1"/>
+          </a:effectRef>
+          <a:fontRef idx="minor">
+            <a:schemeClr val="lt1"/>
+          </a:fontRef>
+        </p:style>
+        <p:txBody>
+          <a:bodyPr rtlCol="0" anchor="ctr"/>
+          <a:lstStyle/>
+          <a:p>
+            <a:pPr algn="ctr"/>
+          </a:p>
+        </p:txBody>
+      </p:sp>
+      <p:sp>
+        <p:nvSpPr>
+          <p:cNvPr id="19" name="TextBox 18"/>
+          <p:cNvSpPr txBox="1"/>
+          <p:nvPr/>
+        </p:nvSpPr>
+        <p:spPr>
+          <a:xfrm>
+            <a:off x="1005840" y="5751576"/>
+            <a:ext cx="5120640" cy="457200"/>
+          </a:xfrm>
+          <a:prstGeom prst="rect">
+            <a:avLst/>
+          </a:prstGeom>
+          <a:noFill/>
+        </p:spPr>
+        <p:txBody>
+          <a:bodyPr wrap="square" anchor="t">
+            <a:spAutoFit/>
+          </a:bodyPr>
+          <a:lstStyle/>
+          <a:p>
+            <a:pPr algn="l"/>
+            <a:r>
+              <a:rPr sz="1500" b="1">
+                <a:solidFill>
+                  <a:srgbClr val="FF6D04"/>
+                </a:solidFill>
+                <a:latin typeface="Menlo"/>
+              </a:rPr>
+              <a:t>you  </a:t>
+            </a:r>
+            <a:r>
+              <a:rPr sz="1500" b="0">
+                <a:solidFill>
+                  <a:srgbClr val="F2F4F7"/>
+                </a:solidFill>
+                <a:latin typeface="Menlo"/>
+              </a:rPr>
+              <a:t>06_close_the_loop.ipynb</a:t>
+            </a:r>
+          </a:p>
+        </p:txBody>
+      </p:sp>
+      <p:sp>
+        <p:nvSpPr>
+          <p:cNvPr id="20" name="TextBox 19"/>
+          <p:cNvSpPr txBox="1"/>
+          <p:nvPr/>
+        </p:nvSpPr>
+        <p:spPr>
+          <a:xfrm>
+            <a:off x="6217920" y="5751576"/>
+            <a:ext cx="5029200" cy="457200"/>
+          </a:xfrm>
+          <a:prstGeom prst="rect">
+            <a:avLst/>
+          </a:prstGeom>
+          <a:noFill/>
+        </p:spPr>
+        <p:txBody>
+          <a:bodyPr wrap="square" anchor="t">
+            <a:spAutoFit/>
+          </a:bodyPr>
+          <a:lstStyle/>
+          <a:p>
+            <a:pPr algn="l"/>
+            <a:r>
+              <a:rPr sz="1500" b="1">
+                <a:solidFill>
+                  <a:srgbClr val="7CF29A"/>
+                </a:solidFill>
+                <a:latin typeface="Menlo"/>
+              </a:rPr>
+              <a:t>presenter  </a:t>
+            </a:r>
+            <a:r>
+              <a:rPr sz="1500" b="0">
+                <a:solidFill>
+                  <a:srgbClr val="F2F4F7"/>
+                </a:solidFill>
+                <a:latin typeface="Menlo"/>
+              </a:rPr>
+              <a:t>demo.fiftyone.ai · predictions back on Droid demo</a:t>
+            </a:r>
+          </a:p>
+        </p:txBody>
+      </p:sp>
+    </p:spTree>
+  </p:cSld>
+  <p:clrMapOvr>
+    <a:masterClrMapping/>
+  </p:clrMapOvr>
+</p:sld>
+</file>
+
+<file path=ppt/slides/slide2.xml><?xml version="1.0" encoding="utf-8"?>
+<p:sld xmlns:a="http://schemas.openxmlformats.org/drawingml/2006/main" xmlns:p="http://schemas.openxmlformats.org/presentationml/2006/main" xmlns:r="http://schemas.openxmlformats.org/officeDocument/2006/relationships">
+  <p:cSld>
+    <p:bg>
+      <p:bgPr>
+        <a:solidFill>
+          <a:srgbClr val="0B0F14"/>
+        </a:solidFill>
+        <a:effectLst/>
+      </p:bgPr>
+    </p:bg>
+    <p:spTree>
+      <p:nvGrpSpPr>
+        <p:cNvPr id="1" name=""/>
+        <p:cNvGrpSpPr/>
+        <p:nvPr/>
+      </p:nvGrpSpPr>
+      <p:grpSpPr/>
+      <p:sp>
+        <p:nvSpPr>
+          <p:cNvPr id="2" name="TextBox 1"/>
+          <p:cNvSpPr txBox="1"/>
+          <p:nvPr/>
+        </p:nvSpPr>
+        <p:spPr>
+          <a:xfrm>
+            <a:off x="548640" y="6400800"/>
+            <a:ext cx="7315200" cy="320040"/>
+          </a:xfrm>
+          <a:prstGeom prst="rect">
+            <a:avLst/>
+          </a:prstGeom>
+          <a:noFill/>
+        </p:spPr>
+        <p:txBody>
+          <a:bodyPr wrap="square" anchor="t">
+            <a:spAutoFit/>
+          </a:bodyPr>
+          <a:lstStyle/>
+          <a:p>
+            <a:pPr algn="l"/>
+            <a:r>
+              <a:rPr sz="1100" b="0">
+                <a:solidFill>
+                  <a:srgbClr val="9AA4B2"/>
+                </a:solidFill>
+                <a:latin typeface="Helvetica Neue"/>
+              </a:rPr>
+              <a:t>Nebius × Voxel51 · Physical AI Workshop</a:t>
+            </a:r>
+          </a:p>
+        </p:txBody>
+      </p:sp>
+      <p:sp>
+        <p:nvSpPr>
+          <p:cNvPr id="3" name="TextBox 2"/>
+          <p:cNvSpPr txBox="1"/>
+          <p:nvPr/>
+        </p:nvSpPr>
+        <p:spPr>
+          <a:xfrm>
+            <a:off x="10972800" y="6400800"/>
+            <a:ext cx="731520" cy="320040"/>
+          </a:xfrm>
+          <a:prstGeom prst="rect">
+            <a:avLst/>
+          </a:prstGeom>
+          <a:noFill/>
+        </p:spPr>
+        <p:txBody>
+          <a:bodyPr wrap="square" anchor="t">
+            <a:spAutoFit/>
+          </a:bodyPr>
+          <a:lstStyle/>
+          <a:p>
+            <a:pPr algn="r"/>
+            <a:r>
+              <a:rPr sz="1100" b="0">
+                <a:solidFill>
+                  <a:srgbClr val="9AA4B2"/>
+                </a:solidFill>
+                <a:latin typeface="Helvetica Neue"/>
+              </a:rPr>
+              <a:t>2</a:t>
+            </a:r>
+          </a:p>
+        </p:txBody>
+      </p:sp>
+      <p:sp>
+        <p:nvSpPr>
+          <p:cNvPr id="4" name="TextBox 3"/>
+          <p:cNvSpPr txBox="1"/>
+          <p:nvPr/>
+        </p:nvSpPr>
+        <p:spPr>
+          <a:xfrm>
+            <a:off x="822960" y="502920"/>
+            <a:ext cx="7315200" cy="365760"/>
+          </a:xfrm>
+          <a:prstGeom prst="rect">
+            <a:avLst/>
+          </a:prstGeom>
+          <a:noFill/>
+        </p:spPr>
+        <p:txBody>
+          <a:bodyPr wrap="square" anchor="t">
+            <a:spAutoFit/>
+          </a:bodyPr>
+          <a:lstStyle/>
+          <a:p>
+            <a:pPr algn="l"/>
+            <a:r>
+              <a:rPr sz="1300" b="1">
+                <a:solidFill>
+                  <a:srgbClr val="FF6D04"/>
+                </a:solidFill>
+                <a:latin typeface="Helvetica Neue"/>
+              </a:rPr>
+              <a:t>FOLLOW ALONG</a:t>
+            </a:r>
+          </a:p>
+        </p:txBody>
+      </p:sp>
+      <p:sp>
+        <p:nvSpPr>
+          <p:cNvPr id="5" name="TextBox 4"/>
+          <p:cNvSpPr txBox="1"/>
+          <p:nvPr/>
+        </p:nvSpPr>
+        <p:spPr>
+          <a:xfrm>
+            <a:off x="822960" y="868680"/>
+            <a:ext cx="10515600" cy="1005840"/>
+          </a:xfrm>
+          <a:prstGeom prst="rect">
+            <a:avLst/>
+          </a:prstGeom>
+          <a:noFill/>
+        </p:spPr>
+        <p:txBody>
+          <a:bodyPr wrap="square" anchor="t">
+            <a:spAutoFit/>
+          </a:bodyPr>
+          <a:lstStyle/>
+          <a:p>
+            <a:pPr algn="l"/>
+            <a:r>
+              <a:rPr sz="4000" b="1">
+                <a:solidFill>
+                  <a:srgbClr val="F2F4F7"/>
+                </a:solidFill>
+                <a:latin typeface="Helvetica Neue"/>
+              </a:rPr>
+              <a:t>Everything you need is one repo away</a:t>
+            </a:r>
+          </a:p>
+        </p:txBody>
+      </p:sp>
+      <p:sp>
+        <p:nvSpPr>
+          <p:cNvPr id="6" name="Rounded Rectangle 5"/>
+          <p:cNvSpPr/>
+          <p:nvPr/>
+        </p:nvSpPr>
+        <p:spPr>
+          <a:xfrm>
+            <a:off x="822960" y="2103120"/>
+            <a:ext cx="6949440" cy="2651760"/>
+          </a:xfrm>
+          <a:prstGeom prst="roundRect">
+            <a:avLst>
+              <a:gd name="adj" fmla="val 4000"/>
+            </a:avLst>
+          </a:prstGeom>
+          <a:solidFill>
+            <a:srgbClr val="141A22"/>
+          </a:solidFill>
+          <a:ln>
+            <a:solidFill>
+              <a:srgbClr val="232A38"/>
+            </a:solidFill>
+          </a:ln>
+          <a:effectLst/>
+        </p:spPr>
+        <p:style>
+          <a:lnRef idx="1">
+            <a:schemeClr val="accent1"/>
+          </a:lnRef>
+          <a:fillRef idx="3">
+            <a:schemeClr val="accent1"/>
+          </a:fillRef>
+          <a:effectRef idx="2">
+            <a:schemeClr val="accent1"/>
+          </a:effectRef>
+          <a:fontRef idx="minor">
+            <a:schemeClr val="lt1"/>
+          </a:fontRef>
+        </p:style>
+        <p:txBody>
+          <a:bodyPr rtlCol="0" anchor="ctr" wrap="square" lIns="274320" rIns="274320" tIns="182880"/>
+          <a:lstStyle/>
+          <a:p>
+            <a:pPr algn="ctr"/>
+            <a:r>
+              <a:rPr sz="1600">
+                <a:solidFill>
+                  <a:srgbClr val="C8D3E0"/>
+                </a:solidFill>
+                <a:latin typeface="Menlo"/>
+              </a:rPr>
+              <a:t>git clone https://github.com/danielgural/physical-ai-workshop</a:t>
+            </a:r>
+          </a:p>
+          <a:p>
+            <a:r>
+              <a:rPr sz="1600">
+                <a:solidFill>
+                  <a:srgbClr val="C8D3E0"/>
+                </a:solidFill>
+                <a:latin typeface="Menlo"/>
+              </a:rPr>
+              <a:t>cd physical-ai-workshop</a:t>
+            </a:r>
+          </a:p>
+          <a:p>
+            <a:r>
+              <a:rPr sz="1600">
+                <a:solidFill>
+                  <a:srgbClr val="C8D3E0"/>
+                </a:solidFill>
+                <a:latin typeface="Menlo"/>
+              </a:rPr>
+              <a:t>python -m venv .venv &amp;&amp; source .venv/bin/activate</a:t>
+            </a:r>
+          </a:p>
+          <a:p>
+            <a:r>
+              <a:rPr sz="1600">
+                <a:solidFill>
+                  <a:srgbClr val="C8D3E0"/>
+                </a:solidFill>
+                <a:latin typeface="Menlo"/>
+              </a:rPr>
+              <a:t>pip install -r requirements.txt</a:t>
+            </a:r>
+          </a:p>
+          <a:p>
+            <a:r>
+              <a:rPr sz="1600">
+                <a:solidFill>
+                  <a:srgbClr val="C8D3E0"/>
+                </a:solidFill>
+                <a:latin typeface="Menlo"/>
+              </a:rPr>
+              <a:t>python notebooks/download_data.py     # 1.1 GB, once</a:t>
+            </a:r>
+          </a:p>
+          <a:p>
+            <a:r>
+              <a:rPr sz="1600">
+                <a:solidFill>
+                  <a:srgbClr val="C8D3E0"/>
+                </a:solidFill>
+                <a:latin typeface="Menlo"/>
+              </a:rPr>
+              <a:t>jupyter lab notebooks/</a:t>
+            </a:r>
+          </a:p>
+        </p:txBody>
+      </p:sp>
+      <p:sp>
+        <p:nvSpPr>
+          <p:cNvPr id="7" name="TextBox 6"/>
+          <p:cNvSpPr txBox="1"/>
+          <p:nvPr/>
+        </p:nvSpPr>
+        <p:spPr>
+          <a:xfrm>
+            <a:off x="822960" y="4892040"/>
+            <a:ext cx="6949440" cy="1508760"/>
+          </a:xfrm>
+          <a:prstGeom prst="rect">
+            <a:avLst/>
+          </a:prstGeom>
+          <a:noFill/>
+        </p:spPr>
+        <p:txBody>
+          <a:bodyPr wrap="square" anchor="t">
+            <a:spAutoFit/>
+          </a:bodyPr>
+          <a:lstStyle/>
+          <a:p>
+            <a:pPr algn="l">
+              <a:spcAft>
+                <a:spcPts val="1200"/>
+              </a:spcAft>
+            </a:pPr>
+            <a:r>
+              <a:rPr sz="1700" b="1">
+                <a:solidFill>
+                  <a:srgbClr val="FF6D04"/>
+                </a:solidFill>
+                <a:latin typeface="Helvetica Neue"/>
+              </a:rPr>
+              <a:t>•  </a:t>
+            </a:r>
+            <a:r>
+              <a:rPr sz="1700" b="1">
+                <a:solidFill>
+                  <a:srgbClr val="F2F4F7"/>
+                </a:solidFill>
+                <a:latin typeface="Helvetica Neue"/>
+              </a:rPr>
+              <a:t>Laptop CPU is enough. </a:t>
+            </a:r>
+            <a:r>
+              <a:rPr sz="1700" b="0">
+                <a:solidFill>
+                  <a:srgbClr val="9AA4B2"/>
+                </a:solidFill>
+                <a:latin typeface="Helvetica Neue"/>
+              </a:rPr>
+              <a:t>Every GPU step's output is already in the datasets you download.</a:t>
+            </a:r>
+          </a:p>
+          <a:p>
+            <a:pPr algn="l">
+              <a:spcAft>
+                <a:spcPts val="1200"/>
+              </a:spcAft>
+            </a:pPr>
+            <a:r>
+              <a:rPr sz="1700" b="1">
+                <a:solidFill>
+                  <a:srgbClr val="FF6D04"/>
+                </a:solidFill>
+                <a:latin typeface="Helvetica Neue"/>
+              </a:rPr>
+              <a:t>•  </a:t>
+            </a:r>
+            <a:r>
+              <a:rPr sz="1700" b="1">
+                <a:solidFill>
+                  <a:srgbClr val="F2F4F7"/>
+                </a:solidFill>
+                <a:latin typeface="Helvetica Neue"/>
+              </a:rPr>
+              <a:t>Slow wifi? </a:t>
+            </a:r>
+            <a:r>
+              <a:rPr sz="1700" b="0">
+                <a:solidFill>
+                  <a:srgbClr val="9AA4B2"/>
+                </a:solidFill>
+                <a:latin typeface="Helvetica Neue"/>
+              </a:rPr>
+              <a:t>USB sticks at the front: python notebooks/download_data.py --from-usb /Volumes/WORKSHOP</a:t>
+            </a:r>
+          </a:p>
+        </p:txBody>
+      </p:sp>
+      <p:pic>
+        <p:nvPicPr>
+          <p:cNvPr id="8" name="Picture 7" descr="repo.png"/>
+          <p:cNvPicPr>
+            <a:picLocks noChangeAspect="1"/>
+          </p:cNvPicPr>
+          <p:nvPr/>
+        </p:nvPicPr>
+        <p:blipFill>
+          <a:blip r:embed="rId3"/>
+          <a:stretch>
+            <a:fillRect/>
+          </a:stretch>
+        </p:blipFill>
+        <p:spPr>
+          <a:xfrm>
+            <a:off x="8595360" y="2103120"/>
+            <a:ext cx="2743200" cy="2743200"/>
+          </a:xfrm>
+          <a:prstGeom prst="rect">
+            <a:avLst/>
+          </a:prstGeom>
+        </p:spPr>
+      </p:pic>
+      <p:sp>
+        <p:nvSpPr>
+          <p:cNvPr id="9" name="TextBox 8"/>
+          <p:cNvSpPr txBox="1"/>
+          <p:nvPr/>
+        </p:nvSpPr>
+        <p:spPr>
+          <a:xfrm>
+            <a:off x="7436815" y="4892040"/>
+            <a:ext cx="4572000" cy="365760"/>
+          </a:xfrm>
+          <a:prstGeom prst="rect">
+            <a:avLst/>
+          </a:prstGeom>
+          <a:noFill/>
+        </p:spPr>
+        <p:txBody>
+          <a:bodyPr wrap="square" anchor="t">
+            <a:spAutoFit/>
+          </a:bodyPr>
+          <a:lstStyle/>
+          <a:p>
+            <a:pPr algn="ctr"/>
+            <a:r>
+              <a:rPr sz="1300" b="0">
+                <a:solidFill>
+                  <a:srgbClr val="9AA4B2"/>
+                </a:solidFill>
+                <a:latin typeface="Menlo"/>
+              </a:rPr>
+              <a:t>github.com/danielgural/physical-ai-workshop</a:t>
+            </a:r>
+          </a:p>
+        </p:txBody>
+      </p:sp>
+    </p:spTree>
+  </p:cSld>
+  <p:clrMapOvr>
+    <a:masterClrMapping/>
+  </p:clrMapOvr>
+</p:sld>
+</file>
+
+<file path=ppt/slides/slide20.xml><?xml version="1.0" encoding="utf-8"?>
+<p:sld xmlns:a="http://schemas.openxmlformats.org/drawingml/2006/main" xmlns:p="http://schemas.openxmlformats.org/presentationml/2006/main" xmlns:r="http://schemas.openxmlformats.org/officeDocument/2006/relationships">
+  <p:cSld>
+    <p:bg>
+      <p:bgPr>
+        <a:solidFill>
+          <a:srgbClr val="0B0F14"/>
+        </a:solidFill>
+        <a:effectLst/>
+      </p:bgPr>
+    </p:bg>
+    <p:spTree>
+      <p:nvGrpSpPr>
+        <p:cNvPr id="1" name=""/>
+        <p:cNvGrpSpPr/>
+        <p:nvPr/>
+      </p:nvGrpSpPr>
+      <p:grpSpPr/>
+      <p:sp>
+        <p:nvSpPr>
+          <p:cNvPr id="2" name="TextBox 1"/>
+          <p:cNvSpPr txBox="1"/>
+          <p:nvPr/>
+        </p:nvSpPr>
+        <p:spPr>
+          <a:xfrm>
+            <a:off x="548640" y="6400800"/>
+            <a:ext cx="7315200" cy="320040"/>
+          </a:xfrm>
+          <a:prstGeom prst="rect">
+            <a:avLst/>
+          </a:prstGeom>
+          <a:noFill/>
+        </p:spPr>
+        <p:txBody>
+          <a:bodyPr wrap="square" anchor="t">
+            <a:spAutoFit/>
+          </a:bodyPr>
+          <a:lstStyle/>
+          <a:p>
+            <a:pPr algn="l"/>
+            <a:r>
+              <a:rPr sz="1100" b="0">
+                <a:solidFill>
+                  <a:srgbClr val="9AA4B2"/>
+                </a:solidFill>
+                <a:latin typeface="Helvetica Neue"/>
+              </a:rPr>
+              <a:t>Nebius × Voxel51 · Physical AI Workshop</a:t>
+            </a:r>
+          </a:p>
+        </p:txBody>
+      </p:sp>
+      <p:sp>
+        <p:nvSpPr>
+          <p:cNvPr id="3" name="TextBox 2"/>
+          <p:cNvSpPr txBox="1"/>
+          <p:nvPr/>
+        </p:nvSpPr>
+        <p:spPr>
+          <a:xfrm>
+            <a:off x="10972800" y="6400800"/>
+            <a:ext cx="731520" cy="320040"/>
+          </a:xfrm>
+          <a:prstGeom prst="rect">
+            <a:avLst/>
+          </a:prstGeom>
+          <a:noFill/>
+        </p:spPr>
+        <p:txBody>
+          <a:bodyPr wrap="square" anchor="t">
+            <a:spAutoFit/>
+          </a:bodyPr>
+          <a:lstStyle/>
+          <a:p>
+            <a:pPr algn="r"/>
+            <a:r>
+              <a:rPr sz="1100" b="0">
+                <a:solidFill>
+                  <a:srgbClr val="9AA4B2"/>
+                </a:solidFill>
+                <a:latin typeface="Helvetica Neue"/>
+              </a:rPr>
+              <a:t>20</a:t>
             </a:r>
           </a:p>
         </p:txBody>
@@ -12127,784 +12976,6 @@
 </p:sld>
 </file>
 
-<file path=ppt/slides/slide2.xml><?xml version="1.0" encoding="utf-8"?>
-<p:sld xmlns:a="http://schemas.openxmlformats.org/drawingml/2006/main" xmlns:p="http://schemas.openxmlformats.org/presentationml/2006/main" xmlns:r="http://schemas.openxmlformats.org/officeDocument/2006/relationships">
-  <p:cSld>
-    <p:bg>
-      <p:bgPr>
-        <a:solidFill>
-          <a:srgbClr val="0B0F14"/>
-        </a:solidFill>
-        <a:effectLst/>
-      </p:bgPr>
-    </p:bg>
-    <p:spTree>
-      <p:nvGrpSpPr>
-        <p:cNvPr id="1" name=""/>
-        <p:cNvGrpSpPr/>
-        <p:nvPr/>
-      </p:nvGrpSpPr>
-      <p:grpSpPr/>
-      <p:sp>
-        <p:nvSpPr>
-          <p:cNvPr id="2" name="TextBox 1"/>
-          <p:cNvSpPr txBox="1"/>
-          <p:nvPr/>
-        </p:nvSpPr>
-        <p:spPr>
-          <a:xfrm>
-            <a:off x="548640" y="6400800"/>
-            <a:ext cx="7315200" cy="320040"/>
-          </a:xfrm>
-          <a:prstGeom prst="rect">
-            <a:avLst/>
-          </a:prstGeom>
-          <a:noFill/>
-        </p:spPr>
-        <p:txBody>
-          <a:bodyPr wrap="square" anchor="t">
-            <a:spAutoFit/>
-          </a:bodyPr>
-          <a:lstStyle/>
-          <a:p>
-            <a:pPr algn="l"/>
-            <a:r>
-              <a:rPr sz="1100" b="0">
-                <a:solidFill>
-                  <a:srgbClr val="9AA4B2"/>
-                </a:solidFill>
-                <a:latin typeface="Helvetica Neue"/>
-              </a:rPr>
-              <a:t>Nebius × Voxel51 · Physical AI Workshop</a:t>
-            </a:r>
-          </a:p>
-        </p:txBody>
-      </p:sp>
-      <p:sp>
-        <p:nvSpPr>
-          <p:cNvPr id="3" name="TextBox 2"/>
-          <p:cNvSpPr txBox="1"/>
-          <p:nvPr/>
-        </p:nvSpPr>
-        <p:spPr>
-          <a:xfrm>
-            <a:off x="10972800" y="6400800"/>
-            <a:ext cx="731520" cy="320040"/>
-          </a:xfrm>
-          <a:prstGeom prst="rect">
-            <a:avLst/>
-          </a:prstGeom>
-          <a:noFill/>
-        </p:spPr>
-        <p:txBody>
-          <a:bodyPr wrap="square" anchor="t">
-            <a:spAutoFit/>
-          </a:bodyPr>
-          <a:lstStyle/>
-          <a:p>
-            <a:pPr algn="r"/>
-            <a:r>
-              <a:rPr sz="1100" b="0">
-                <a:solidFill>
-                  <a:srgbClr val="9AA4B2"/>
-                </a:solidFill>
-                <a:latin typeface="Helvetica Neue"/>
-              </a:rPr>
-              <a:t>2</a:t>
-            </a:r>
-          </a:p>
-        </p:txBody>
-      </p:sp>
-      <p:sp>
-        <p:nvSpPr>
-          <p:cNvPr id="4" name="TextBox 3"/>
-          <p:cNvSpPr txBox="1"/>
-          <p:nvPr/>
-        </p:nvSpPr>
-        <p:spPr>
-          <a:xfrm>
-            <a:off x="822960" y="502920"/>
-            <a:ext cx="7315200" cy="365760"/>
-          </a:xfrm>
-          <a:prstGeom prst="rect">
-            <a:avLst/>
-          </a:prstGeom>
-          <a:noFill/>
-        </p:spPr>
-        <p:txBody>
-          <a:bodyPr wrap="square" anchor="t">
-            <a:spAutoFit/>
-          </a:bodyPr>
-          <a:lstStyle/>
-          <a:p>
-            <a:pPr algn="l"/>
-            <a:r>
-              <a:rPr sz="1300" b="1">
-                <a:solidFill>
-                  <a:srgbClr val="FF6D04"/>
-                </a:solidFill>
-                <a:latin typeface="Helvetica Neue"/>
-              </a:rPr>
-              <a:t>FOLLOW ALONG</a:t>
-            </a:r>
-          </a:p>
-        </p:txBody>
-      </p:sp>
-      <p:sp>
-        <p:nvSpPr>
-          <p:cNvPr id="5" name="TextBox 4"/>
-          <p:cNvSpPr txBox="1"/>
-          <p:nvPr/>
-        </p:nvSpPr>
-        <p:spPr>
-          <a:xfrm>
-            <a:off x="822960" y="868680"/>
-            <a:ext cx="10515600" cy="1005840"/>
-          </a:xfrm>
-          <a:prstGeom prst="rect">
-            <a:avLst/>
-          </a:prstGeom>
-          <a:noFill/>
-        </p:spPr>
-        <p:txBody>
-          <a:bodyPr wrap="square" anchor="t">
-            <a:spAutoFit/>
-          </a:bodyPr>
-          <a:lstStyle/>
-          <a:p>
-            <a:pPr algn="l"/>
-            <a:r>
-              <a:rPr sz="4000" b="1">
-                <a:solidFill>
-                  <a:srgbClr val="F2F4F7"/>
-                </a:solidFill>
-                <a:latin typeface="Helvetica Neue"/>
-              </a:rPr>
-              <a:t>Everything you need is one repo away</a:t>
-            </a:r>
-          </a:p>
-        </p:txBody>
-      </p:sp>
-      <p:sp>
-        <p:nvSpPr>
-          <p:cNvPr id="6" name="Rounded Rectangle 5"/>
-          <p:cNvSpPr/>
-          <p:nvPr/>
-        </p:nvSpPr>
-        <p:spPr>
-          <a:xfrm>
-            <a:off x="822960" y="2103120"/>
-            <a:ext cx="6949440" cy="2651760"/>
-          </a:xfrm>
-          <a:prstGeom prst="roundRect">
-            <a:avLst>
-              <a:gd name="adj" fmla="val 4000"/>
-            </a:avLst>
-          </a:prstGeom>
-          <a:solidFill>
-            <a:srgbClr val="141A22"/>
-          </a:solidFill>
-          <a:ln>
-            <a:solidFill>
-              <a:srgbClr val="232A38"/>
-            </a:solidFill>
-          </a:ln>
-          <a:effectLst/>
-        </p:spPr>
-        <p:style>
-          <a:lnRef idx="1">
-            <a:schemeClr val="accent1"/>
-          </a:lnRef>
-          <a:fillRef idx="3">
-            <a:schemeClr val="accent1"/>
-          </a:fillRef>
-          <a:effectRef idx="2">
-            <a:schemeClr val="accent1"/>
-          </a:effectRef>
-          <a:fontRef idx="minor">
-            <a:schemeClr val="lt1"/>
-          </a:fontRef>
-        </p:style>
-        <p:txBody>
-          <a:bodyPr rtlCol="0" anchor="ctr" wrap="square" lIns="274320" rIns="274320" tIns="182880"/>
-          <a:lstStyle/>
-          <a:p>
-            <a:pPr algn="ctr"/>
-            <a:r>
-              <a:rPr sz="1600">
-                <a:solidFill>
-                  <a:srgbClr val="C8D3E0"/>
-                </a:solidFill>
-                <a:latin typeface="Menlo"/>
-              </a:rPr>
-              <a:t>git clone https://github.com/danielgural/physical-ai-workshop</a:t>
-            </a:r>
-          </a:p>
-          <a:p>
-            <a:r>
-              <a:rPr sz="1600">
-                <a:solidFill>
-                  <a:srgbClr val="C8D3E0"/>
-                </a:solidFill>
-                <a:latin typeface="Menlo"/>
-              </a:rPr>
-              <a:t>cd physical-ai-workshop</a:t>
-            </a:r>
-          </a:p>
-          <a:p>
-            <a:r>
-              <a:rPr sz="1600">
-                <a:solidFill>
-                  <a:srgbClr val="C8D3E0"/>
-                </a:solidFill>
-                <a:latin typeface="Menlo"/>
-              </a:rPr>
-              <a:t>python -m venv .venv &amp;&amp; source .venv/bin/activate</a:t>
-            </a:r>
-          </a:p>
-          <a:p>
-            <a:r>
-              <a:rPr sz="1600">
-                <a:solidFill>
-                  <a:srgbClr val="C8D3E0"/>
-                </a:solidFill>
-                <a:latin typeface="Menlo"/>
-              </a:rPr>
-              <a:t>pip install -r requirements.txt</a:t>
-            </a:r>
-          </a:p>
-          <a:p>
-            <a:r>
-              <a:rPr sz="1600">
-                <a:solidFill>
-                  <a:srgbClr val="C8D3E0"/>
-                </a:solidFill>
-                <a:latin typeface="Menlo"/>
-              </a:rPr>
-              <a:t>python notebooks/download_data.py     # 1.1 GB, once</a:t>
-            </a:r>
-          </a:p>
-          <a:p>
-            <a:r>
-              <a:rPr sz="1600">
-                <a:solidFill>
-                  <a:srgbClr val="C8D3E0"/>
-                </a:solidFill>
-                <a:latin typeface="Menlo"/>
-              </a:rPr>
-              <a:t>jupyter lab notebooks/</a:t>
-            </a:r>
-          </a:p>
-        </p:txBody>
-      </p:sp>
-      <p:sp>
-        <p:nvSpPr>
-          <p:cNvPr id="7" name="TextBox 6"/>
-          <p:cNvSpPr txBox="1"/>
-          <p:nvPr/>
-        </p:nvSpPr>
-        <p:spPr>
-          <a:xfrm>
-            <a:off x="822960" y="4892040"/>
-            <a:ext cx="6949440" cy="1508760"/>
-          </a:xfrm>
-          <a:prstGeom prst="rect">
-            <a:avLst/>
-          </a:prstGeom>
-          <a:noFill/>
-        </p:spPr>
-        <p:txBody>
-          <a:bodyPr wrap="square" anchor="t">
-            <a:spAutoFit/>
-          </a:bodyPr>
-          <a:lstStyle/>
-          <a:p>
-            <a:pPr algn="l">
-              <a:spcAft>
-                <a:spcPts val="1200"/>
-              </a:spcAft>
-            </a:pPr>
-            <a:r>
-              <a:rPr sz="1700" b="1">
-                <a:solidFill>
-                  <a:srgbClr val="FF6D04"/>
-                </a:solidFill>
-                <a:latin typeface="Helvetica Neue"/>
-              </a:rPr>
-              <a:t>•  </a:t>
-            </a:r>
-            <a:r>
-              <a:rPr sz="1700" b="1">
-                <a:solidFill>
-                  <a:srgbClr val="F2F4F7"/>
-                </a:solidFill>
-                <a:latin typeface="Helvetica Neue"/>
-              </a:rPr>
-              <a:t>Laptop CPU is enough. </a:t>
-            </a:r>
-            <a:r>
-              <a:rPr sz="1700" b="0">
-                <a:solidFill>
-                  <a:srgbClr val="9AA4B2"/>
-                </a:solidFill>
-                <a:latin typeface="Helvetica Neue"/>
-              </a:rPr>
-              <a:t>Every GPU step's output is already in the datasets you download.</a:t>
-            </a:r>
-          </a:p>
-          <a:p>
-            <a:pPr algn="l">
-              <a:spcAft>
-                <a:spcPts val="1200"/>
-              </a:spcAft>
-            </a:pPr>
-            <a:r>
-              <a:rPr sz="1700" b="1">
-                <a:solidFill>
-                  <a:srgbClr val="FF6D04"/>
-                </a:solidFill>
-                <a:latin typeface="Helvetica Neue"/>
-              </a:rPr>
-              <a:t>•  </a:t>
-            </a:r>
-            <a:r>
-              <a:rPr sz="1700" b="1">
-                <a:solidFill>
-                  <a:srgbClr val="F2F4F7"/>
-                </a:solidFill>
-                <a:latin typeface="Helvetica Neue"/>
-              </a:rPr>
-              <a:t>Slow wifi? </a:t>
-            </a:r>
-            <a:r>
-              <a:rPr sz="1700" b="0">
-                <a:solidFill>
-                  <a:srgbClr val="9AA4B2"/>
-                </a:solidFill>
-                <a:latin typeface="Helvetica Neue"/>
-              </a:rPr>
-              <a:t>USB sticks at the front: python notebooks/download_data.py --from-usb /Volumes/WORKSHOP</a:t>
-            </a:r>
-          </a:p>
-        </p:txBody>
-      </p:sp>
-      <p:pic>
-        <p:nvPicPr>
-          <p:cNvPr id="8" name="Picture 7" descr="repo.png"/>
-          <p:cNvPicPr>
-            <a:picLocks noChangeAspect="1"/>
-          </p:cNvPicPr>
-          <p:nvPr/>
-        </p:nvPicPr>
-        <p:blipFill>
-          <a:blip r:embed="rId3"/>
-          <a:stretch>
-            <a:fillRect/>
-          </a:stretch>
-        </p:blipFill>
-        <p:spPr>
-          <a:xfrm>
-            <a:off x="8595360" y="2103120"/>
-            <a:ext cx="2743200" cy="2743200"/>
-          </a:xfrm>
-          <a:prstGeom prst="rect">
-            <a:avLst/>
-          </a:prstGeom>
-        </p:spPr>
-      </p:pic>
-      <p:sp>
-        <p:nvSpPr>
-          <p:cNvPr id="9" name="TextBox 8"/>
-          <p:cNvSpPr txBox="1"/>
-          <p:nvPr/>
-        </p:nvSpPr>
-        <p:spPr>
-          <a:xfrm>
-            <a:off x="7436815" y="4892040"/>
-            <a:ext cx="4572000" cy="365760"/>
-          </a:xfrm>
-          <a:prstGeom prst="rect">
-            <a:avLst/>
-          </a:prstGeom>
-          <a:noFill/>
-        </p:spPr>
-        <p:txBody>
-          <a:bodyPr wrap="square" anchor="t">
-            <a:spAutoFit/>
-          </a:bodyPr>
-          <a:lstStyle/>
-          <a:p>
-            <a:pPr algn="ctr"/>
-            <a:r>
-              <a:rPr sz="1300" b="0">
-                <a:solidFill>
-                  <a:srgbClr val="9AA4B2"/>
-                </a:solidFill>
-                <a:latin typeface="Menlo"/>
-              </a:rPr>
-              <a:t>github.com/danielgural/physical-ai-workshop</a:t>
-            </a:r>
-          </a:p>
-        </p:txBody>
-      </p:sp>
-    </p:spTree>
-  </p:cSld>
-  <p:clrMapOvr>
-    <a:masterClrMapping/>
-  </p:clrMapOvr>
-</p:sld>
-</file>
-
-<file path=ppt/slides/slide20.xml><?xml version="1.0" encoding="utf-8"?>
-<p:sld xmlns:a="http://schemas.openxmlformats.org/drawingml/2006/main" xmlns:p="http://schemas.openxmlformats.org/presentationml/2006/main" xmlns:r="http://schemas.openxmlformats.org/officeDocument/2006/relationships">
-  <p:cSld>
-    <p:bg>
-      <p:bgPr>
-        <a:solidFill>
-          <a:srgbClr val="0B0F14"/>
-        </a:solidFill>
-        <a:effectLst/>
-      </p:bgPr>
-    </p:bg>
-    <p:spTree>
-      <p:nvGrpSpPr>
-        <p:cNvPr id="1" name=""/>
-        <p:cNvGrpSpPr/>
-        <p:nvPr/>
-      </p:nvGrpSpPr>
-      <p:grpSpPr/>
-      <p:sp>
-        <p:nvSpPr>
-          <p:cNvPr id="2" name="TextBox 1"/>
-          <p:cNvSpPr txBox="1"/>
-          <p:nvPr/>
-        </p:nvSpPr>
-        <p:spPr>
-          <a:xfrm>
-            <a:off x="548640" y="6400800"/>
-            <a:ext cx="7315200" cy="320040"/>
-          </a:xfrm>
-          <a:prstGeom prst="rect">
-            <a:avLst/>
-          </a:prstGeom>
-          <a:noFill/>
-        </p:spPr>
-        <p:txBody>
-          <a:bodyPr wrap="square" anchor="t">
-            <a:spAutoFit/>
-          </a:bodyPr>
-          <a:lstStyle/>
-          <a:p>
-            <a:pPr algn="l"/>
-            <a:r>
-              <a:rPr sz="1100" b="0">
-                <a:solidFill>
-                  <a:srgbClr val="9AA4B2"/>
-                </a:solidFill>
-                <a:latin typeface="Helvetica Neue"/>
-              </a:rPr>
-              <a:t>Nebius × Voxel51 · Physical AI Workshop</a:t>
-            </a:r>
-          </a:p>
-        </p:txBody>
-      </p:sp>
-      <p:sp>
-        <p:nvSpPr>
-          <p:cNvPr id="3" name="TextBox 2"/>
-          <p:cNvSpPr txBox="1"/>
-          <p:nvPr/>
-        </p:nvSpPr>
-        <p:spPr>
-          <a:xfrm>
-            <a:off x="10972800" y="6400800"/>
-            <a:ext cx="731520" cy="320040"/>
-          </a:xfrm>
-          <a:prstGeom prst="rect">
-            <a:avLst/>
-          </a:prstGeom>
-          <a:noFill/>
-        </p:spPr>
-        <p:txBody>
-          <a:bodyPr wrap="square" anchor="t">
-            <a:spAutoFit/>
-          </a:bodyPr>
-          <a:lstStyle/>
-          <a:p>
-            <a:pPr algn="r"/>
-            <a:r>
-              <a:rPr sz="1100" b="0">
-                <a:solidFill>
-                  <a:srgbClr val="9AA4B2"/>
-                </a:solidFill>
-                <a:latin typeface="Helvetica Neue"/>
-              </a:rPr>
-              <a:t>20</a:t>
-            </a:r>
-          </a:p>
-        </p:txBody>
-      </p:sp>
-      <p:sp>
-        <p:nvSpPr>
-          <p:cNvPr id="4" name="TextBox 3"/>
-          <p:cNvSpPr txBox="1"/>
-          <p:nvPr/>
-        </p:nvSpPr>
-        <p:spPr>
-          <a:xfrm>
-            <a:off x="822960" y="502920"/>
-            <a:ext cx="7315200" cy="365760"/>
-          </a:xfrm>
-          <a:prstGeom prst="rect">
-            <a:avLst/>
-          </a:prstGeom>
-          <a:noFill/>
-        </p:spPr>
-        <p:txBody>
-          <a:bodyPr wrap="square" anchor="t">
-            <a:spAutoFit/>
-          </a:bodyPr>
-          <a:lstStyle/>
-          <a:p>
-            <a:pPr algn="l"/>
-            <a:r>
-              <a:rPr sz="1300" b="1">
-                <a:solidFill>
-                  <a:srgbClr val="FF6D04"/>
-                </a:solidFill>
-                <a:latin typeface="Helvetica Neue"/>
-              </a:rPr>
-              <a:t>YOUR DATA</a:t>
-            </a:r>
-          </a:p>
-        </p:txBody>
-      </p:sp>
-      <p:sp>
-        <p:nvSpPr>
-          <p:cNvPr id="5" name="TextBox 4"/>
-          <p:cNvSpPr txBox="1"/>
-          <p:nvPr/>
-        </p:nvSpPr>
-        <p:spPr>
-          <a:xfrm>
-            <a:off x="822960" y="868680"/>
-            <a:ext cx="10515600" cy="1005840"/>
-          </a:xfrm>
-          <a:prstGeom prst="rect">
-            <a:avLst/>
-          </a:prstGeom>
-          <a:noFill/>
-        </p:spPr>
-        <p:txBody>
-          <a:bodyPr wrap="square" anchor="t">
-            <a:spAutoFit/>
-          </a:bodyPr>
-          <a:lstStyle/>
-          <a:p>
-            <a:pPr algn="l"/>
-            <a:r>
-              <a:rPr sz="4000" b="1">
-                <a:solidFill>
-                  <a:srgbClr val="F2F4F7"/>
-                </a:solidFill>
-                <a:latin typeface="Helvetica Neue"/>
-              </a:rPr>
-              <a:t>Do this on your recordings this week</a:t>
-            </a:r>
-          </a:p>
-        </p:txBody>
-      </p:sp>
-      <p:sp>
-        <p:nvSpPr>
-          <p:cNvPr id="6" name="TextBox 5"/>
-          <p:cNvSpPr txBox="1"/>
-          <p:nvPr/>
-        </p:nvSpPr>
-        <p:spPr>
-          <a:xfrm>
-            <a:off x="822960" y="2103120"/>
-            <a:ext cx="6949440" cy="3840480"/>
-          </a:xfrm>
-          <a:prstGeom prst="rect">
-            <a:avLst/>
-          </a:prstGeom>
-          <a:noFill/>
-        </p:spPr>
-        <p:txBody>
-          <a:bodyPr wrap="square" anchor="t">
-            <a:spAutoFit/>
-          </a:bodyPr>
-          <a:lstStyle/>
-          <a:p>
-            <a:pPr algn="l">
-              <a:spcAft>
-                <a:spcPts val="1200"/>
-              </a:spcAft>
-            </a:pPr>
-            <a:r>
-              <a:rPr sz="1900" b="1">
-                <a:solidFill>
-                  <a:srgbClr val="FF6D04"/>
-                </a:solidFill>
-                <a:latin typeface="Helvetica Neue"/>
-              </a:rPr>
-              <a:t>•  </a:t>
-            </a:r>
-            <a:r>
-              <a:rPr sz="1900" b="1">
-                <a:solidFill>
-                  <a:srgbClr val="F2F4F7"/>
-                </a:solidFill>
-                <a:latin typeface="Helvetica Neue"/>
-              </a:rPr>
-              <a:t>pip install fiftyone </a:t>
-            </a:r>
-            <a:r>
-              <a:rPr sz="1900" b="0">
-                <a:solidFill>
-                  <a:srgbClr val="9AA4B2"/>
-                </a:solidFill>
-                <a:latin typeface="Helvetica Neue"/>
-              </a:rPr>
-              <a:t>— drop one of your own .mcap files into the MCAP Explorer. Watch 20 episodes. You will find something.</a:t>
-            </a:r>
-          </a:p>
-          <a:p>
-            <a:pPr algn="l">
-              <a:spcAft>
-                <a:spcPts val="1200"/>
-              </a:spcAft>
-            </a:pPr>
-            <a:r>
-              <a:rPr sz="1900" b="1">
-                <a:solidFill>
-                  <a:srgbClr val="FF6D04"/>
-                </a:solidFill>
-                <a:latin typeface="Helvetica Neue"/>
-              </a:rPr>
-              <a:t>•  </a:t>
-            </a:r>
-            <a:r>
-              <a:rPr sz="1900" b="1">
-                <a:solidFill>
-                  <a:srgbClr val="F2F4F7"/>
-                </a:solidFill>
-                <a:latin typeface="Helvetica Neue"/>
-              </a:rPr>
-              <a:t>Hosted FiftyOne </a:t>
-            </a:r>
-            <a:r>
-              <a:rPr sz="1900" b="0">
-                <a:solidFill>
-                  <a:srgbClr val="9AA4B2"/>
-                </a:solidFill>
-                <a:latin typeface="Helvetica Neue"/>
-              </a:rPr>
-              <a:t>— app.voxel51.com: same App, no install, datasets and brain runs in the cloud</a:t>
-            </a:r>
-          </a:p>
-          <a:p>
-            <a:pPr algn="l">
-              <a:spcAft>
-                <a:spcPts val="1200"/>
-              </a:spcAft>
-            </a:pPr>
-            <a:r>
-              <a:rPr sz="1900" b="1">
-                <a:solidFill>
-                  <a:srgbClr val="FF6D04"/>
-                </a:solidFill>
-                <a:latin typeface="Helvetica Neue"/>
-              </a:rPr>
-              <a:t>•  </a:t>
-            </a:r>
-            <a:r>
-              <a:rPr sz="1900" b="1">
-                <a:solidFill>
-                  <a:srgbClr val="F2F4F7"/>
-                </a:solidFill>
-                <a:latin typeface="Helvetica Neue"/>
-              </a:rPr>
-              <a:t>Take the repo home </a:t>
-            </a:r>
-            <a:r>
-              <a:rPr sz="1900" b="0">
-                <a:solidFill>
-                  <a:srgbClr val="9AA4B2"/>
-                </a:solidFill>
-                <a:latin typeface="Helvetica Neue"/>
-              </a:rPr>
-              <a:t>— extract_frames.py, the notebooks, the Nebius job helper are all yours</a:t>
-            </a:r>
-          </a:p>
-        </p:txBody>
-      </p:sp>
-      <p:pic>
-        <p:nvPicPr>
-          <p:cNvPr id="7" name="Picture 6" descr="selfserve.png"/>
-          <p:cNvPicPr>
-            <a:picLocks noChangeAspect="1"/>
-          </p:cNvPicPr>
-          <p:nvPr/>
-        </p:nvPicPr>
-        <p:blipFill>
-          <a:blip r:embed="rId3"/>
-          <a:stretch>
-            <a:fillRect/>
-          </a:stretch>
-        </p:blipFill>
-        <p:spPr>
-          <a:xfrm>
-            <a:off x="8595360" y="2103120"/>
-            <a:ext cx="2560320" cy="2560320"/>
-          </a:xfrm>
-          <a:prstGeom prst="rect">
-            <a:avLst/>
-          </a:prstGeom>
-        </p:spPr>
-      </p:pic>
-      <p:sp>
-        <p:nvSpPr>
-          <p:cNvPr id="8" name="TextBox 7"/>
-          <p:cNvSpPr txBox="1"/>
-          <p:nvPr/>
-        </p:nvSpPr>
-        <p:spPr>
-          <a:xfrm>
-            <a:off x="7619695" y="4709160"/>
-            <a:ext cx="4389120" cy="365760"/>
-          </a:xfrm>
-          <a:prstGeom prst="rect">
-            <a:avLst/>
-          </a:prstGeom>
-          <a:noFill/>
-        </p:spPr>
-        <p:txBody>
-          <a:bodyPr wrap="square" anchor="t">
-            <a:spAutoFit/>
-          </a:bodyPr>
-          <a:lstStyle/>
-          <a:p>
-            <a:pPr algn="ctr"/>
-            <a:r>
-              <a:rPr sz="1300" b="0">
-                <a:solidFill>
-                  <a:srgbClr val="9AA4B2"/>
-                </a:solidFill>
-                <a:latin typeface="Menlo"/>
-              </a:rPr>
-              <a:t>app.voxel51.com</a:t>
-            </a:r>
-          </a:p>
-        </p:txBody>
-      </p:sp>
-    </p:spTree>
-  </p:cSld>
-  <p:clrMapOvr>
-    <a:masterClrMapping/>
-  </p:clrMapOvr>
-</p:sld>
-</file>
-
 <file path=ppt/slides/slide21.xml><?xml version="1.0" encoding="utf-8"?>
 <p:sld xmlns:a="http://schemas.openxmlformats.org/drawingml/2006/main" xmlns:p="http://schemas.openxmlformats.org/presentationml/2006/main" xmlns:r="http://schemas.openxmlformats.org/officeDocument/2006/relationships">
   <p:cSld>
@@ -13019,11 +13090,11 @@
             <a:r>
               <a:rPr sz="1300" b="1">
                 <a:solidFill>
-                  <a:srgbClr val="7CF29A"/>
-                </a:solidFill>
-                <a:latin typeface="Helvetica Neue"/>
-              </a:rPr>
-              <a:t>NEBIUS</a:t>
+                  <a:srgbClr val="FF6D04"/>
+                </a:solidFill>
+                <a:latin typeface="Helvetica Neue"/>
+              </a:rPr>
+              <a:t>YOUR DATA</a:t>
             </a:r>
           </a:p>
         </p:txBody>
@@ -13036,8 +13107,8 @@
         </p:nvSpPr>
         <p:spPr>
           <a:xfrm>
-            <a:off x="822960" y="2194560"/>
-            <a:ext cx="10515600" cy="1280160"/>
+            <a:off x="822960" y="868680"/>
+            <a:ext cx="10515600" cy="1005840"/>
           </a:xfrm>
           <a:prstGeom prst="rect">
             <a:avLst/>
@@ -13052,13 +13123,13 @@
           <a:p>
             <a:pPr algn="l"/>
             <a:r>
-              <a:rPr sz="5400" b="1">
+              <a:rPr sz="4000" b="1">
                 <a:solidFill>
                   <a:srgbClr val="F2F4F7"/>
                 </a:solidFill>
                 <a:latin typeface="Helvetica Neue"/>
               </a:rPr>
-              <a:t>What else runs on Nebius</a:t>
+              <a:t>Do this on your recordings this week</a:t>
             </a:r>
           </a:p>
         </p:txBody>
@@ -13071,8 +13142,8 @@
         </p:nvSpPr>
         <p:spPr>
           <a:xfrm>
-            <a:off x="822960" y="3566160"/>
-            <a:ext cx="10515600" cy="914400"/>
+            <a:off x="822960" y="2103120"/>
+            <a:ext cx="6949440" cy="3840480"/>
           </a:xfrm>
           <a:prstGeom prst="rect">
             <a:avLst/>
@@ -13085,15 +13156,164 @@
           </a:bodyPr>
           <a:lstStyle/>
           <a:p>
-            <a:pPr algn="l"/>
-            <a:r>
-              <a:rPr sz="2200" b="0">
+            <a:pPr algn="l">
+              <a:spcAft>
+                <a:spcPts val="1200"/>
+              </a:spcAft>
+            </a:pPr>
+            <a:r>
+              <a:rPr sz="1900" b="1">
+                <a:solidFill>
+                  <a:srgbClr val="FF6D04"/>
+                </a:solidFill>
+                <a:latin typeface="Helvetica Neue"/>
+              </a:rPr>
+              <a:t>•  </a:t>
+            </a:r>
+            <a:r>
+              <a:rPr sz="1900" b="1">
+                <a:solidFill>
+                  <a:srgbClr val="F2F4F7"/>
+                </a:solidFill>
+                <a:latin typeface="Helvetica Neue"/>
+              </a:rPr>
+              <a:t>pip install fiftyone </a:t>
+            </a:r>
+            <a:r>
+              <a:rPr sz="1900" b="0">
                 <a:solidFill>
                   <a:srgbClr val="9AA4B2"/>
                 </a:solidFill>
                 <a:latin typeface="Helvetica Neue"/>
               </a:rPr>
-              <a:t>The GPU you just watched train a detector is one of three surfaces built for the Physical AI loop.</a:t>
+              <a:t>— drop one of your own .mcap files into the MCAP Explorer. Watch 20 episodes. You will find something.</a:t>
+            </a:r>
+          </a:p>
+          <a:p>
+            <a:pPr algn="l">
+              <a:spcAft>
+                <a:spcPts val="1200"/>
+              </a:spcAft>
+            </a:pPr>
+            <a:r>
+              <a:rPr sz="1900" b="1">
+                <a:solidFill>
+                  <a:srgbClr val="FF6D04"/>
+                </a:solidFill>
+                <a:latin typeface="Helvetica Neue"/>
+              </a:rPr>
+              <a:t>•  </a:t>
+            </a:r>
+            <a:r>
+              <a:rPr sz="1900" b="1">
+                <a:solidFill>
+                  <a:srgbClr val="F2F4F7"/>
+                </a:solidFill>
+                <a:latin typeface="Helvetica Neue"/>
+              </a:rPr>
+              <a:t>Hosted FiftyOne </a:t>
+            </a:r>
+            <a:r>
+              <a:rPr sz="1900" b="0">
+                <a:solidFill>
+                  <a:srgbClr val="9AA4B2"/>
+                </a:solidFill>
+                <a:latin typeface="Helvetica Neue"/>
+              </a:rPr>
+              <a:t>— app.voxel51.com: same App, no install, datasets and brain runs in the cloud</a:t>
+            </a:r>
+          </a:p>
+          <a:p>
+            <a:pPr algn="l">
+              <a:spcAft>
+                <a:spcPts val="1200"/>
+              </a:spcAft>
+            </a:pPr>
+            <a:r>
+              <a:rPr sz="1900" b="1">
+                <a:solidFill>
+                  <a:srgbClr val="FF6D04"/>
+                </a:solidFill>
+                <a:latin typeface="Helvetica Neue"/>
+              </a:rPr>
+              <a:t>•  </a:t>
+            </a:r>
+            <a:r>
+              <a:rPr sz="1900" b="1">
+                <a:solidFill>
+                  <a:srgbClr val="F2F4F7"/>
+                </a:solidFill>
+                <a:latin typeface="Helvetica Neue"/>
+              </a:rPr>
+              <a:t>Take the repo home </a:t>
+            </a:r>
+            <a:r>
+              <a:rPr sz="1900" b="0">
+                <a:solidFill>
+                  <a:srgbClr val="9AA4B2"/>
+                </a:solidFill>
+                <a:latin typeface="Helvetica Neue"/>
+              </a:rPr>
+              <a:t>— extract_frames.py, the notebooks, the Nebius job helper are all yours</a:t>
+            </a:r>
+          </a:p>
+        </p:txBody>
+      </p:sp>
+      <p:pic>
+        <p:nvPicPr>
+          <p:cNvPr id="7" name="Picture 6" descr="selfserve.png"/>
+          <p:cNvPicPr>
+            <a:picLocks noChangeAspect="1"/>
+          </p:cNvPicPr>
+          <p:nvPr/>
+        </p:nvPicPr>
+        <p:blipFill>
+          <a:blip r:embed="rId3"/>
+          <a:stretch>
+            <a:fillRect/>
+          </a:stretch>
+        </p:blipFill>
+        <p:spPr>
+          <a:xfrm>
+            <a:off x="8595360" y="2103120"/>
+            <a:ext cx="2560320" cy="2560320"/>
+          </a:xfrm>
+          <a:prstGeom prst="rect">
+            <a:avLst/>
+          </a:prstGeom>
+        </p:spPr>
+      </p:pic>
+      <p:sp>
+        <p:nvSpPr>
+          <p:cNvPr id="8" name="TextBox 7"/>
+          <p:cNvSpPr txBox="1"/>
+          <p:nvPr/>
+        </p:nvSpPr>
+        <p:spPr>
+          <a:xfrm>
+            <a:off x="7619695" y="4709160"/>
+            <a:ext cx="4389120" cy="365760"/>
+          </a:xfrm>
+          <a:prstGeom prst="rect">
+            <a:avLst/>
+          </a:prstGeom>
+          <a:noFill/>
+        </p:spPr>
+        <p:txBody>
+          <a:bodyPr wrap="square" anchor="t">
+            <a:spAutoFit/>
+          </a:bodyPr>
+          <a:lstStyle/>
+          <a:p>
+            <a:pPr algn="ctr"/>
+            <a:r>
+              <a:rPr sz="1300" b="0">
+                <a:solidFill>
+                  <a:srgbClr val="9AA4B2"/>
+                </a:solidFill>
+                <a:latin typeface="Menlo"/>
+              </a:rPr>
+              <a:t>app.voxel51.com</a:t>
             </a:r>
           </a:p>
         </p:txBody>
@@ -13237,8 +13457,8 @@
         </p:nvSpPr>
         <p:spPr>
           <a:xfrm>
-            <a:off x="822960" y="868680"/>
-            <a:ext cx="10515600" cy="1005840"/>
+            <a:off x="822960" y="2194560"/>
+            <a:ext cx="10515600" cy="1280160"/>
           </a:xfrm>
           <a:prstGeom prst="rect">
             <a:avLst/>
@@ -13253,75 +13473,27 @@
           <a:p>
             <a:pPr algn="l"/>
             <a:r>
-              <a:rPr sz="4000" b="1">
+              <a:rPr sz="5400" b="1">
                 <a:solidFill>
                   <a:srgbClr val="F2F4F7"/>
                 </a:solidFill>
                 <a:latin typeface="Helvetica Neue"/>
               </a:rPr>
-              <a:t>Three surfaces for the Physical AI loop</a:t>
-            </a:r>
-          </a:p>
-        </p:txBody>
-      </p:sp>
-      <p:sp>
-        <p:nvSpPr>
-          <p:cNvPr id="6" name="Rounded Rectangle 5"/>
-          <p:cNvSpPr/>
-          <p:nvPr/>
-        </p:nvSpPr>
-        <p:spPr>
-          <a:xfrm>
-            <a:off x="822960" y="2103120"/>
-            <a:ext cx="3291840" cy="3291840"/>
-          </a:xfrm>
-          <a:prstGeom prst="roundRect">
-            <a:avLst>
-              <a:gd name="adj" fmla="val 4000"/>
-            </a:avLst>
-          </a:prstGeom>
-          <a:solidFill>
-            <a:srgbClr val="141A22"/>
-          </a:solidFill>
-          <a:ln>
-            <a:solidFill>
-              <a:srgbClr val="232A38"/>
-            </a:solidFill>
-          </a:ln>
-          <a:effectLst/>
-        </p:spPr>
-        <p:style>
-          <a:lnRef idx="1">
-            <a:schemeClr val="accent1"/>
-          </a:lnRef>
-          <a:fillRef idx="3">
-            <a:schemeClr val="accent1"/>
-          </a:fillRef>
-          <a:effectRef idx="2">
-            <a:schemeClr val="accent1"/>
-          </a:effectRef>
-          <a:fontRef idx="minor">
-            <a:schemeClr val="lt1"/>
-          </a:fontRef>
-        </p:style>
-        <p:txBody>
-          <a:bodyPr rtlCol="0" anchor="ctr"/>
-          <a:lstStyle/>
-          <a:p>
-            <a:pPr algn="ctr"/>
-          </a:p>
-        </p:txBody>
-      </p:sp>
-      <p:sp>
-        <p:nvSpPr>
-          <p:cNvPr id="7" name="TextBox 6"/>
+              <a:t>What else runs on Nebius</a:t>
+            </a:r>
+          </a:p>
+        </p:txBody>
+      </p:sp>
+      <p:sp>
+        <p:nvSpPr>
+          <p:cNvPr id="6" name="TextBox 5"/>
           <p:cNvSpPr txBox="1"/>
           <p:nvPr/>
         </p:nvSpPr>
         <p:spPr>
           <a:xfrm>
-            <a:off x="1051560" y="2286000"/>
-            <a:ext cx="2834640" cy="548640"/>
+            <a:off x="822960" y="3566160"/>
+            <a:ext cx="10515600" cy="914400"/>
           </a:xfrm>
           <a:prstGeom prst="rect">
             <a:avLst/>
@@ -13336,284 +13508,13 @@
           <a:p>
             <a:pPr algn="l"/>
             <a:r>
-              <a:rPr sz="2200" b="1">
-                <a:solidFill>
-                  <a:srgbClr val="7CF29A"/>
-                </a:solidFill>
-                <a:latin typeface="Helvetica Neue"/>
-              </a:rPr>
-              <a:t>Workbench CLI</a:t>
-            </a:r>
-          </a:p>
-        </p:txBody>
-      </p:sp>
-      <p:sp>
-        <p:nvSpPr>
-          <p:cNvPr id="8" name="TextBox 7"/>
-          <p:cNvSpPr txBox="1"/>
-          <p:nvPr/>
-        </p:nvSpPr>
-        <p:spPr>
-          <a:xfrm>
-            <a:off x="1051560" y="2926080"/>
-            <a:ext cx="2834640" cy="2377440"/>
-          </a:xfrm>
-          <a:prstGeom prst="rect">
-            <a:avLst/>
-          </a:prstGeom>
-          <a:noFill/>
-        </p:spPr>
-        <p:txBody>
-          <a:bodyPr wrap="square" anchor="t">
-            <a:spAutoFit/>
-          </a:bodyPr>
-          <a:lstStyle/>
-          <a:p>
-            <a:pPr algn="l"/>
-            <a:r>
-              <a:rPr sz="1600" b="0">
-                <a:solidFill>
-                  <a:srgbClr val="F2F4F7"/>
-                </a:solidFill>
-                <a:latin typeface="Helvetica Neue"/>
-              </a:rPr>
-              <a:t>Build, train and deploy Physical AI systems from one open-source CLI — containerized tools, SkyPilot workflows, SDK entry points.</a:t>
-            </a:r>
-          </a:p>
-        </p:txBody>
-      </p:sp>
-      <p:sp>
-        <p:nvSpPr>
-          <p:cNvPr id="9" name="Rounded Rectangle 8"/>
-          <p:cNvSpPr/>
-          <p:nvPr/>
-        </p:nvSpPr>
-        <p:spPr>
-          <a:xfrm>
-            <a:off x="4389120" y="2103120"/>
-            <a:ext cx="3291840" cy="3291840"/>
-          </a:xfrm>
-          <a:prstGeom prst="roundRect">
-            <a:avLst>
-              <a:gd name="adj" fmla="val 4000"/>
-            </a:avLst>
-          </a:prstGeom>
-          <a:solidFill>
-            <a:srgbClr val="141A22"/>
-          </a:solidFill>
-          <a:ln>
-            <a:solidFill>
-              <a:srgbClr val="232A38"/>
-            </a:solidFill>
-          </a:ln>
-          <a:effectLst/>
-        </p:spPr>
-        <p:style>
-          <a:lnRef idx="1">
-            <a:schemeClr val="accent1"/>
-          </a:lnRef>
-          <a:fillRef idx="3">
-            <a:schemeClr val="accent1"/>
-          </a:fillRef>
-          <a:effectRef idx="2">
-            <a:schemeClr val="accent1"/>
-          </a:effectRef>
-          <a:fontRef idx="minor">
-            <a:schemeClr val="lt1"/>
-          </a:fontRef>
-        </p:style>
-        <p:txBody>
-          <a:bodyPr rtlCol="0" anchor="ctr"/>
-          <a:lstStyle/>
-          <a:p>
-            <a:pPr algn="ctr"/>
-          </a:p>
-        </p:txBody>
-      </p:sp>
-      <p:sp>
-        <p:nvSpPr>
-          <p:cNvPr id="10" name="TextBox 9"/>
-          <p:cNvSpPr txBox="1"/>
-          <p:nvPr/>
-        </p:nvSpPr>
-        <p:spPr>
-          <a:xfrm>
-            <a:off x="4617720" y="2286000"/>
-            <a:ext cx="2834640" cy="548640"/>
-          </a:xfrm>
-          <a:prstGeom prst="rect">
-            <a:avLst/>
-          </a:prstGeom>
-          <a:noFill/>
-        </p:spPr>
-        <p:txBody>
-          <a:bodyPr wrap="square" anchor="t">
-            <a:spAutoFit/>
-          </a:bodyPr>
-          <a:lstStyle/>
-          <a:p>
-            <a:pPr algn="l"/>
-            <a:r>
-              <a:rPr sz="2200" b="1">
-                <a:solidFill>
-                  <a:srgbClr val="7CF29A"/>
-                </a:solidFill>
-                <a:latin typeface="Helvetica Neue"/>
-              </a:rPr>
-              <a:t>Serverless AI Jobs</a:t>
-            </a:r>
-          </a:p>
-        </p:txBody>
-      </p:sp>
-      <p:sp>
-        <p:nvSpPr>
-          <p:cNvPr id="11" name="TextBox 10"/>
-          <p:cNvSpPr txBox="1"/>
-          <p:nvPr/>
-        </p:nvSpPr>
-        <p:spPr>
-          <a:xfrm>
-            <a:off x="4617720" y="2926080"/>
-            <a:ext cx="2834640" cy="2377440"/>
-          </a:xfrm>
-          <a:prstGeom prst="rect">
-            <a:avLst/>
-          </a:prstGeom>
-          <a:noFill/>
-        </p:spPr>
-        <p:txBody>
-          <a:bodyPr wrap="square" anchor="t">
-            <a:spAutoFit/>
-          </a:bodyPr>
-          <a:lstStyle/>
-          <a:p>
-            <a:pPr algn="l"/>
-            <a:r>
-              <a:rPr sz="1600" b="0">
-                <a:solidFill>
-                  <a:srgbClr val="F2F4F7"/>
-                </a:solidFill>
-                <a:latin typeface="Helvetica Neue"/>
-              </a:rPr>
-              <a:t>Provision in under three minutes for simulation, synthetic data and policy training. Pay for the job, not a cluster. What you saw today.</a:t>
-            </a:r>
-          </a:p>
-        </p:txBody>
-      </p:sp>
-      <p:sp>
-        <p:nvSpPr>
-          <p:cNvPr id="12" name="Rounded Rectangle 11"/>
-          <p:cNvSpPr/>
-          <p:nvPr/>
-        </p:nvSpPr>
-        <p:spPr>
-          <a:xfrm>
-            <a:off x="7955280" y="2103120"/>
-            <a:ext cx="3291840" cy="3291840"/>
-          </a:xfrm>
-          <a:prstGeom prst="roundRect">
-            <a:avLst>
-              <a:gd name="adj" fmla="val 4000"/>
-            </a:avLst>
-          </a:prstGeom>
-          <a:solidFill>
-            <a:srgbClr val="141A22"/>
-          </a:solidFill>
-          <a:ln>
-            <a:solidFill>
-              <a:srgbClr val="232A38"/>
-            </a:solidFill>
-          </a:ln>
-          <a:effectLst/>
-        </p:spPr>
-        <p:style>
-          <a:lnRef idx="1">
-            <a:schemeClr val="accent1"/>
-          </a:lnRef>
-          <a:fillRef idx="3">
-            <a:schemeClr val="accent1"/>
-          </a:fillRef>
-          <a:effectRef idx="2">
-            <a:schemeClr val="accent1"/>
-          </a:effectRef>
-          <a:fontRef idx="minor">
-            <a:schemeClr val="lt1"/>
-          </a:fontRef>
-        </p:style>
-        <p:txBody>
-          <a:bodyPr rtlCol="0" anchor="ctr"/>
-          <a:lstStyle/>
-          <a:p>
-            <a:pPr algn="ctr"/>
-          </a:p>
-        </p:txBody>
-      </p:sp>
-      <p:sp>
-        <p:nvSpPr>
-          <p:cNvPr id="13" name="TextBox 12"/>
-          <p:cNvSpPr txBox="1"/>
-          <p:nvPr/>
-        </p:nvSpPr>
-        <p:spPr>
-          <a:xfrm>
-            <a:off x="8183880" y="2286000"/>
-            <a:ext cx="2834640" cy="548640"/>
-          </a:xfrm>
-          <a:prstGeom prst="rect">
-            <a:avLst/>
-          </a:prstGeom>
-          <a:noFill/>
-        </p:spPr>
-        <p:txBody>
-          <a:bodyPr wrap="square" anchor="t">
-            <a:spAutoFit/>
-          </a:bodyPr>
-          <a:lstStyle/>
-          <a:p>
-            <a:pPr algn="l"/>
-            <a:r>
-              <a:rPr sz="2200" b="1">
-                <a:solidFill>
-                  <a:srgbClr val="7CF29A"/>
-                </a:solidFill>
-                <a:latin typeface="Helvetica Neue"/>
-              </a:rPr>
-              <a:t>Token Factory</a:t>
-            </a:r>
-          </a:p>
-        </p:txBody>
-      </p:sp>
-      <p:sp>
-        <p:nvSpPr>
-          <p:cNvPr id="14" name="TextBox 13"/>
-          <p:cNvSpPr txBox="1"/>
-          <p:nvPr/>
-        </p:nvSpPr>
-        <p:spPr>
-          <a:xfrm>
-            <a:off x="8183880" y="2926080"/>
-            <a:ext cx="2834640" cy="2377440"/>
-          </a:xfrm>
-          <a:prstGeom prst="rect">
-            <a:avLst/>
-          </a:prstGeom>
-          <a:noFill/>
-        </p:spPr>
-        <p:txBody>
-          <a:bodyPr wrap="square" anchor="t">
-            <a:spAutoFit/>
-          </a:bodyPr>
-          <a:lstStyle/>
-          <a:p>
-            <a:pPr algn="l"/>
-            <a:r>
-              <a:rPr sz="1600" b="0">
-                <a:solidFill>
-                  <a:srgbClr val="F2F4F7"/>
-                </a:solidFill>
-                <a:latin typeface="Helvetica Neue"/>
-              </a:rPr>
-              <a:t>Open-weight chat and vision models behind one API — Qwen, GLM, Kimi — for labeling, review and augmentation of real-world data.</a:t>
+              <a:rPr sz="2200" b="0">
+                <a:solidFill>
+                  <a:srgbClr val="9AA4B2"/>
+                </a:solidFill>
+                <a:latin typeface="Helvetica Neue"/>
+              </a:rPr>
+              <a:t>The GPU you just watched train a detector is one of three surfaces built for the Physical AI loop.</a:t>
             </a:r>
           </a:p>
         </p:txBody>
@@ -13779,21 +13680,69 @@
                 </a:solidFill>
                 <a:latin typeface="Helvetica Neue"/>
               </a:rPr>
-              <a:t>Where Token Factory plugs into today's loop</a:t>
-            </a:r>
-          </a:p>
-        </p:txBody>
-      </p:sp>
-      <p:sp>
-        <p:nvSpPr>
-          <p:cNvPr id="6" name="TextBox 5"/>
+              <a:t>Three surfaces for the Physical AI loop</a:t>
+            </a:r>
+          </a:p>
+        </p:txBody>
+      </p:sp>
+      <p:sp>
+        <p:nvSpPr>
+          <p:cNvPr id="6" name="Rounded Rectangle 5"/>
+          <p:cNvSpPr/>
+          <p:nvPr/>
+        </p:nvSpPr>
+        <p:spPr>
+          <a:xfrm>
+            <a:off x="822960" y="2103120"/>
+            <a:ext cx="3291840" cy="3291840"/>
+          </a:xfrm>
+          <a:prstGeom prst="roundRect">
+            <a:avLst>
+              <a:gd name="adj" fmla="val 4000"/>
+            </a:avLst>
+          </a:prstGeom>
+          <a:solidFill>
+            <a:srgbClr val="141A22"/>
+          </a:solidFill>
+          <a:ln>
+            <a:solidFill>
+              <a:srgbClr val="232A38"/>
+            </a:solidFill>
+          </a:ln>
+          <a:effectLst/>
+        </p:spPr>
+        <p:style>
+          <a:lnRef idx="1">
+            <a:schemeClr val="accent1"/>
+          </a:lnRef>
+          <a:fillRef idx="3">
+            <a:schemeClr val="accent1"/>
+          </a:fillRef>
+          <a:effectRef idx="2">
+            <a:schemeClr val="accent1"/>
+          </a:effectRef>
+          <a:fontRef idx="minor">
+            <a:schemeClr val="lt1"/>
+          </a:fontRef>
+        </p:style>
+        <p:txBody>
+          <a:bodyPr rtlCol="0" anchor="ctr"/>
+          <a:lstStyle/>
+          <a:p>
+            <a:pPr algn="ctr"/>
+          </a:p>
+        </p:txBody>
+      </p:sp>
+      <p:sp>
+        <p:nvSpPr>
+          <p:cNvPr id="7" name="TextBox 6"/>
           <p:cNvSpPr txBox="1"/>
           <p:nvPr/>
         </p:nvSpPr>
         <p:spPr>
           <a:xfrm>
-            <a:off x="822960" y="2103120"/>
-            <a:ext cx="10515600" cy="3840480"/>
+            <a:off x="1051560" y="2286000"/>
+            <a:ext cx="2834640" cy="548640"/>
           </a:xfrm>
           <a:prstGeom prst="rect">
             <a:avLst/>
@@ -13806,173 +13755,286 @@
           </a:bodyPr>
           <a:lstStyle/>
           <a:p>
-            <a:pPr algn="l">
-              <a:spcAft>
-                <a:spcPts val="1200"/>
-              </a:spcAft>
-            </a:pPr>
-            <a:r>
-              <a:rPr sz="1900" b="1">
-                <a:solidFill>
-                  <a:srgbClr val="FF6D04"/>
-                </a:solidFill>
-                <a:latin typeface="Helvetica Neue"/>
-              </a:rPr>
-              <a:t>•  </a:t>
-            </a:r>
-            <a:r>
-              <a:rPr sz="1900" b="1">
+            <a:pPr algn="l"/>
+            <a:r>
+              <a:rPr sz="2200" b="1">
+                <a:solidFill>
+                  <a:srgbClr val="7CF29A"/>
+                </a:solidFill>
+                <a:latin typeface="Helvetica Neue"/>
+              </a:rPr>
+              <a:t>Workbench CLI</a:t>
+            </a:r>
+          </a:p>
+        </p:txBody>
+      </p:sp>
+      <p:sp>
+        <p:nvSpPr>
+          <p:cNvPr id="8" name="TextBox 7"/>
+          <p:cNvSpPr txBox="1"/>
+          <p:nvPr/>
+        </p:nvSpPr>
+        <p:spPr>
+          <a:xfrm>
+            <a:off x="1051560" y="2926080"/>
+            <a:ext cx="2834640" cy="2377440"/>
+          </a:xfrm>
+          <a:prstGeom prst="rect">
+            <a:avLst/>
+          </a:prstGeom>
+          <a:noFill/>
+        </p:spPr>
+        <p:txBody>
+          <a:bodyPr wrap="square" anchor="t">
+            <a:spAutoFit/>
+          </a:bodyPr>
+          <a:lstStyle/>
+          <a:p>
+            <a:pPr algn="l"/>
+            <a:r>
+              <a:rPr sz="1600" b="0">
                 <a:solidFill>
                   <a:srgbClr val="F2F4F7"/>
                 </a:solidFill>
                 <a:latin typeface="Helvetica Neue"/>
               </a:rPr>
-              <a:t>Label </a:t>
-            </a:r>
-            <a:r>
-              <a:rPr sz="1900" b="0">
-                <a:solidFill>
-                  <a:srgbClr val="9AA4B2"/>
-                </a:solidFill>
-                <a:latin typeface="Helvetica Neue"/>
-              </a:rPr>
-              <a:t>— a vision-language model reads the frame and the task string: 'is the brick in the drawer?' becomes a field</a:t>
-            </a:r>
-          </a:p>
-          <a:p>
-            <a:pPr algn="l">
-              <a:spcAft>
-                <a:spcPts val="1200"/>
-              </a:spcAft>
-            </a:pPr>
-            <a:r>
-              <a:rPr sz="1900" b="1">
-                <a:solidFill>
-                  <a:srgbClr val="FF6D04"/>
-                </a:solidFill>
-                <a:latin typeface="Helvetica Neue"/>
-              </a:rPr>
-              <a:t>•  </a:t>
-            </a:r>
-            <a:r>
-              <a:rPr sz="1900" b="1">
+              <a:t>Build, train and deploy Physical AI systems from one open-source CLI — containerized tools, SkyPilot workflows, SDK entry points.</a:t>
+            </a:r>
+          </a:p>
+        </p:txBody>
+      </p:sp>
+      <p:sp>
+        <p:nvSpPr>
+          <p:cNvPr id="9" name="Rounded Rectangle 8"/>
+          <p:cNvSpPr/>
+          <p:nvPr/>
+        </p:nvSpPr>
+        <p:spPr>
+          <a:xfrm>
+            <a:off x="4389120" y="2103120"/>
+            <a:ext cx="3291840" cy="3291840"/>
+          </a:xfrm>
+          <a:prstGeom prst="roundRect">
+            <a:avLst>
+              <a:gd name="adj" fmla="val 4000"/>
+            </a:avLst>
+          </a:prstGeom>
+          <a:solidFill>
+            <a:srgbClr val="141A22"/>
+          </a:solidFill>
+          <a:ln>
+            <a:solidFill>
+              <a:srgbClr val="232A38"/>
+            </a:solidFill>
+          </a:ln>
+          <a:effectLst/>
+        </p:spPr>
+        <p:style>
+          <a:lnRef idx="1">
+            <a:schemeClr val="accent1"/>
+          </a:lnRef>
+          <a:fillRef idx="3">
+            <a:schemeClr val="accent1"/>
+          </a:fillRef>
+          <a:effectRef idx="2">
+            <a:schemeClr val="accent1"/>
+          </a:effectRef>
+          <a:fontRef idx="minor">
+            <a:schemeClr val="lt1"/>
+          </a:fontRef>
+        </p:style>
+        <p:txBody>
+          <a:bodyPr rtlCol="0" anchor="ctr"/>
+          <a:lstStyle/>
+          <a:p>
+            <a:pPr algn="ctr"/>
+          </a:p>
+        </p:txBody>
+      </p:sp>
+      <p:sp>
+        <p:nvSpPr>
+          <p:cNvPr id="10" name="TextBox 9"/>
+          <p:cNvSpPr txBox="1"/>
+          <p:nvPr/>
+        </p:nvSpPr>
+        <p:spPr>
+          <a:xfrm>
+            <a:off x="4617720" y="2286000"/>
+            <a:ext cx="2834640" cy="548640"/>
+          </a:xfrm>
+          <a:prstGeom prst="rect">
+            <a:avLst/>
+          </a:prstGeom>
+          <a:noFill/>
+        </p:spPr>
+        <p:txBody>
+          <a:bodyPr wrap="square" anchor="t">
+            <a:spAutoFit/>
+          </a:bodyPr>
+          <a:lstStyle/>
+          <a:p>
+            <a:pPr algn="l"/>
+            <a:r>
+              <a:rPr sz="2200" b="1">
+                <a:solidFill>
+                  <a:srgbClr val="7CF29A"/>
+                </a:solidFill>
+                <a:latin typeface="Helvetica Neue"/>
+              </a:rPr>
+              <a:t>Serverless AI Jobs</a:t>
+            </a:r>
+          </a:p>
+        </p:txBody>
+      </p:sp>
+      <p:sp>
+        <p:nvSpPr>
+          <p:cNvPr id="11" name="TextBox 10"/>
+          <p:cNvSpPr txBox="1"/>
+          <p:nvPr/>
+        </p:nvSpPr>
+        <p:spPr>
+          <a:xfrm>
+            <a:off x="4617720" y="2926080"/>
+            <a:ext cx="2834640" cy="2377440"/>
+          </a:xfrm>
+          <a:prstGeom prst="rect">
+            <a:avLst/>
+          </a:prstGeom>
+          <a:noFill/>
+        </p:spPr>
+        <p:txBody>
+          <a:bodyPr wrap="square" anchor="t">
+            <a:spAutoFit/>
+          </a:bodyPr>
+          <a:lstStyle/>
+          <a:p>
+            <a:pPr algn="l"/>
+            <a:r>
+              <a:rPr sz="1600" b="0">
                 <a:solidFill>
                   <a:srgbClr val="F2F4F7"/>
                 </a:solidFill>
                 <a:latin typeface="Helvetica Neue"/>
               </a:rPr>
-              <a:t>Review </a:t>
-            </a:r>
-            <a:r>
-              <a:rPr sz="1900" b="0">
-                <a:solidFill>
-                  <a:srgbClr val="9AA4B2"/>
-                </a:solidFill>
-                <a:latin typeface="Helvetica Neue"/>
-              </a:rPr>
-              <a:t>— the low-confidence queue goes to a VLM first, humans second</a:t>
-            </a:r>
-          </a:p>
-          <a:p>
-            <a:pPr algn="l">
-              <a:spcAft>
-                <a:spcPts val="1200"/>
-              </a:spcAft>
-            </a:pPr>
-            <a:r>
-              <a:rPr sz="1900" b="1">
-                <a:solidFill>
-                  <a:srgbClr val="FF6D04"/>
-                </a:solidFill>
-                <a:latin typeface="Helvetica Neue"/>
-              </a:rPr>
-              <a:t>•  </a:t>
-            </a:r>
-            <a:r>
-              <a:rPr sz="1900" b="1">
+              <a:t>Provision in under three minutes for simulation, synthetic data and policy training. Pay for the job, not a cluster. What you saw today.</a:t>
+            </a:r>
+          </a:p>
+        </p:txBody>
+      </p:sp>
+      <p:sp>
+        <p:nvSpPr>
+          <p:cNvPr id="12" name="Rounded Rectangle 11"/>
+          <p:cNvSpPr/>
+          <p:nvPr/>
+        </p:nvSpPr>
+        <p:spPr>
+          <a:xfrm>
+            <a:off x="7955280" y="2103120"/>
+            <a:ext cx="3291840" cy="3291840"/>
+          </a:xfrm>
+          <a:prstGeom prst="roundRect">
+            <a:avLst>
+              <a:gd name="adj" fmla="val 4000"/>
+            </a:avLst>
+          </a:prstGeom>
+          <a:solidFill>
+            <a:srgbClr val="141A22"/>
+          </a:solidFill>
+          <a:ln>
+            <a:solidFill>
+              <a:srgbClr val="232A38"/>
+            </a:solidFill>
+          </a:ln>
+          <a:effectLst/>
+        </p:spPr>
+        <p:style>
+          <a:lnRef idx="1">
+            <a:schemeClr val="accent1"/>
+          </a:lnRef>
+          <a:fillRef idx="3">
+            <a:schemeClr val="accent1"/>
+          </a:fillRef>
+          <a:effectRef idx="2">
+            <a:schemeClr val="accent1"/>
+          </a:effectRef>
+          <a:fontRef idx="minor">
+            <a:schemeClr val="lt1"/>
+          </a:fontRef>
+        </p:style>
+        <p:txBody>
+          <a:bodyPr rtlCol="0" anchor="ctr"/>
+          <a:lstStyle/>
+          <a:p>
+            <a:pPr algn="ctr"/>
+          </a:p>
+        </p:txBody>
+      </p:sp>
+      <p:sp>
+        <p:nvSpPr>
+          <p:cNvPr id="13" name="TextBox 12"/>
+          <p:cNvSpPr txBox="1"/>
+          <p:nvPr/>
+        </p:nvSpPr>
+        <p:spPr>
+          <a:xfrm>
+            <a:off x="8183880" y="2286000"/>
+            <a:ext cx="2834640" cy="548640"/>
+          </a:xfrm>
+          <a:prstGeom prst="rect">
+            <a:avLst/>
+          </a:prstGeom>
+          <a:noFill/>
+        </p:spPr>
+        <p:txBody>
+          <a:bodyPr wrap="square" anchor="t">
+            <a:spAutoFit/>
+          </a:bodyPr>
+          <a:lstStyle/>
+          <a:p>
+            <a:pPr algn="l"/>
+            <a:r>
+              <a:rPr sz="2200" b="1">
+                <a:solidFill>
+                  <a:srgbClr val="7CF29A"/>
+                </a:solidFill>
+                <a:latin typeface="Helvetica Neue"/>
+              </a:rPr>
+              <a:t>Token Factory</a:t>
+            </a:r>
+          </a:p>
+        </p:txBody>
+      </p:sp>
+      <p:sp>
+        <p:nvSpPr>
+          <p:cNvPr id="14" name="TextBox 13"/>
+          <p:cNvSpPr txBox="1"/>
+          <p:nvPr/>
+        </p:nvSpPr>
+        <p:spPr>
+          <a:xfrm>
+            <a:off x="8183880" y="2926080"/>
+            <a:ext cx="2834640" cy="2377440"/>
+          </a:xfrm>
+          <a:prstGeom prst="rect">
+            <a:avLst/>
+          </a:prstGeom>
+          <a:noFill/>
+        </p:spPr>
+        <p:txBody>
+          <a:bodyPr wrap="square" anchor="t">
+            <a:spAutoFit/>
+          </a:bodyPr>
+          <a:lstStyle/>
+          <a:p>
+            <a:pPr algn="l"/>
+            <a:r>
+              <a:rPr sz="1600" b="0">
                 <a:solidFill>
                   <a:srgbClr val="F2F4F7"/>
                 </a:solidFill>
                 <a:latin typeface="Helvetica Neue"/>
               </a:rPr>
-              <a:t>Describe </a:t>
-            </a:r>
-            <a:r>
-              <a:rPr sz="1900" b="0">
-                <a:solidFill>
-                  <a:srgbClr val="9AA4B2"/>
-                </a:solidFill>
-                <a:latin typeface="Helvetica Neue"/>
-              </a:rPr>
-              <a:t>— per-episode natural-language summaries for search: 'episodes where the cloth slipped'</a:t>
-            </a:r>
-          </a:p>
-          <a:p>
-            <a:pPr algn="l">
-              <a:spcAft>
-                <a:spcPts val="1200"/>
-              </a:spcAft>
-            </a:pPr>
-            <a:r>
-              <a:rPr sz="1900" b="1">
-                <a:solidFill>
-                  <a:srgbClr val="FF6D04"/>
-                </a:solidFill>
-                <a:latin typeface="Helvetica Neue"/>
-              </a:rPr>
-              <a:t>•  </a:t>
-            </a:r>
-            <a:r>
-              <a:rPr sz="1900" b="1">
-                <a:solidFill>
-                  <a:srgbClr val="F2F4F7"/>
-                </a:solidFill>
-                <a:latin typeface="Helvetica Neue"/>
-              </a:rPr>
-              <a:t>OpenAI-compatible API </a:t>
-            </a:r>
-            <a:r>
-              <a:rPr sz="1900" b="0">
-                <a:solidFill>
-                  <a:srgbClr val="9AA4B2"/>
-                </a:solidFill>
-                <a:latin typeface="Helvetica Neue"/>
-              </a:rPr>
-              <a:t>— api.tokenfactory.nebius.com/v1; the same code you already write</a:t>
-            </a:r>
-          </a:p>
-          <a:p>
-            <a:pPr algn="l">
-              <a:spcAft>
-                <a:spcPts val="1200"/>
-              </a:spcAft>
-            </a:pPr>
-            <a:r>
-              <a:rPr sz="1900" b="1">
-                <a:solidFill>
-                  <a:srgbClr val="FF6D04"/>
-                </a:solidFill>
-                <a:latin typeface="Helvetica Neue"/>
-              </a:rPr>
-              <a:t>•  </a:t>
-            </a:r>
-            <a:r>
-              <a:rPr sz="1900" b="1">
-                <a:solidFill>
-                  <a:srgbClr val="F2F4F7"/>
-                </a:solidFill>
-                <a:latin typeface="Helvetica Neue"/>
-              </a:rPr>
-              <a:t>Credits for builders </a:t>
-            </a:r>
-            <a:r>
-              <a:rPr sz="1900" b="0">
-                <a:solidFill>
-                  <a:srgbClr val="9AA4B2"/>
-                </a:solidFill>
-                <a:latin typeface="Helvetica Neue"/>
-              </a:rPr>
-              <a:t>— through the Builder Program, next slide</a:t>
+              <a:t>Open-weight chat and vision models behind one API — Qwen, GLM, Kimi — for labeling, review and augmentation of real-world data.</a:t>
             </a:r>
           </a:p>
         </p:txBody>
@@ -14138,7 +14200,7 @@
                 </a:solidFill>
                 <a:latin typeface="Helvetica Neue"/>
               </a:rPr>
-              <a:t>Keep going: Physical AI Office Hours</a:t>
+              <a:t>Where Token Factory plugs into today's loop</a:t>
             </a:r>
           </a:p>
         </p:txBody>
@@ -14171,7 +14233,7 @@
               </a:spcAft>
             </a:pPr>
             <a:r>
-              <a:rPr sz="2000" b="1">
+              <a:rPr sz="1900" b="1">
                 <a:solidFill>
                   <a:srgbClr val="FF6D04"/>
                 </a:solidFill>
@@ -14180,22 +14242,22 @@
               <a:t>•  </a:t>
             </a:r>
             <a:r>
-              <a:rPr sz="2000" b="1">
+              <a:rPr sz="1900" b="1">
                 <a:solidFill>
                   <a:srgbClr val="F2F4F7"/>
                 </a:solidFill>
                 <a:latin typeface="Helvetica Neue"/>
               </a:rPr>
-              <a:t>Biweekly online sessions </a:t>
-            </a:r>
-            <a:r>
-              <a:rPr sz="2000" b="0">
+              <a:t>Label </a:t>
+            </a:r>
+            <a:r>
+              <a:rPr sz="1900" b="0">
                 <a:solidFill>
                   <a:srgbClr val="9AA4B2"/>
                 </a:solidFill>
                 <a:latin typeface="Helvetica Neue"/>
               </a:rPr>
-              <a:t>— raw robotics data to a working model in one sitting</a:t>
+              <a:t>— a vision-language model reads the frame and the task string: 'is the brick in the drawer?' becomes a field</a:t>
             </a:r>
           </a:p>
           <a:p>
@@ -14205,7 +14267,7 @@
               </a:spcAft>
             </a:pPr>
             <a:r>
-              <a:rPr sz="2000" b="1">
+              <a:rPr sz="1900" b="1">
                 <a:solidFill>
                   <a:srgbClr val="FF6D04"/>
                 </a:solidFill>
@@ -14214,22 +14276,22 @@
               <a:t>•  </a:t>
             </a:r>
             <a:r>
-              <a:rPr sz="2000" b="1">
+              <a:rPr sz="1900" b="1">
                 <a:solidFill>
                   <a:srgbClr val="F2F4F7"/>
                 </a:solidFill>
                 <a:latin typeface="Helvetica Neue"/>
               </a:rPr>
-              <a:t>Voxel51 workshop series </a:t>
-            </a:r>
-            <a:r>
-              <a:rPr sz="2000" b="0">
+              <a:t>Review </a:t>
+            </a:r>
+            <a:r>
+              <a:rPr sz="1900" b="0">
                 <a:solidFill>
                   <a:srgbClr val="9AA4B2"/>
                 </a:solidFill>
                 <a:latin typeface="Helvetica Neue"/>
               </a:rPr>
-              <a:t>— this format, 15 cities, September–November 2026</a:t>
+              <a:t>— the low-confidence queue goes to a VLM first, humans second</a:t>
             </a:r>
           </a:p>
           <a:p>
@@ -14239,7 +14301,7 @@
               </a:spcAft>
             </a:pPr>
             <a:r>
-              <a:rPr sz="2000" b="1">
+              <a:rPr sz="1900" b="1">
                 <a:solidFill>
                   <a:srgbClr val="FF6D04"/>
                 </a:solidFill>
@@ -14248,22 +14310,90 @@
               <a:t>•  </a:t>
             </a:r>
             <a:r>
-              <a:rPr sz="2000" b="1">
+              <a:rPr sz="1900" b="1">
                 <a:solidFill>
                   <a:srgbClr val="F2F4F7"/>
                 </a:solidFill>
                 <a:latin typeface="Helvetica Neue"/>
               </a:rPr>
-              <a:t>Builders &amp; Brews </a:t>
-            </a:r>
-            <a:r>
-              <a:rPr sz="2000" b="0">
+              <a:t>Describe </a:t>
+            </a:r>
+            <a:r>
+              <a:rPr sz="1900" b="0">
                 <a:solidFill>
                   <a:srgbClr val="9AA4B2"/>
                 </a:solidFill>
                 <a:latin typeface="Helvetica Neue"/>
               </a:rPr>
-              <a:t>— casual monthly builds; Berlin, Amsterdam, Paris, London, Warsaw…</a:t>
+              <a:t>— per-episode natural-language summaries for search: 'episodes where the cloth slipped'</a:t>
+            </a:r>
+          </a:p>
+          <a:p>
+            <a:pPr algn="l">
+              <a:spcAft>
+                <a:spcPts val="1200"/>
+              </a:spcAft>
+            </a:pPr>
+            <a:r>
+              <a:rPr sz="1900" b="1">
+                <a:solidFill>
+                  <a:srgbClr val="FF6D04"/>
+                </a:solidFill>
+                <a:latin typeface="Helvetica Neue"/>
+              </a:rPr>
+              <a:t>•  </a:t>
+            </a:r>
+            <a:r>
+              <a:rPr sz="1900" b="1">
+                <a:solidFill>
+                  <a:srgbClr val="F2F4F7"/>
+                </a:solidFill>
+                <a:latin typeface="Helvetica Neue"/>
+              </a:rPr>
+              <a:t>OpenAI-compatible API </a:t>
+            </a:r>
+            <a:r>
+              <a:rPr sz="1900" b="0">
+                <a:solidFill>
+                  <a:srgbClr val="9AA4B2"/>
+                </a:solidFill>
+                <a:latin typeface="Helvetica Neue"/>
+              </a:rPr>
+              <a:t>— api.tokenfactory.nebius.com/v1; the same code you already write</a:t>
+            </a:r>
+          </a:p>
+          <a:p>
+            <a:pPr algn="l">
+              <a:spcAft>
+                <a:spcPts val="1200"/>
+              </a:spcAft>
+            </a:pPr>
+            <a:r>
+              <a:rPr sz="1900" b="1">
+                <a:solidFill>
+                  <a:srgbClr val="FF6D04"/>
+                </a:solidFill>
+                <a:latin typeface="Helvetica Neue"/>
+              </a:rPr>
+              <a:t>•  </a:t>
+            </a:r>
+            <a:r>
+              <a:rPr sz="1900" b="1">
+                <a:solidFill>
+                  <a:srgbClr val="F2F4F7"/>
+                </a:solidFill>
+                <a:latin typeface="Helvetica Neue"/>
+              </a:rPr>
+              <a:t>Credits for builders </a:t>
+            </a:r>
+            <a:r>
+              <a:rPr sz="1900" b="0">
+                <a:solidFill>
+                  <a:srgbClr val="9AA4B2"/>
+                </a:solidFill>
+                <a:latin typeface="Helvetica Neue"/>
+              </a:rPr>
+              <a:t>— through the Builder Program, next slide</a:t>
             </a:r>
           </a:p>
         </p:txBody>
@@ -14394,7 +14524,7 @@
                 </a:solidFill>
                 <a:latin typeface="Helvetica Neue"/>
               </a:rPr>
-              <a:t>NEBIUS BUILDER PROGRAM</a:t>
+              <a:t>NEBIUS</a:t>
             </a:r>
           </a:p>
         </p:txBody>
@@ -14429,7 +14559,7 @@
                 </a:solidFill>
                 <a:latin typeface="Helvetica Neue"/>
               </a:rPr>
-              <a:t>GPU credits for what you build next</a:t>
+              <a:t>Keep going: Physical AI Office Hours</a:t>
             </a:r>
           </a:p>
         </p:txBody>
@@ -14443,7 +14573,7 @@
         <p:spPr>
           <a:xfrm>
             <a:off x="822960" y="2103120"/>
-            <a:ext cx="6766560" cy="3840480"/>
+            <a:ext cx="10515600" cy="3840480"/>
           </a:xfrm>
           <a:prstGeom prst="rect">
             <a:avLst/>
@@ -14462,7 +14592,7 @@
               </a:spcAft>
             </a:pPr>
             <a:r>
-              <a:rPr sz="1900" b="1">
+              <a:rPr sz="2000" b="1">
                 <a:solidFill>
                   <a:srgbClr val="FF6D04"/>
                 </a:solidFill>
@@ -14471,22 +14601,22 @@
               <a:t>•  </a:t>
             </a:r>
             <a:r>
-              <a:rPr sz="1900" b="1">
+              <a:rPr sz="2000" b="1">
                 <a:solidFill>
                   <a:srgbClr val="F2F4F7"/>
                 </a:solidFill>
                 <a:latin typeface="Helvetica Neue"/>
               </a:rPr>
-              <a:t>Scan now </a:t>
-            </a:r>
-            <a:r>
-              <a:rPr sz="1900" b="0">
+              <a:t>Biweekly online sessions </a:t>
+            </a:r>
+            <a:r>
+              <a:rPr sz="2000" b="0">
                 <a:solidFill>
                   <a:srgbClr val="9AA4B2"/>
                 </a:solidFill>
                 <a:latin typeface="Helvetica Neue"/>
               </a:rPr>
-              <a:t>— the form is prefilled with this workshop; it takes a minute</a:t>
+              <a:t>— raw robotics data to a working model in one sitting</a:t>
             </a:r>
           </a:p>
           <a:p>
@@ -14496,7 +14626,7 @@
               </a:spcAft>
             </a:pPr>
             <a:r>
-              <a:rPr sz="1900" b="1">
+              <a:rPr sz="2000" b="1">
                 <a:solidFill>
                   <a:srgbClr val="FF6D04"/>
                 </a:solidFill>
@@ -14505,22 +14635,22 @@
               <a:t>•  </a:t>
             </a:r>
             <a:r>
-              <a:rPr sz="1900" b="1">
+              <a:rPr sz="2000" b="1">
                 <a:solidFill>
                   <a:srgbClr val="F2F4F7"/>
                 </a:solidFill>
                 <a:latin typeface="Helvetica Neue"/>
               </a:rPr>
-              <a:t>Credits + onboarding </a:t>
-            </a:r>
-            <a:r>
-              <a:rPr sz="1900" b="0">
+              <a:t>Voxel51 workshop series </a:t>
+            </a:r>
+            <a:r>
+              <a:rPr sz="2000" b="0">
                 <a:solidFill>
                   <a:srgbClr val="9AA4B2"/>
                 </a:solidFill>
                 <a:latin typeface="Helvetica Neue"/>
               </a:rPr>
-              <a:t>— from sign-up to first job with a human, not a doc dump</a:t>
+              <a:t>— this format, 15 cities, September–November 2026</a:t>
             </a:r>
           </a:p>
           <a:p>
@@ -14530,7 +14660,7 @@
               </a:spcAft>
             </a:pPr>
             <a:r>
-              <a:rPr sz="1900" b="1">
+              <a:rPr sz="2000" b="1">
                 <a:solidFill>
                   <a:srgbClr val="FF6D04"/>
                 </a:solidFill>
@@ -14539,115 +14669,22 @@
               <a:t>•  </a:t>
             </a:r>
             <a:r>
-              <a:rPr sz="1900" b="1">
+              <a:rPr sz="2000" b="1">
                 <a:solidFill>
                   <a:srgbClr val="F2F4F7"/>
                 </a:solidFill>
                 <a:latin typeface="Helvetica Neue"/>
               </a:rPr>
-              <a:t>Serverless, Workbench, Token Factory </a:t>
-            </a:r>
-            <a:r>
-              <a:rPr sz="1900" b="0">
+              <a:t>Builders &amp; Brews </a:t>
+            </a:r>
+            <a:r>
+              <a:rPr sz="2000" b="0">
                 <a:solidFill>
                   <a:srgbClr val="9AA4B2"/>
                 </a:solidFill>
                 <a:latin typeface="Helvetica Neue"/>
               </a:rPr>
-              <a:t>— everything you saw today</a:t>
-            </a:r>
-          </a:p>
-          <a:p>
-            <a:pPr algn="l">
-              <a:spcAft>
-                <a:spcPts val="1200"/>
-              </a:spcAft>
-            </a:pPr>
-            <a:r>
-              <a:rPr sz="1900" b="1">
-                <a:solidFill>
-                  <a:srgbClr val="FF6D04"/>
-                </a:solidFill>
-                <a:latin typeface="Helvetica Neue"/>
-              </a:rPr>
-              <a:t>•  </a:t>
-            </a:r>
-            <a:r>
-              <a:rPr sz="1900" b="1">
-                <a:solidFill>
-                  <a:srgbClr val="F2F4F7"/>
-                </a:solidFill>
-                <a:latin typeface="Helvetica Neue"/>
-              </a:rPr>
-              <a:t>Bring your recordings </a:t>
-            </a:r>
-            <a:r>
-              <a:rPr sz="1900" b="0">
-                <a:solidFill>
-                  <a:srgbClr val="9AA4B2"/>
-                </a:solidFill>
-                <a:latin typeface="Helvetica Neue"/>
-              </a:rPr>
-              <a:t>— the repo's job helper works on your bucket unchanged</a:t>
-            </a:r>
-          </a:p>
-        </p:txBody>
-      </p:sp>
-      <p:pic>
-        <p:nvPicPr>
-          <p:cNvPr id="7" name="Picture 6" descr="nebius-berlin.png"/>
-          <p:cNvPicPr>
-            <a:picLocks noChangeAspect="1"/>
-          </p:cNvPicPr>
-          <p:nvPr/>
-        </p:nvPicPr>
-        <p:blipFill>
-          <a:blip r:embed="rId3"/>
-          <a:stretch>
-            <a:fillRect/>
-          </a:stretch>
-        </p:blipFill>
-        <p:spPr>
-          <a:xfrm>
-            <a:off x="8412480" y="1920240"/>
-            <a:ext cx="2926080" cy="2926080"/>
-          </a:xfrm>
-          <a:prstGeom prst="rect">
-            <a:avLst/>
-          </a:prstGeom>
-        </p:spPr>
-      </p:pic>
-      <p:sp>
-        <p:nvSpPr>
-          <p:cNvPr id="8" name="TextBox 7"/>
-          <p:cNvSpPr txBox="1"/>
-          <p:nvPr/>
-        </p:nvSpPr>
-        <p:spPr>
-          <a:xfrm>
-            <a:off x="7253935" y="4892040"/>
-            <a:ext cx="4754880" cy="365760"/>
-          </a:xfrm>
-          <a:prstGeom prst="rect">
-            <a:avLst/>
-          </a:prstGeom>
-          <a:noFill/>
-        </p:spPr>
-        <p:txBody>
-          <a:bodyPr wrap="square" anchor="t">
-            <a:spAutoFit/>
-          </a:bodyPr>
-          <a:lstStyle/>
-          <a:p>
-            <a:pPr algn="ctr"/>
-            <a:r>
-              <a:rPr sz="1300" b="0">
-                <a:solidFill>
-                  <a:srgbClr val="9AA4B2"/>
-                </a:solidFill>
-                <a:latin typeface="Menlo"/>
-              </a:rPr>
-              <a:t>link.voxel51.com/nebius-berlin</a:t>
+              <a:t>— casual monthly builds; Berlin, Amsterdam, Paris, London, Warsaw…</a:t>
             </a:r>
           </a:p>
         </p:txBody>
@@ -14744,6 +14781,390 @@
                 <a:latin typeface="Helvetica Neue"/>
               </a:rPr>
               <a:t>26</a:t>
+            </a:r>
+          </a:p>
+        </p:txBody>
+      </p:sp>
+      <p:sp>
+        <p:nvSpPr>
+          <p:cNvPr id="4" name="TextBox 3"/>
+          <p:cNvSpPr txBox="1"/>
+          <p:nvPr/>
+        </p:nvSpPr>
+        <p:spPr>
+          <a:xfrm>
+            <a:off x="822960" y="502920"/>
+            <a:ext cx="7315200" cy="365760"/>
+          </a:xfrm>
+          <a:prstGeom prst="rect">
+            <a:avLst/>
+          </a:prstGeom>
+          <a:noFill/>
+        </p:spPr>
+        <p:txBody>
+          <a:bodyPr wrap="square" anchor="t">
+            <a:spAutoFit/>
+          </a:bodyPr>
+          <a:lstStyle/>
+          <a:p>
+            <a:pPr algn="l"/>
+            <a:r>
+              <a:rPr sz="1300" b="1">
+                <a:solidFill>
+                  <a:srgbClr val="7CF29A"/>
+                </a:solidFill>
+                <a:latin typeface="Helvetica Neue"/>
+              </a:rPr>
+              <a:t>NEBIUS BUILDER PROGRAM</a:t>
+            </a:r>
+          </a:p>
+        </p:txBody>
+      </p:sp>
+      <p:sp>
+        <p:nvSpPr>
+          <p:cNvPr id="5" name="TextBox 4"/>
+          <p:cNvSpPr txBox="1"/>
+          <p:nvPr/>
+        </p:nvSpPr>
+        <p:spPr>
+          <a:xfrm>
+            <a:off x="822960" y="868680"/>
+            <a:ext cx="10515600" cy="1005840"/>
+          </a:xfrm>
+          <a:prstGeom prst="rect">
+            <a:avLst/>
+          </a:prstGeom>
+          <a:noFill/>
+        </p:spPr>
+        <p:txBody>
+          <a:bodyPr wrap="square" anchor="t">
+            <a:spAutoFit/>
+          </a:bodyPr>
+          <a:lstStyle/>
+          <a:p>
+            <a:pPr algn="l"/>
+            <a:r>
+              <a:rPr sz="4000" b="1">
+                <a:solidFill>
+                  <a:srgbClr val="F2F4F7"/>
+                </a:solidFill>
+                <a:latin typeface="Helvetica Neue"/>
+              </a:rPr>
+              <a:t>GPU credits for what you build next</a:t>
+            </a:r>
+          </a:p>
+        </p:txBody>
+      </p:sp>
+      <p:sp>
+        <p:nvSpPr>
+          <p:cNvPr id="6" name="TextBox 5"/>
+          <p:cNvSpPr txBox="1"/>
+          <p:nvPr/>
+        </p:nvSpPr>
+        <p:spPr>
+          <a:xfrm>
+            <a:off x="822960" y="2103120"/>
+            <a:ext cx="6766560" cy="3840480"/>
+          </a:xfrm>
+          <a:prstGeom prst="rect">
+            <a:avLst/>
+          </a:prstGeom>
+          <a:noFill/>
+        </p:spPr>
+        <p:txBody>
+          <a:bodyPr wrap="square" anchor="t">
+            <a:spAutoFit/>
+          </a:bodyPr>
+          <a:lstStyle/>
+          <a:p>
+            <a:pPr algn="l">
+              <a:spcAft>
+                <a:spcPts val="1200"/>
+              </a:spcAft>
+            </a:pPr>
+            <a:r>
+              <a:rPr sz="1900" b="1">
+                <a:solidFill>
+                  <a:srgbClr val="FF6D04"/>
+                </a:solidFill>
+                <a:latin typeface="Helvetica Neue"/>
+              </a:rPr>
+              <a:t>•  </a:t>
+            </a:r>
+            <a:r>
+              <a:rPr sz="1900" b="1">
+                <a:solidFill>
+                  <a:srgbClr val="F2F4F7"/>
+                </a:solidFill>
+                <a:latin typeface="Helvetica Neue"/>
+              </a:rPr>
+              <a:t>Scan now </a:t>
+            </a:r>
+            <a:r>
+              <a:rPr sz="1900" b="0">
+                <a:solidFill>
+                  <a:srgbClr val="9AA4B2"/>
+                </a:solidFill>
+                <a:latin typeface="Helvetica Neue"/>
+              </a:rPr>
+              <a:t>— the form is prefilled with this workshop; it takes a minute</a:t>
+            </a:r>
+          </a:p>
+          <a:p>
+            <a:pPr algn="l">
+              <a:spcAft>
+                <a:spcPts val="1200"/>
+              </a:spcAft>
+            </a:pPr>
+            <a:r>
+              <a:rPr sz="1900" b="1">
+                <a:solidFill>
+                  <a:srgbClr val="FF6D04"/>
+                </a:solidFill>
+                <a:latin typeface="Helvetica Neue"/>
+              </a:rPr>
+              <a:t>•  </a:t>
+            </a:r>
+            <a:r>
+              <a:rPr sz="1900" b="1">
+                <a:solidFill>
+                  <a:srgbClr val="F2F4F7"/>
+                </a:solidFill>
+                <a:latin typeface="Helvetica Neue"/>
+              </a:rPr>
+              <a:t>Credits + onboarding </a:t>
+            </a:r>
+            <a:r>
+              <a:rPr sz="1900" b="0">
+                <a:solidFill>
+                  <a:srgbClr val="9AA4B2"/>
+                </a:solidFill>
+                <a:latin typeface="Helvetica Neue"/>
+              </a:rPr>
+              <a:t>— from sign-up to first job with a human, not a doc dump</a:t>
+            </a:r>
+          </a:p>
+          <a:p>
+            <a:pPr algn="l">
+              <a:spcAft>
+                <a:spcPts val="1200"/>
+              </a:spcAft>
+            </a:pPr>
+            <a:r>
+              <a:rPr sz="1900" b="1">
+                <a:solidFill>
+                  <a:srgbClr val="FF6D04"/>
+                </a:solidFill>
+                <a:latin typeface="Helvetica Neue"/>
+              </a:rPr>
+              <a:t>•  </a:t>
+            </a:r>
+            <a:r>
+              <a:rPr sz="1900" b="1">
+                <a:solidFill>
+                  <a:srgbClr val="F2F4F7"/>
+                </a:solidFill>
+                <a:latin typeface="Helvetica Neue"/>
+              </a:rPr>
+              <a:t>Serverless, Workbench, Token Factory </a:t>
+            </a:r>
+            <a:r>
+              <a:rPr sz="1900" b="0">
+                <a:solidFill>
+                  <a:srgbClr val="9AA4B2"/>
+                </a:solidFill>
+                <a:latin typeface="Helvetica Neue"/>
+              </a:rPr>
+              <a:t>— everything you saw today</a:t>
+            </a:r>
+          </a:p>
+          <a:p>
+            <a:pPr algn="l">
+              <a:spcAft>
+                <a:spcPts val="1200"/>
+              </a:spcAft>
+            </a:pPr>
+            <a:r>
+              <a:rPr sz="1900" b="1">
+                <a:solidFill>
+                  <a:srgbClr val="FF6D04"/>
+                </a:solidFill>
+                <a:latin typeface="Helvetica Neue"/>
+              </a:rPr>
+              <a:t>•  </a:t>
+            </a:r>
+            <a:r>
+              <a:rPr sz="1900" b="1">
+                <a:solidFill>
+                  <a:srgbClr val="F2F4F7"/>
+                </a:solidFill>
+                <a:latin typeface="Helvetica Neue"/>
+              </a:rPr>
+              <a:t>Bring your recordings </a:t>
+            </a:r>
+            <a:r>
+              <a:rPr sz="1900" b="0">
+                <a:solidFill>
+                  <a:srgbClr val="9AA4B2"/>
+                </a:solidFill>
+                <a:latin typeface="Helvetica Neue"/>
+              </a:rPr>
+              <a:t>— the repo's job helper works on your bucket unchanged</a:t>
+            </a:r>
+          </a:p>
+        </p:txBody>
+      </p:sp>
+      <p:pic>
+        <p:nvPicPr>
+          <p:cNvPr id="7" name="Picture 6" descr="nebius-berlin.png"/>
+          <p:cNvPicPr>
+            <a:picLocks noChangeAspect="1"/>
+          </p:cNvPicPr>
+          <p:nvPr/>
+        </p:nvPicPr>
+        <p:blipFill>
+          <a:blip r:embed="rId3"/>
+          <a:stretch>
+            <a:fillRect/>
+          </a:stretch>
+        </p:blipFill>
+        <p:spPr>
+          <a:xfrm>
+            <a:off x="8412480" y="1920240"/>
+            <a:ext cx="2926080" cy="2926080"/>
+          </a:xfrm>
+          <a:prstGeom prst="rect">
+            <a:avLst/>
+          </a:prstGeom>
+        </p:spPr>
+      </p:pic>
+      <p:sp>
+        <p:nvSpPr>
+          <p:cNvPr id="8" name="TextBox 7"/>
+          <p:cNvSpPr txBox="1"/>
+          <p:nvPr/>
+        </p:nvSpPr>
+        <p:spPr>
+          <a:xfrm>
+            <a:off x="7253935" y="4892040"/>
+            <a:ext cx="4754880" cy="365760"/>
+          </a:xfrm>
+          <a:prstGeom prst="rect">
+            <a:avLst/>
+          </a:prstGeom>
+          <a:noFill/>
+        </p:spPr>
+        <p:txBody>
+          <a:bodyPr wrap="square" anchor="t">
+            <a:spAutoFit/>
+          </a:bodyPr>
+          <a:lstStyle/>
+          <a:p>
+            <a:pPr algn="ctr"/>
+            <a:r>
+              <a:rPr sz="1300" b="0">
+                <a:solidFill>
+                  <a:srgbClr val="9AA4B2"/>
+                </a:solidFill>
+                <a:latin typeface="Menlo"/>
+              </a:rPr>
+              <a:t>link.voxel51.com/nebius-berlin</a:t>
+            </a:r>
+          </a:p>
+        </p:txBody>
+      </p:sp>
+    </p:spTree>
+  </p:cSld>
+  <p:clrMapOvr>
+    <a:masterClrMapping/>
+  </p:clrMapOvr>
+</p:sld>
+</file>
+
+<file path=ppt/slides/slide27.xml><?xml version="1.0" encoding="utf-8"?>
+<p:sld xmlns:a="http://schemas.openxmlformats.org/drawingml/2006/main" xmlns:p="http://schemas.openxmlformats.org/presentationml/2006/main" xmlns:r="http://schemas.openxmlformats.org/officeDocument/2006/relationships">
+  <p:cSld>
+    <p:bg>
+      <p:bgPr>
+        <a:solidFill>
+          <a:srgbClr val="0B0F14"/>
+        </a:solidFill>
+        <a:effectLst/>
+      </p:bgPr>
+    </p:bg>
+    <p:spTree>
+      <p:nvGrpSpPr>
+        <p:cNvPr id="1" name=""/>
+        <p:cNvGrpSpPr/>
+        <p:nvPr/>
+      </p:nvGrpSpPr>
+      <p:grpSpPr/>
+      <p:sp>
+        <p:nvSpPr>
+          <p:cNvPr id="2" name="TextBox 1"/>
+          <p:cNvSpPr txBox="1"/>
+          <p:nvPr/>
+        </p:nvSpPr>
+        <p:spPr>
+          <a:xfrm>
+            <a:off x="548640" y="6400800"/>
+            <a:ext cx="7315200" cy="320040"/>
+          </a:xfrm>
+          <a:prstGeom prst="rect">
+            <a:avLst/>
+          </a:prstGeom>
+          <a:noFill/>
+        </p:spPr>
+        <p:txBody>
+          <a:bodyPr wrap="square" anchor="t">
+            <a:spAutoFit/>
+          </a:bodyPr>
+          <a:lstStyle/>
+          <a:p>
+            <a:pPr algn="l"/>
+            <a:r>
+              <a:rPr sz="1100" b="0">
+                <a:solidFill>
+                  <a:srgbClr val="9AA4B2"/>
+                </a:solidFill>
+                <a:latin typeface="Helvetica Neue"/>
+              </a:rPr>
+              <a:t>Nebius × Voxel51 · Physical AI Workshop</a:t>
+            </a:r>
+          </a:p>
+        </p:txBody>
+      </p:sp>
+      <p:sp>
+        <p:nvSpPr>
+          <p:cNvPr id="3" name="TextBox 2"/>
+          <p:cNvSpPr txBox="1"/>
+          <p:nvPr/>
+        </p:nvSpPr>
+        <p:spPr>
+          <a:xfrm>
+            <a:off x="10972800" y="6400800"/>
+            <a:ext cx="731520" cy="320040"/>
+          </a:xfrm>
+          <a:prstGeom prst="rect">
+            <a:avLst/>
+          </a:prstGeom>
+          <a:noFill/>
+        </p:spPr>
+        <p:txBody>
+          <a:bodyPr wrap="square" anchor="t">
+            <a:spAutoFit/>
+          </a:bodyPr>
+          <a:lstStyle/>
+          <a:p>
+            <a:pPr algn="r"/>
+            <a:r>
+              <a:rPr sz="1100" b="0">
+                <a:solidFill>
+                  <a:srgbClr val="9AA4B2"/>
+                </a:solidFill>
+                <a:latin typeface="Helvetica Neue"/>
+              </a:rPr>
+              <a:t>27</a:t>
             </a:r>
           </a:p>
         </p:txBody>
